--- a/геометрические преобразования изображений/Лабораторная_3_Травкова_Лебедкин.pptx
+++ b/геометрические преобразования изображений/Лабораторная_3_Травкова_Лебедкин.pptx
@@ -5,7 +5,7 @@
     <p:sldMasterId id="2147483648" r:id="rId1"/>
   </p:sldMasterIdLst>
   <p:notesMasterIdLst>
-    <p:notesMasterId r:id="rId15"/>
+    <p:notesMasterId r:id="rId16"/>
   </p:notesMasterIdLst>
   <p:sldIdLst>
     <p:sldId id="256" r:id="rId2"/>
@@ -19,8 +19,9 @@
     <p:sldId id="264" r:id="rId10"/>
     <p:sldId id="265" r:id="rId11"/>
     <p:sldId id="266" r:id="rId12"/>
-    <p:sldId id="267" r:id="rId13"/>
-    <p:sldId id="268" r:id="rId14"/>
+    <p:sldId id="269" r:id="rId13"/>
+    <p:sldId id="267" r:id="rId14"/>
+    <p:sldId id="268" r:id="rId15"/>
   </p:sldIdLst>
   <p:sldSz cx="12192000" cy="6858000"/>
   <p:notesSz cx="6858000" cy="9144000"/>
@@ -765,6 +766,11 @@
         </p:txBody>
       </p:sp>
     </p:spTree>
+    <p:extLst>
+      <p:ext uri="{BB962C8B-B14F-4D97-AF65-F5344CB8AC3E}">
+        <p14:creationId xmlns:p14="http://schemas.microsoft.com/office/powerpoint/2010/main" val="2734064737"/>
+      </p:ext>
+    </p:extLst>
   </p:cSld>
   <p:clrMapOvr>
     <a:masterClrMapping/>
@@ -773,6 +779,83 @@
 </file>
 
 <file path=ppt/notesSlides/notesSlide13.xml><?xml version="1.0" encoding="utf-8"?>
+<p:notes xmlns:a="http://schemas.openxmlformats.org/drawingml/2006/main" xmlns:r="http://schemas.openxmlformats.org/officeDocument/2006/relationships" xmlns:p="http://schemas.openxmlformats.org/presentationml/2006/main">
+  <p:cSld>
+    <p:spTree>
+      <p:nvGrpSpPr>
+        <p:cNvPr id="1" name=""/>
+        <p:cNvGrpSpPr/>
+        <p:nvPr/>
+      </p:nvGrpSpPr>
+      <p:grpSpPr>
+        <a:xfrm>
+          <a:off x="0" y="0"/>
+          <a:ext cx="0" cy="0"/>
+          <a:chOff x="0" y="0"/>
+          <a:chExt cx="0" cy="0"/>
+        </a:xfrm>
+      </p:grpSpPr>
+      <p:sp>
+        <p:nvSpPr>
+          <p:cNvPr id="2" name="Slide Image Placeholder 1"/>
+          <p:cNvSpPr>
+            <a:spLocks noGrp="1" noRot="1" noChangeAspect="1"/>
+          </p:cNvSpPr>
+          <p:nvPr>
+            <p:ph type="sldImg"/>
+          </p:nvPr>
+        </p:nvSpPr>
+        <p:spPr/>
+      </p:sp>
+      <p:sp>
+        <p:nvSpPr>
+          <p:cNvPr id="3" name="Notes Placeholder 2"/>
+          <p:cNvSpPr>
+            <a:spLocks noGrp="1"/>
+          </p:cNvSpPr>
+          <p:nvPr>
+            <p:ph type="body" idx="1"/>
+          </p:nvPr>
+        </p:nvSpPr>
+        <p:spPr/>
+        <p:txBody>
+          <a:bodyPr/>
+          <a:lstStyle/>
+          <a:p>
+            <a:r>
+              <a:t>Источник: lab3.ipynb, вариант 4. Изображения взяты из сохранённых выводов ноутбука, без повторного выполнения и изменения результатов. Оформление взято из приложенной презентации лабораторной работы №2.</a:t>
+            </a:r>
+          </a:p>
+        </p:txBody>
+      </p:sp>
+      <p:sp>
+        <p:nvSpPr>
+          <p:cNvPr id="4" name="Slide Number Placeholder 3"/>
+          <p:cNvSpPr>
+            <a:spLocks noGrp="1"/>
+          </p:cNvSpPr>
+          <p:nvPr>
+            <p:ph type="sldNum" idx="5"/>
+          </p:nvPr>
+        </p:nvSpPr>
+        <p:spPr/>
+        <p:txBody>
+          <a:bodyPr/>
+          <a:lstStyle/>
+          <a:p>
+            <a:endParaRPr/>
+          </a:p>
+        </p:txBody>
+      </p:sp>
+    </p:spTree>
+  </p:cSld>
+  <p:clrMapOvr>
+    <a:masterClrMapping/>
+  </p:clrMapOvr>
+</p:notes>
+</file>
+
+<file path=ppt/notesSlides/notesSlide14.xml><?xml version="1.0" encoding="utf-8"?>
 <p:notes xmlns:a="http://schemas.openxmlformats.org/drawingml/2006/main" xmlns:r="http://schemas.openxmlformats.org/officeDocument/2006/relationships" xmlns:p="http://schemas.openxmlformats.org/presentationml/2006/main">
   <p:cSld>
     <p:spTree>
@@ -1797,7 +1880,7 @@
           </a:lstStyle>
           <a:p>
             <a:fld id="{9EC08F63-68FD-44F9-A52E-105615C8C7C5}" type="datetime1">
-              <a:t>08.10.2026</a:t>
+              <a:t>14.10.2026</a:t>
             </a:fld>
             <a:endParaRPr/>
           </a:p>
@@ -2144,7 +2227,7 @@
           </a:lstStyle>
           <a:p>
             <a:fld id="{60F6139E-B88E-4434-A7F1-B43174DC65B6}" type="datetime1">
-              <a:t>08.10.2026</a:t>
+              <a:t>14.10.2026</a:t>
             </a:fld>
             <a:endParaRPr/>
           </a:p>
@@ -2520,7 +2603,7 @@
           </a:lstStyle>
           <a:p>
             <a:fld id="{74670348-D143-436F-9129-EED979619D28}" type="datetime1">
-              <a:t>08.10.2026</a:t>
+              <a:t>14.10.2026</a:t>
             </a:fld>
             <a:endParaRPr/>
           </a:p>
@@ -2749,7 +2832,7 @@
           </a:lstStyle>
           <a:p>
             <a:fld id="{0BF40F54-ED29-4155-B487-1AE9DC91D7FE}" type="datetime1">
-              <a:t>08.10.2026</a:t>
+              <a:t>14.10.2026</a:t>
             </a:fld>
             <a:endParaRPr/>
           </a:p>
@@ -3125,7 +3208,7 @@
           <a:lstStyle/>
           <a:p>
             <a:fld id="{4A6BD9A3-5529-4EFB-87FC-DF25E53CA87E}" type="datetime1">
-              <a:t>08.10.2026</a:t>
+              <a:t>14.10.2026</a:t>
             </a:fld>
             <a:endParaRPr/>
           </a:p>
@@ -3581,7 +3664,7 @@
           <a:lstStyle/>
           <a:p>
             <a:fld id="{B1EAD283-6F5C-4FE7-96A5-7DA948460113}" type="datetime1">
-              <a:t>08.10.2026</a:t>
+              <a:t>14.10.2026</a:t>
             </a:fld>
             <a:endParaRPr/>
           </a:p>
@@ -3923,7 +4006,7 @@
           </a:lstStyle>
           <a:p>
             <a:fld id="{DDA65EB6-0C0C-4723-87DB-EADF164F8E5B}" type="datetime1">
-              <a:t>08.10.2026</a:t>
+              <a:t>14.10.2026</a:t>
             </a:fld>
             <a:endParaRPr/>
           </a:p>
@@ -4170,7 +4253,7 @@
           </a:lstStyle>
           <a:p>
             <a:fld id="{F2CEB32D-B953-42BB-A23C-01EA4E11BFF7}" type="datetime1">
-              <a:t>08.10.2026</a:t>
+              <a:t>14.10.2026</a:t>
             </a:fld>
             <a:endParaRPr/>
           </a:p>
@@ -4539,7 +4622,7 @@
           <a:lstStyle/>
           <a:p>
             <a:fld id="{2B12F209-C4FA-40C7-B9A5-2CBFF18E338A}" type="datetime1">
-              <a:t>08.10.2026</a:t>
+              <a:t>14.10.2026</a:t>
             </a:fld>
             <a:endParaRPr/>
           </a:p>
@@ -5007,7 +5090,7 @@
           <a:lstStyle/>
           <a:p>
             <a:fld id="{3CB83988-88B5-4B4B-8004-AD74D8DCA8B3}" type="datetime1">
-              <a:t>08.10.2026</a:t>
+              <a:t>14.10.2026</a:t>
             </a:fld>
             <a:endParaRPr/>
           </a:p>
@@ -5288,7 +5371,7 @@
           <a:lstStyle/>
           <a:p>
             <a:fld id="{F298FEDD-BD0E-44D0-8A43-43D2423273A1}" type="datetime1">
-              <a:t>08.10.2026</a:t>
+              <a:t>14.10.2026</a:t>
             </a:fld>
             <a:endParaRPr/>
           </a:p>
@@ -5483,7 +5566,7 @@
           <a:lstStyle/>
           <a:p>
             <a:fld id="{8DED1C2B-1434-41FF-A42D-A6C0AEFEF163}" type="datetime1">
-              <a:t>08.10.2026</a:t>
+              <a:t>14.10.2026</a:t>
             </a:fld>
             <a:endParaRPr/>
           </a:p>
@@ -5726,7 +5809,7 @@
           <a:lstStyle/>
           <a:p>
             <a:fld id="{5E04A568-6778-4326-8F60-A8331F338313}" type="datetime1">
-              <a:t>08.10.2026</a:t>
+              <a:t>14.10.2026</a:t>
             </a:fld>
             <a:endParaRPr/>
           </a:p>
@@ -5927,7 +6010,7 @@
           <a:lstStyle/>
           <a:p>
             <a:fld id="{94CB9AFD-B43D-4A4E-A9CC-7CDD69DA6899}" type="datetime1">
-              <a:t>08.10.2026</a:t>
+              <a:t>14.10.2026</a:t>
             </a:fld>
             <a:endParaRPr/>
           </a:p>
@@ -6199,7 +6282,7 @@
           <a:lstStyle/>
           <a:p>
             <a:fld id="{9AAA61A5-2D62-4D26-A7C0-AD45D16A75BB}" type="datetime1">
-              <a:t>08.10.2026</a:t>
+              <a:t>14.10.2026</a:t>
             </a:fld>
             <a:endParaRPr/>
           </a:p>
@@ -6625,7 +6708,7 @@
           <a:lstStyle/>
           <a:p>
             <a:fld id="{0FBDD8A3-B7B6-45A0-9AB1-D949B0E67CE8}" type="datetime1">
-              <a:t>08.10.2026</a:t>
+              <a:t>14.10.2026</a:t>
             </a:fld>
             <a:endParaRPr/>
           </a:p>
@@ -6758,7 +6841,7 @@
           <a:lstStyle/>
           <a:p>
             <a:fld id="{9182F61C-F6E6-4155-9694-A3D31334F45B}" type="datetime1">
-              <a:t>08.10.2026</a:t>
+              <a:t>14.10.2026</a:t>
             </a:fld>
             <a:endParaRPr/>
           </a:p>
@@ -6839,7 +6922,7 @@
           <a:lstStyle/>
           <a:p>
             <a:fld id="{63192F0B-BD47-4551-8555-95C7C7A64F41}" type="datetime1">
-              <a:t>08.10.2026</a:t>
+              <a:t>14.10.2026</a:t>
             </a:fld>
             <a:endParaRPr/>
           </a:p>
@@ -7104,7 +7187,7 @@
           <a:lstStyle/>
           <a:p>
             <a:fld id="{6D6B9F61-8169-4783-B8C4-4A18C4026503}" type="datetime1">
-              <a:t>08.10.2026</a:t>
+              <a:t>14.10.2026</a:t>
             </a:fld>
             <a:endParaRPr/>
           </a:p>
@@ -7344,7 +7427,7 @@
           <a:lstStyle/>
           <a:p>
             <a:fld id="{1F91BE9E-5F37-42CD-AF01-61AA02B5BBED}" type="datetime1">
-              <a:t>08.10.2026</a:t>
+              <a:t>14.10.2026</a:t>
             </a:fld>
             <a:endParaRPr/>
           </a:p>
@@ -7689,7 +7772,7 @@
           </a:lstStyle>
           <a:p>
             <a:fld id="{370F9359-BB8B-45FD-8B86-138FF0155BE1}" type="datetime1">
-              <a:t>08.10.2026</a:t>
+              <a:t>14.10.2026</a:t>
             </a:fld>
             <a:endParaRPr/>
           </a:p>
@@ -7950,7 +8033,7 @@
           </a:lstStyle>
           <a:p>
             <a:fld id="{5744E98A-C6CB-4740-94CF-7B79157857DC}" type="datetime1">
-              <a:t>08.10.2026</a:t>
+              <a:t>14.10.2026</a:t>
             </a:fld>
             <a:endParaRPr/>
           </a:p>
@@ -8144,7 +8227,7 @@
           </a:lstStyle>
           <a:p>
             <a:fld id="{8F314C3C-5380-447C-8C4A-80885D6C1B2B}" type="datetime1">
-              <a:t>08.10.2026</a:t>
+              <a:t>14.10.2026</a:t>
             </a:fld>
             <a:endParaRPr/>
           </a:p>
@@ -8403,7 +8486,7 @@
           <a:lstStyle/>
           <a:p>
             <a:fld id="{0F0B1818-EA50-4E6B-B1F5-269F22071F39}" type="datetime1">
-              <a:t>08.10.2026</a:t>
+              <a:t>14.10.2026</a:t>
             </a:fld>
             <a:endParaRPr/>
           </a:p>
@@ -8766,7 +8849,7 @@
           <a:lstStyle/>
           <a:p>
             <a:fld id="{E9E84084-15D7-4F36-859F-F56C53A6F4E5}" type="datetime1">
-              <a:t>08.10.2026</a:t>
+              <a:t>14.10.2026</a:t>
             </a:fld>
             <a:endParaRPr/>
           </a:p>
@@ -9001,7 +9084,7 @@
           <a:lstStyle/>
           <a:p>
             <a:fld id="{D4255E2A-8982-450C-A923-417B0C2E922F}" type="datetime1">
-              <a:t>08.10.2026</a:t>
+              <a:t>14.10.2026</a:t>
             </a:fld>
             <a:endParaRPr/>
           </a:p>
@@ -9236,7 +9319,7 @@
           <a:lstStyle/>
           <a:p>
             <a:fld id="{CDCAFA87-D25E-497C-A210-941991E7D2A4}" type="datetime1">
-              <a:t>08.10.2026</a:t>
+              <a:t>14.10.2026</a:t>
             </a:fld>
             <a:endParaRPr/>
           </a:p>
@@ -9490,7 +9573,7 @@
           </a:lstStyle>
           <a:p>
             <a:fld id="{6A14468A-DEFC-459E-8886-652A759B4AEF}" type="datetime1">
-              <a:t>08.10.2026</a:t>
+              <a:t>14.10.2026</a:t>
             </a:fld>
             <a:endParaRPr/>
           </a:p>
@@ -9997,7 +10080,7 @@
               </a:defRPr>
             </a:pPr>
             <a:r>
-              <a:rPr sz="2025" b="0">
+              <a:rPr sz="2025" b="0" dirty="0" err="1">
                 <a:solidFill>
                   <a:srgbClr val="8BC9C9"/>
                 </a:solidFill>
@@ -10005,7 +10088,40 @@
                 <a:ea typeface="DejaVu Sans"/>
                 <a:cs typeface="DejaVu Sans"/>
               </a:rPr>
-              <a:t>Лабораторная работа № 3.</a:t>
+              <a:t>Лабораторная</a:t>
+            </a:r>
+            <a:r>
+              <a:rPr sz="2025" b="0" dirty="0">
+                <a:solidFill>
+                  <a:srgbClr val="8BC9C9"/>
+                </a:solidFill>
+                <a:latin typeface="DejaVu Sans"/>
+                <a:ea typeface="DejaVu Sans"/>
+                <a:cs typeface="DejaVu Sans"/>
+              </a:rPr>
+              <a:t> </a:t>
+            </a:r>
+            <a:r>
+              <a:rPr sz="2025" b="0" dirty="0" err="1">
+                <a:solidFill>
+                  <a:srgbClr val="8BC9C9"/>
+                </a:solidFill>
+                <a:latin typeface="DejaVu Sans"/>
+                <a:ea typeface="DejaVu Sans"/>
+                <a:cs typeface="DejaVu Sans"/>
+              </a:rPr>
+              <a:t>работа</a:t>
+            </a:r>
+            <a:r>
+              <a:rPr sz="2025" b="0" dirty="0">
+                <a:solidFill>
+                  <a:srgbClr val="8BC9C9"/>
+                </a:solidFill>
+                <a:latin typeface="DejaVu Sans"/>
+                <a:ea typeface="DejaVu Sans"/>
+                <a:cs typeface="DejaVu Sans"/>
+              </a:rPr>
+              <a:t> № 3.</a:t>
             </a:r>
           </a:p>
         </p:txBody>
@@ -10058,7 +10174,7 @@
               </a:defRPr>
             </a:pPr>
             <a:r>
-              <a:rPr sz="4350" b="1">
+              <a:rPr sz="4350" b="1" dirty="0" err="1">
                 <a:solidFill>
                   <a:srgbClr val="FFFFFF"/>
                 </a:solidFill>
@@ -10068,6 +10184,14 @@
               </a:rPr>
               <a:t>Геометрические</a:t>
             </a:r>
+            <a:endParaRPr sz="4350" b="1" dirty="0">
+              <a:solidFill>
+                <a:srgbClr val="FFFFFF"/>
+              </a:solidFill>
+              <a:latin typeface="DejaVu Sans"/>
+              <a:ea typeface="DejaVu Sans"/>
+              <a:cs typeface="DejaVu Sans"/>
+            </a:endParaRPr>
           </a:p>
           <a:p>
             <a:pPr algn="l">
@@ -10085,7 +10209,7 @@
               </a:defRPr>
             </a:pPr>
             <a:r>
-              <a:rPr sz="4350" b="1">
+              <a:rPr sz="4350" b="1" dirty="0" err="1">
                 <a:solidFill>
                   <a:srgbClr val="FFFFFF"/>
                 </a:solidFill>
@@ -10095,6 +10219,14 @@
               </a:rPr>
               <a:t>преобразования</a:t>
             </a:r>
+            <a:endParaRPr sz="4350" b="1" dirty="0">
+              <a:solidFill>
+                <a:srgbClr val="FFFFFF"/>
+              </a:solidFill>
+              <a:latin typeface="DejaVu Sans"/>
+              <a:ea typeface="DejaVu Sans"/>
+              <a:cs typeface="DejaVu Sans"/>
+            </a:endParaRPr>
           </a:p>
           <a:p>
             <a:pPr algn="l">
@@ -10112,7 +10244,7 @@
               </a:defRPr>
             </a:pPr>
             <a:r>
-              <a:rPr sz="4350" b="1">
+              <a:rPr sz="4350" b="1" dirty="0" err="1">
                 <a:solidFill>
                   <a:srgbClr val="FFFFFF"/>
                 </a:solidFill>
@@ -10122,6 +10254,14 @@
               </a:rPr>
               <a:t>изображений</a:t>
             </a:r>
+            <a:endParaRPr sz="4350" b="1" dirty="0">
+              <a:solidFill>
+                <a:srgbClr val="FFFFFF"/>
+              </a:solidFill>
+              <a:latin typeface="DejaVu Sans"/>
+              <a:ea typeface="DejaVu Sans"/>
+              <a:cs typeface="DejaVu Sans"/>
+            </a:endParaRPr>
           </a:p>
         </p:txBody>
       </p:sp>
@@ -10261,7 +10401,7 @@
               </a:defRPr>
             </a:pPr>
             <a:r>
-              <a:rPr sz="10050" b="0">
+              <a:rPr sz="10050" b="0" dirty="0">
                 <a:solidFill>
                   <a:srgbClr val="39767D"/>
                 </a:solidFill>
@@ -11410,6 +11550,318 @@
     <p:bg>
       <p:bgPr>
         <a:solidFill>
+          <a:srgbClr val="FFFFFF"/>
+        </a:solidFill>
+        <a:effectLst/>
+      </p:bgPr>
+    </p:bg>
+    <p:spTree>
+      <p:nvGrpSpPr>
+        <p:cNvPr id="1" name=""/>
+        <p:cNvGrpSpPr/>
+        <p:nvPr/>
+      </p:nvGrpSpPr>
+      <p:grpSpPr>
+        <a:xfrm>
+          <a:off x="0" y="0"/>
+          <a:ext cx="0" cy="0"/>
+          <a:chOff x="0" y="0"/>
+          <a:chExt cx="0" cy="0"/>
+        </a:xfrm>
+      </p:grpSpPr>
+      <p:sp>
+        <p:nvSpPr>
+          <p:cNvPr id="6" name="Прямоугольник 5">
+            <a:extLst>
+              <a:ext uri="{FF2B5EF4-FFF2-40B4-BE49-F238E27FC236}">
+                <a16:creationId xmlns:a16="http://schemas.microsoft.com/office/drawing/2014/main" id="{6C9D2B2F-2DD3-4BC9-9415-20ED65E067BC}"/>
+              </a:ext>
+            </a:extLst>
+          </p:cNvPr>
+          <p:cNvSpPr>
+            <a:spLocks noGrp="1"/>
+          </p:cNvSpPr>
+          <p:nvPr/>
+        </p:nvSpPr>
+        <p:spPr>
+          <a:xfrm>
+            <a:off x="533400" y="371475"/>
+            <a:ext cx="11125200" cy="228600"/>
+          </a:xfrm>
+          <a:prstGeom prst="rect">
+            <a:avLst/>
+          </a:prstGeom>
+          <a:noFill/>
+          <a:ln w="0">
+            <a:noFill/>
+          </a:ln>
+        </p:spPr>
+        <p:txBody>
+          <a:bodyPr lIns="0" tIns="0" rIns="0" bIns="0" anchor="t">
+            <a:noAutofit/>
+          </a:bodyPr>
+          <a:lstStyle/>
+          <a:p>
+            <a:pPr algn="l">
+              <a:lnSpc>
+                <a:spcPct val="113000"/>
+              </a:lnSpc>
+              <a:buNone/>
+              <a:defRPr sz="1275" b="1">
+                <a:solidFill>
+                  <a:srgbClr val="237E80"/>
+                </a:solidFill>
+                <a:latin typeface="DejaVu Sans"/>
+                <a:ea typeface="DejaVu Sans"/>
+                <a:cs typeface="DejaVu Sans"/>
+              </a:defRPr>
+            </a:pPr>
+            <a:r>
+              <a:rPr sz="1275" b="1">
+                <a:solidFill>
+                  <a:srgbClr val="237E80"/>
+                </a:solidFill>
+                <a:latin typeface="DejaVu Sans"/>
+                <a:ea typeface="DejaVu Sans"/>
+                <a:cs typeface="DejaVu Sans"/>
+              </a:rPr>
+              <a:t>Задание 5.</a:t>
+            </a:r>
+          </a:p>
+        </p:txBody>
+      </p:sp>
+      <p:sp>
+        <p:nvSpPr>
+          <p:cNvPr id="2" name="Прямоугольник 1">
+            <a:extLst>
+              <a:ext uri="{FF2B5EF4-FFF2-40B4-BE49-F238E27FC236}">
+                <a16:creationId xmlns:a16="http://schemas.microsoft.com/office/drawing/2014/main" id="{5437F7F6-DEFE-4DC4-9DB2-CD600EFA4866}"/>
+              </a:ext>
+            </a:extLst>
+          </p:cNvPr>
+          <p:cNvSpPr>
+            <a:spLocks noGrp="1"/>
+          </p:cNvSpPr>
+          <p:nvPr/>
+        </p:nvSpPr>
+        <p:spPr>
+          <a:xfrm>
+            <a:off x="533400" y="733425"/>
+            <a:ext cx="11125200" cy="628650"/>
+          </a:xfrm>
+          <a:prstGeom prst="rect">
+            <a:avLst/>
+          </a:prstGeom>
+          <a:noFill/>
+          <a:ln w="0">
+            <a:noFill/>
+          </a:ln>
+        </p:spPr>
+        <p:txBody>
+          <a:bodyPr lIns="0" tIns="0" rIns="0" bIns="0" anchor="t">
+            <a:noAutofit/>
+          </a:bodyPr>
+          <a:lstStyle/>
+          <a:p>
+            <a:pPr algn="l">
+              <a:lnSpc>
+                <a:spcPct val="113000"/>
+              </a:lnSpc>
+              <a:buNone/>
+              <a:defRPr sz="2925" b="1">
+                <a:solidFill>
+                  <a:srgbClr val="20333D"/>
+                </a:solidFill>
+                <a:latin typeface="DejaVu Sans"/>
+                <a:ea typeface="DejaVu Sans"/>
+                <a:cs typeface="DejaVu Sans"/>
+              </a:defRPr>
+            </a:pPr>
+            <a:r>
+              <a:rPr sz="2925" b="1">
+                <a:solidFill>
+                  <a:srgbClr val="20333D"/>
+                </a:solidFill>
+                <a:latin typeface="DejaVu Sans"/>
+                <a:ea typeface="DejaVu Sans"/>
+                <a:cs typeface="DejaVu Sans"/>
+              </a:rPr>
+              <a:t>Результат перспективного преобразования</a:t>
+            </a:r>
+          </a:p>
+        </p:txBody>
+      </p:sp>
+      <p:sp>
+        <p:nvSpPr>
+          <p:cNvPr id="3" name="Прямоугольник 2">
+            <a:extLst>
+              <a:ext uri="{FF2B5EF4-FFF2-40B4-BE49-F238E27FC236}">
+                <a16:creationId xmlns:a16="http://schemas.microsoft.com/office/drawing/2014/main" id="{38F981B7-E74D-4881-B033-ACFCB3E21F8B}"/>
+              </a:ext>
+            </a:extLst>
+          </p:cNvPr>
+          <p:cNvSpPr>
+            <a:spLocks noGrp="1"/>
+          </p:cNvSpPr>
+          <p:nvPr/>
+        </p:nvSpPr>
+        <p:spPr>
+          <a:xfrm>
+            <a:off x="11068050" y="6448425"/>
+            <a:ext cx="609600" cy="228600"/>
+          </a:xfrm>
+          <a:prstGeom prst="rect">
+            <a:avLst/>
+          </a:prstGeom>
+          <a:noFill/>
+          <a:ln w="0">
+            <a:noFill/>
+          </a:ln>
+        </p:spPr>
+        <p:txBody>
+          <a:bodyPr lIns="0" tIns="0" rIns="0" bIns="0" anchor="t">
+            <a:noAutofit/>
+          </a:bodyPr>
+          <a:lstStyle/>
+          <a:p>
+            <a:pPr algn="l">
+              <a:lnSpc>
+                <a:spcPct val="113000"/>
+              </a:lnSpc>
+              <a:buNone/>
+              <a:defRPr sz="1050" b="0">
+                <a:solidFill>
+                  <a:srgbClr val="566872"/>
+                </a:solidFill>
+                <a:latin typeface="DejaVu Sans"/>
+                <a:ea typeface="DejaVu Sans"/>
+                <a:cs typeface="DejaVu Sans"/>
+              </a:defRPr>
+            </a:pPr>
+            <a:r>
+              <a:rPr sz="1050" b="0">
+                <a:solidFill>
+                  <a:srgbClr val="566872"/>
+                </a:solidFill>
+                <a:latin typeface="DejaVu Sans"/>
+                <a:ea typeface="DejaVu Sans"/>
+                <a:cs typeface="DejaVu Sans"/>
+              </a:rPr>
+              <a:t>11</a:t>
+            </a:r>
+          </a:p>
+        </p:txBody>
+      </p:sp>
+      <p:sp>
+        <p:nvSpPr>
+          <p:cNvPr id="5" name="Прямоугольник 4">
+            <a:extLst>
+              <a:ext uri="{FF2B5EF4-FFF2-40B4-BE49-F238E27FC236}">
+                <a16:creationId xmlns:a16="http://schemas.microsoft.com/office/drawing/2014/main" id="{4C992494-2B48-47D4-881A-D626F3184909}"/>
+              </a:ext>
+            </a:extLst>
+          </p:cNvPr>
+          <p:cNvSpPr>
+            <a:spLocks noGrp="1"/>
+          </p:cNvSpPr>
+          <p:nvPr/>
+        </p:nvSpPr>
+        <p:spPr>
+          <a:xfrm>
+            <a:off x="533400" y="5905500"/>
+            <a:ext cx="11125200" cy="552450"/>
+          </a:xfrm>
+          <a:prstGeom prst="rect">
+            <a:avLst/>
+          </a:prstGeom>
+          <a:noFill/>
+          <a:ln w="0">
+            <a:noFill/>
+          </a:ln>
+        </p:spPr>
+        <p:txBody>
+          <a:bodyPr lIns="0" tIns="0" rIns="0" bIns="0" anchor="t">
+            <a:noAutofit/>
+          </a:bodyPr>
+          <a:lstStyle/>
+          <a:p>
+            <a:pPr>
+              <a:lnSpc>
+                <a:spcPct val="113000"/>
+              </a:lnSpc>
+              <a:defRPr sz="1650" b="0">
+                <a:solidFill>
+                  <a:srgbClr val="566872"/>
+                </a:solidFill>
+                <a:latin typeface="DejaVu Sans"/>
+                <a:ea typeface="DejaVu Sans"/>
+                <a:cs typeface="DejaVu Sans"/>
+              </a:defRPr>
+            </a:pPr>
+            <a:r>
+              <a:rPr lang="ru-RU" sz="1650" dirty="0"/>
+              <a:t>Результат показывает качественное «выпрямление» обложки: углы выровнены, перспектива устранена, детализация и цветовая гамма сохранены. </a:t>
+            </a:r>
+            <a:endParaRPr sz="1650" b="0" dirty="0">
+              <a:solidFill>
+                <a:srgbClr val="566872"/>
+              </a:solidFill>
+              <a:latin typeface="DejaVu Sans"/>
+              <a:ea typeface="DejaVu Sans"/>
+              <a:cs typeface="DejaVu Sans"/>
+            </a:endParaRPr>
+          </a:p>
+        </p:txBody>
+      </p:sp>
+      <p:pic>
+        <p:nvPicPr>
+          <p:cNvPr id="4" name="Рисунок 3">
+            <a:extLst>
+              <a:ext uri="{FF2B5EF4-FFF2-40B4-BE49-F238E27FC236}">
+                <a16:creationId xmlns:a16="http://schemas.microsoft.com/office/drawing/2014/main" id="{041ED396-493F-4BE9-AE34-C19993F9402D}"/>
+              </a:ext>
+            </a:extLst>
+          </p:cNvPr>
+          <p:cNvPicPr>
+            <a:picLocks noChangeAspect="1"/>
+          </p:cNvPicPr>
+          <p:nvPr/>
+        </p:nvPicPr>
+        <p:blipFill>
+          <a:blip r:embed="rId3"/>
+          <a:stretch>
+            <a:fillRect/>
+          </a:stretch>
+        </p:blipFill>
+        <p:spPr>
+          <a:xfrm>
+            <a:off x="2175084" y="1495425"/>
+            <a:ext cx="7841832" cy="4102209"/>
+          </a:xfrm>
+          <a:prstGeom prst="rect">
+            <a:avLst/>
+          </a:prstGeom>
+        </p:spPr>
+      </p:pic>
+    </p:spTree>
+    <p:extLst>
+      <p:ext uri="{BB962C8B-B14F-4D97-AF65-F5344CB8AC3E}">
+        <p14:creationId xmlns:p14="http://schemas.microsoft.com/office/powerpoint/2010/main" val="3283507284"/>
+      </p:ext>
+    </p:extLst>
+  </p:cSld>
+  <p:clrMapOvr>
+    <a:masterClrMapping/>
+  </p:clrMapOvr>
+</p:sld>
+</file>
+
+<file path=ppt/slides/slide13.xml><?xml version="1.0" encoding="utf-8"?>
+<p:sld xmlns:a="http://schemas.openxmlformats.org/drawingml/2006/main" xmlns:r="http://schemas.openxmlformats.org/officeDocument/2006/relationships" xmlns:p="http://schemas.openxmlformats.org/presentationml/2006/main">
+  <p:cSld>
+    <p:bg>
+      <p:bgPr>
+        <a:solidFill>
           <a:srgbClr val="F1F6F6"/>
         </a:solidFill>
         <a:effectLst/>
@@ -12052,7 +12504,7 @@
 </p:sld>
 </file>
 
-<file path=ppt/slides/slide13.xml><?xml version="1.0" encoding="utf-8"?>
+<file path=ppt/slides/slide14.xml><?xml version="1.0" encoding="utf-8"?>
 <p:sld xmlns:a="http://schemas.openxmlformats.org/drawingml/2006/main" xmlns:r="http://schemas.openxmlformats.org/officeDocument/2006/relationships" xmlns:p="http://schemas.openxmlformats.org/presentationml/2006/main">
   <p:cSld>
     <p:bg>
@@ -12640,7 +13092,7 @@
               </a:defRPr>
             </a:pPr>
             <a:r>
-              <a:rPr sz="3150" b="1">
+              <a:rPr sz="3150" b="1" dirty="0" err="1">
                 <a:solidFill>
                   <a:srgbClr val="20333D"/>
                 </a:solidFill>
@@ -12648,8 +13100,38 @@
                 <a:ea typeface="DejaVu Sans"/>
                 <a:cs typeface="DejaVu Sans"/>
               </a:rPr>
-              <a:t>Задания 4 варианта</a:t>
-            </a:r>
+              <a:t>Задания</a:t>
+            </a:r>
+            <a:r>
+              <a:rPr sz="3150" b="1" dirty="0">
+                <a:solidFill>
+                  <a:srgbClr val="20333D"/>
+                </a:solidFill>
+                <a:latin typeface="DejaVu Sans"/>
+                <a:ea typeface="DejaVu Sans"/>
+                <a:cs typeface="DejaVu Sans"/>
+              </a:rPr>
+              <a:t> 4 </a:t>
+            </a:r>
+            <a:r>
+              <a:rPr sz="3150" b="1" dirty="0" err="1">
+                <a:solidFill>
+                  <a:srgbClr val="20333D"/>
+                </a:solidFill>
+                <a:latin typeface="DejaVu Sans"/>
+                <a:ea typeface="DejaVu Sans"/>
+                <a:cs typeface="DejaVu Sans"/>
+              </a:rPr>
+              <a:t>варианта</a:t>
+            </a:r>
+            <a:endParaRPr sz="3150" b="1" dirty="0">
+              <a:solidFill>
+                <a:srgbClr val="20333D"/>
+              </a:solidFill>
+              <a:latin typeface="DejaVu Sans"/>
+              <a:ea typeface="DejaVu Sans"/>
+              <a:cs typeface="DejaVu Sans"/>
+            </a:endParaRPr>
           </a:p>
         </p:txBody>
       </p:sp>

--- a/геометрические преобразования изображений/Лабораторная_3_Травкова_Лебедкин.pptx
+++ b/геометрические преобразования изображений/Лабораторная_3_Травкова_Лебедкин.pptx
@@ -352,166 +352,7 @@
           <a:bodyPr/>
           <a:lstStyle/>
           <a:p>
-            <a:r>
-              <a:rPr dirty="0" err="1"/>
-              <a:t>Источник</a:t>
-            </a:r>
-            <a:r>
-              <a:rPr dirty="0"/>
-              <a:t>: lab3.ipynb, </a:t>
-            </a:r>
-            <a:r>
-              <a:rPr dirty="0" err="1"/>
-              <a:t>вариант</a:t>
-            </a:r>
-            <a:r>
-              <a:rPr dirty="0"/>
-              <a:t> 4. </a:t>
-            </a:r>
-            <a:r>
-              <a:rPr dirty="0" err="1"/>
-              <a:t>Изображения</a:t>
-            </a:r>
-            <a:r>
-              <a:rPr dirty="0"/>
-              <a:t> </a:t>
-            </a:r>
-            <a:r>
-              <a:rPr dirty="0" err="1"/>
-              <a:t>взяты</a:t>
-            </a:r>
-            <a:r>
-              <a:rPr dirty="0"/>
-              <a:t> </a:t>
-            </a:r>
-            <a:r>
-              <a:rPr dirty="0" err="1"/>
-              <a:t>из</a:t>
-            </a:r>
-            <a:r>
-              <a:rPr dirty="0"/>
-              <a:t> </a:t>
-            </a:r>
-            <a:r>
-              <a:rPr dirty="0" err="1"/>
-              <a:t>сохранённых</a:t>
-            </a:r>
-            <a:r>
-              <a:rPr dirty="0"/>
-              <a:t> </a:t>
-            </a:r>
-            <a:r>
-              <a:rPr dirty="0" err="1"/>
-              <a:t>выводов</a:t>
-            </a:r>
-            <a:r>
-              <a:rPr dirty="0"/>
-              <a:t> </a:t>
-            </a:r>
-            <a:r>
-              <a:rPr dirty="0" err="1"/>
-              <a:t>ноутбука</a:t>
-            </a:r>
-            <a:r>
-              <a:rPr dirty="0"/>
-              <a:t>, </a:t>
-            </a:r>
-            <a:r>
-              <a:rPr dirty="0" err="1"/>
-              <a:t>без</a:t>
-            </a:r>
-            <a:r>
-              <a:rPr dirty="0"/>
-              <a:t> </a:t>
-            </a:r>
-            <a:r>
-              <a:rPr dirty="0" err="1"/>
-              <a:t>повторного</a:t>
-            </a:r>
-            <a:r>
-              <a:rPr dirty="0"/>
-              <a:t> </a:t>
-            </a:r>
-            <a:r>
-              <a:rPr dirty="0" err="1"/>
-              <a:t>выполнения</a:t>
-            </a:r>
-            <a:r>
-              <a:rPr dirty="0"/>
-              <a:t> и </a:t>
-            </a:r>
-            <a:r>
-              <a:rPr dirty="0" err="1"/>
-              <a:t>изменения</a:t>
-            </a:r>
-            <a:r>
-              <a:rPr dirty="0"/>
-              <a:t> </a:t>
-            </a:r>
-            <a:r>
-              <a:rPr dirty="0" err="1"/>
-              <a:t>результатов</a:t>
-            </a:r>
-            <a:r>
-              <a:rPr dirty="0"/>
-              <a:t>. </a:t>
-            </a:r>
-            <a:r>
-              <a:rPr dirty="0" err="1"/>
-              <a:t>Оформление</a:t>
-            </a:r>
-            <a:r>
-              <a:rPr dirty="0"/>
-              <a:t> </a:t>
-            </a:r>
-            <a:r>
-              <a:rPr dirty="0" err="1"/>
-              <a:t>взято</a:t>
-            </a:r>
-            <a:r>
-              <a:rPr dirty="0"/>
-              <a:t> </a:t>
-            </a:r>
-            <a:r>
-              <a:rPr dirty="0" err="1"/>
-              <a:t>из</a:t>
-            </a:r>
-            <a:r>
-              <a:rPr dirty="0"/>
-              <a:t> </a:t>
-            </a:r>
-            <a:r>
-              <a:rPr dirty="0" err="1"/>
-              <a:t>приложенной</a:t>
-            </a:r>
-            <a:r>
-              <a:rPr dirty="0"/>
-              <a:t> </a:t>
-            </a:r>
-            <a:r>
-              <a:rPr dirty="0" err="1"/>
-              <a:t>презентации</a:t>
-            </a:r>
-            <a:r>
-              <a:rPr dirty="0"/>
-              <a:t> </a:t>
-            </a:r>
-            <a:r>
-              <a:rPr dirty="0" err="1"/>
-              <a:t>лабораторной</a:t>
-            </a:r>
-            <a:r>
-              <a:rPr dirty="0"/>
-              <a:t> </a:t>
-            </a:r>
-            <a:r>
-              <a:rPr dirty="0" err="1"/>
-              <a:t>работы</a:t>
-            </a:r>
-            <a:r>
-              <a:rPr dirty="0"/>
-              <a:t> №2.</a:t>
-            </a:r>
+            <a:endParaRPr lang="ru-RU" dirty="0"/>
           </a:p>
         </p:txBody>
       </p:sp>
@@ -586,9 +427,7 @@
           <a:bodyPr/>
           <a:lstStyle/>
           <a:p>
-            <a:r>
-              <a:t>Источник: lab3.ipynb, вариант 4. Изображения взяты из сохранённых выводов ноутбука, без повторного выполнения и изменения результатов. Оформление взято из приложенной презентации лабораторной работы №2.</a:t>
-            </a:r>
+            <a:endParaRPr dirty="0"/>
           </a:p>
         </p:txBody>
       </p:sp>
@@ -663,9 +502,7 @@
           <a:bodyPr/>
           <a:lstStyle/>
           <a:p>
-            <a:r>
-              <a:t>Источник: lab3.ipynb, вариант 4. Изображения взяты из сохранённых выводов ноутбука, без повторного выполнения и изменения результатов. Оформление взято из приложенной презентации лабораторной работы №2.</a:t>
-            </a:r>
+            <a:endParaRPr dirty="0"/>
           </a:p>
         </p:txBody>
       </p:sp>
@@ -740,9 +577,7 @@
           <a:bodyPr/>
           <a:lstStyle/>
           <a:p>
-            <a:r>
-              <a:t>Источник: lab3.ipynb, вариант 4. Изображения взяты из сохранённых выводов ноутбука, без повторного выполнения и изменения результатов. Оформление взято из приложенной презентации лабораторной работы №2.</a:t>
-            </a:r>
+            <a:endParaRPr dirty="0"/>
           </a:p>
         </p:txBody>
       </p:sp>
@@ -822,9 +657,7 @@
           <a:bodyPr/>
           <a:lstStyle/>
           <a:p>
-            <a:r>
-              <a:t>Источник: lab3.ipynb, вариант 4. Изображения взяты из сохранённых выводов ноутбука, без повторного выполнения и изменения результатов. Оформление взято из приложенной презентации лабораторной работы №2.</a:t>
-            </a:r>
+            <a:endParaRPr dirty="0"/>
           </a:p>
         </p:txBody>
       </p:sp>
@@ -917,9 +750,7 @@
           <a:bodyPr/>
           <a:lstStyle/>
           <a:p>
-            <a:r>
-              <a:t>Источник: lab3.ipynb, вариант 4. Изображения взяты из сохранённых выводов ноутбука, без повторного выполнения и изменения результатов. Оформление взято из приложенной презентации лабораторной работы №2.</a:t>
-            </a:r>
+            <a:endParaRPr dirty="0"/>
           </a:p>
         </p:txBody>
       </p:sp>
@@ -1005,9 +836,7 @@
           <a:bodyPr/>
           <a:lstStyle/>
           <a:p>
-            <a:r>
-              <a:t>Источник: lab3.ipynb, вариант 4. Изображения взяты из сохранённых выводов ноутбука, без повторного выполнения и изменения результатов. Оформление взято из приложенной презентации лабораторной работы №2.</a:t>
-            </a:r>
+            <a:endParaRPr dirty="0"/>
           </a:p>
         </p:txBody>
       </p:sp>
@@ -1082,9 +911,7 @@
           <a:bodyPr/>
           <a:lstStyle/>
           <a:p>
-            <a:r>
-              <a:t>Источник: lab3.ipynb, вариант 4. Изображения взяты из сохранённых выводов ноутбука, без повторного выполнения и изменения результатов. Оформление взято из приложенной презентации лабораторной работы №2.</a:t>
-            </a:r>
+            <a:endParaRPr dirty="0"/>
           </a:p>
         </p:txBody>
       </p:sp>
@@ -1159,9 +986,7 @@
           <a:bodyPr/>
           <a:lstStyle/>
           <a:p>
-            <a:r>
-              <a:t>Источник: lab3.ipynb, вариант 4. Изображения взяты из сохранённых выводов ноутбука, без повторного выполнения и изменения результатов. Оформление взято из приложенной презентации лабораторной работы №2.</a:t>
-            </a:r>
+            <a:endParaRPr dirty="0"/>
           </a:p>
         </p:txBody>
       </p:sp>
@@ -1237,7 +1062,8 @@
           <a:lstStyle/>
           <a:p>
             <a:r>
-              <a:t>Источник: lab3.ipynb, вариант 4. Изображения взяты из сохранённых выводов ноутбука, без повторного выполнения и изменения результатов. Оформление взято из приложенной презентации лабораторной работы №2.</a:t>
+              <a:rPr dirty="0"/>
+              <a:t>.</a:t>
             </a:r>
           </a:p>
         </p:txBody>
@@ -1313,9 +1139,7 @@
           <a:bodyPr/>
           <a:lstStyle/>
           <a:p>
-            <a:r>
-              <a:t>Источник: lab3.ipynb, ячейка 9. Для изображения чётного размера центр сетки пикселей равен ((w−1)/2,(h−1)/2). В ноутбуке использован центр (w//2,h//2), поэтому результат может отличаться от cv2.flip(image,−1) на один пиксель и иметь заполненную границу. Результат сохранён без пересчёта.</a:t>
-            </a:r>
+            <a:endParaRPr dirty="0"/>
           </a:p>
         </p:txBody>
       </p:sp>
@@ -1390,9 +1214,7 @@
           <a:bodyPr/>
           <a:lstStyle/>
           <a:p>
-            <a:r>
-              <a:t>Источник: lab3.ipynb, вариант 4. Изображения взяты из сохранённых выводов ноутбука, без повторного выполнения и изменения результатов. Оформление взято из приложенной презентации лабораторной работы №2.</a:t>
-            </a:r>
+            <a:endParaRPr dirty="0"/>
           </a:p>
         </p:txBody>
       </p:sp>
@@ -1467,9 +1289,7 @@
           <a:bodyPr/>
           <a:lstStyle/>
           <a:p>
-            <a:r>
-              <a:t>Источник: lab3.ipynb, вариант 4. Изображения взяты из сохранённых выводов ноутбука, без повторного выполнения и изменения результатов. Оформление взято из приложенной презентации лабораторной работы №2.</a:t>
-            </a:r>
+            <a:endParaRPr dirty="0"/>
           </a:p>
         </p:txBody>
       </p:sp>
@@ -1544,9 +1364,7 @@
           <a:bodyPr/>
           <a:lstStyle/>
           <a:p>
-            <a:r>
-              <a:t>Источник: lab3.ipynb, вариант 4. Изображения взяты из сохранённых выводов ноутбука, без повторного выполнения и изменения результатов. Оформление взято из приложенной презентации лабораторной работы №2.</a:t>
-            </a:r>
+            <a:endParaRPr dirty="0"/>
           </a:p>
         </p:txBody>
       </p:sp>
@@ -1880,7 +1698,7 @@
           </a:lstStyle>
           <a:p>
             <a:fld id="{9EC08F63-68FD-44F9-A52E-105615C8C7C5}" type="datetime1">
-              <a:t>14.10.2026</a:t>
+              <a:t>15.10.2026</a:t>
             </a:fld>
             <a:endParaRPr/>
           </a:p>
@@ -2227,7 +2045,7 @@
           </a:lstStyle>
           <a:p>
             <a:fld id="{60F6139E-B88E-4434-A7F1-B43174DC65B6}" type="datetime1">
-              <a:t>14.10.2026</a:t>
+              <a:t>15.10.2026</a:t>
             </a:fld>
             <a:endParaRPr/>
           </a:p>
@@ -2603,7 +2421,7 @@
           </a:lstStyle>
           <a:p>
             <a:fld id="{74670348-D143-436F-9129-EED979619D28}" type="datetime1">
-              <a:t>14.10.2026</a:t>
+              <a:t>15.10.2026</a:t>
             </a:fld>
             <a:endParaRPr/>
           </a:p>
@@ -2832,7 +2650,7 @@
           </a:lstStyle>
           <a:p>
             <a:fld id="{0BF40F54-ED29-4155-B487-1AE9DC91D7FE}" type="datetime1">
-              <a:t>14.10.2026</a:t>
+              <a:t>15.10.2026</a:t>
             </a:fld>
             <a:endParaRPr/>
           </a:p>
@@ -3208,7 +3026,7 @@
           <a:lstStyle/>
           <a:p>
             <a:fld id="{4A6BD9A3-5529-4EFB-87FC-DF25E53CA87E}" type="datetime1">
-              <a:t>14.10.2026</a:t>
+              <a:t>15.10.2026</a:t>
             </a:fld>
             <a:endParaRPr/>
           </a:p>
@@ -3664,7 +3482,7 @@
           <a:lstStyle/>
           <a:p>
             <a:fld id="{B1EAD283-6F5C-4FE7-96A5-7DA948460113}" type="datetime1">
-              <a:t>14.10.2026</a:t>
+              <a:t>15.10.2026</a:t>
             </a:fld>
             <a:endParaRPr/>
           </a:p>
@@ -4006,7 +3824,7 @@
           </a:lstStyle>
           <a:p>
             <a:fld id="{DDA65EB6-0C0C-4723-87DB-EADF164F8E5B}" type="datetime1">
-              <a:t>14.10.2026</a:t>
+              <a:t>15.10.2026</a:t>
             </a:fld>
             <a:endParaRPr/>
           </a:p>
@@ -4253,7 +4071,7 @@
           </a:lstStyle>
           <a:p>
             <a:fld id="{F2CEB32D-B953-42BB-A23C-01EA4E11BFF7}" type="datetime1">
-              <a:t>14.10.2026</a:t>
+              <a:t>15.10.2026</a:t>
             </a:fld>
             <a:endParaRPr/>
           </a:p>
@@ -4622,7 +4440,7 @@
           <a:lstStyle/>
           <a:p>
             <a:fld id="{2B12F209-C4FA-40C7-B9A5-2CBFF18E338A}" type="datetime1">
-              <a:t>14.10.2026</a:t>
+              <a:t>15.10.2026</a:t>
             </a:fld>
             <a:endParaRPr/>
           </a:p>
@@ -5090,7 +4908,7 @@
           <a:lstStyle/>
           <a:p>
             <a:fld id="{3CB83988-88B5-4B4B-8004-AD74D8DCA8B3}" type="datetime1">
-              <a:t>14.10.2026</a:t>
+              <a:t>15.10.2026</a:t>
             </a:fld>
             <a:endParaRPr/>
           </a:p>
@@ -5371,7 +5189,7 @@
           <a:lstStyle/>
           <a:p>
             <a:fld id="{F298FEDD-BD0E-44D0-8A43-43D2423273A1}" type="datetime1">
-              <a:t>14.10.2026</a:t>
+              <a:t>15.10.2026</a:t>
             </a:fld>
             <a:endParaRPr/>
           </a:p>
@@ -5566,7 +5384,7 @@
           <a:lstStyle/>
           <a:p>
             <a:fld id="{8DED1C2B-1434-41FF-A42D-A6C0AEFEF163}" type="datetime1">
-              <a:t>14.10.2026</a:t>
+              <a:t>15.10.2026</a:t>
             </a:fld>
             <a:endParaRPr/>
           </a:p>
@@ -5809,7 +5627,7 @@
           <a:lstStyle/>
           <a:p>
             <a:fld id="{5E04A568-6778-4326-8F60-A8331F338313}" type="datetime1">
-              <a:t>14.10.2026</a:t>
+              <a:t>15.10.2026</a:t>
             </a:fld>
             <a:endParaRPr/>
           </a:p>
@@ -6010,7 +5828,7 @@
           <a:lstStyle/>
           <a:p>
             <a:fld id="{94CB9AFD-B43D-4A4E-A9CC-7CDD69DA6899}" type="datetime1">
-              <a:t>14.10.2026</a:t>
+              <a:t>15.10.2026</a:t>
             </a:fld>
             <a:endParaRPr/>
           </a:p>
@@ -6282,7 +6100,7 @@
           <a:lstStyle/>
           <a:p>
             <a:fld id="{9AAA61A5-2D62-4D26-A7C0-AD45D16A75BB}" type="datetime1">
-              <a:t>14.10.2026</a:t>
+              <a:t>15.10.2026</a:t>
             </a:fld>
             <a:endParaRPr/>
           </a:p>
@@ -6708,7 +6526,7 @@
           <a:lstStyle/>
           <a:p>
             <a:fld id="{0FBDD8A3-B7B6-45A0-9AB1-D949B0E67CE8}" type="datetime1">
-              <a:t>14.10.2026</a:t>
+              <a:t>15.10.2026</a:t>
             </a:fld>
             <a:endParaRPr/>
           </a:p>
@@ -6841,7 +6659,7 @@
           <a:lstStyle/>
           <a:p>
             <a:fld id="{9182F61C-F6E6-4155-9694-A3D31334F45B}" type="datetime1">
-              <a:t>14.10.2026</a:t>
+              <a:t>15.10.2026</a:t>
             </a:fld>
             <a:endParaRPr/>
           </a:p>
@@ -6922,7 +6740,7 @@
           <a:lstStyle/>
           <a:p>
             <a:fld id="{63192F0B-BD47-4551-8555-95C7C7A64F41}" type="datetime1">
-              <a:t>14.10.2026</a:t>
+              <a:t>15.10.2026</a:t>
             </a:fld>
             <a:endParaRPr/>
           </a:p>
@@ -7187,7 +7005,7 @@
           <a:lstStyle/>
           <a:p>
             <a:fld id="{6D6B9F61-8169-4783-B8C4-4A18C4026503}" type="datetime1">
-              <a:t>14.10.2026</a:t>
+              <a:t>15.10.2026</a:t>
             </a:fld>
             <a:endParaRPr/>
           </a:p>
@@ -7427,7 +7245,7 @@
           <a:lstStyle/>
           <a:p>
             <a:fld id="{1F91BE9E-5F37-42CD-AF01-61AA02B5BBED}" type="datetime1">
-              <a:t>14.10.2026</a:t>
+              <a:t>15.10.2026</a:t>
             </a:fld>
             <a:endParaRPr/>
           </a:p>
@@ -7772,7 +7590,7 @@
           </a:lstStyle>
           <a:p>
             <a:fld id="{370F9359-BB8B-45FD-8B86-138FF0155BE1}" type="datetime1">
-              <a:t>14.10.2026</a:t>
+              <a:t>15.10.2026</a:t>
             </a:fld>
             <a:endParaRPr/>
           </a:p>
@@ -8033,7 +7851,7 @@
           </a:lstStyle>
           <a:p>
             <a:fld id="{5744E98A-C6CB-4740-94CF-7B79157857DC}" type="datetime1">
-              <a:t>14.10.2026</a:t>
+              <a:t>15.10.2026</a:t>
             </a:fld>
             <a:endParaRPr/>
           </a:p>
@@ -8227,7 +8045,7 @@
           </a:lstStyle>
           <a:p>
             <a:fld id="{8F314C3C-5380-447C-8C4A-80885D6C1B2B}" type="datetime1">
-              <a:t>14.10.2026</a:t>
+              <a:t>15.10.2026</a:t>
             </a:fld>
             <a:endParaRPr/>
           </a:p>
@@ -8486,7 +8304,7 @@
           <a:lstStyle/>
           <a:p>
             <a:fld id="{0F0B1818-EA50-4E6B-B1F5-269F22071F39}" type="datetime1">
-              <a:t>14.10.2026</a:t>
+              <a:t>15.10.2026</a:t>
             </a:fld>
             <a:endParaRPr/>
           </a:p>
@@ -8849,7 +8667,7 @@
           <a:lstStyle/>
           <a:p>
             <a:fld id="{E9E84084-15D7-4F36-859F-F56C53A6F4E5}" type="datetime1">
-              <a:t>14.10.2026</a:t>
+              <a:t>15.10.2026</a:t>
             </a:fld>
             <a:endParaRPr/>
           </a:p>
@@ -9084,7 +8902,7 @@
           <a:lstStyle/>
           <a:p>
             <a:fld id="{D4255E2A-8982-450C-A923-417B0C2E922F}" type="datetime1">
-              <a:t>14.10.2026</a:t>
+              <a:t>15.10.2026</a:t>
             </a:fld>
             <a:endParaRPr/>
           </a:p>
@@ -9319,7 +9137,7 @@
           <a:lstStyle/>
           <a:p>
             <a:fld id="{CDCAFA87-D25E-497C-A210-941991E7D2A4}" type="datetime1">
-              <a:t>14.10.2026</a:t>
+              <a:t>15.10.2026</a:t>
             </a:fld>
             <a:endParaRPr/>
           </a:p>
@@ -9573,7 +9391,7 @@
           </a:lstStyle>
           <a:p>
             <a:fld id="{6A14468A-DEFC-459E-8886-652A759B4AEF}" type="datetime1">
-              <a:t>14.10.2026</a:t>
+              <a:t>15.10.2026</a:t>
             </a:fld>
             <a:endParaRPr/>
           </a:p>
@@ -11617,7 +11435,7 @@
               </a:defRPr>
             </a:pPr>
             <a:r>
-              <a:rPr sz="1275" b="1">
+              <a:rPr sz="1275" b="1" dirty="0" err="1">
                 <a:solidFill>
                   <a:srgbClr val="237E80"/>
                 </a:solidFill>
@@ -11625,7 +11443,18 @@
                 <a:ea typeface="DejaVu Sans"/>
                 <a:cs typeface="DejaVu Sans"/>
               </a:rPr>
-              <a:t>Задание 5.</a:t>
+              <a:t>Задание</a:t>
+            </a:r>
+            <a:r>
+              <a:rPr sz="1275" b="1" dirty="0">
+                <a:solidFill>
+                  <a:srgbClr val="237E80"/>
+                </a:solidFill>
+                <a:latin typeface="DejaVu Sans"/>
+                <a:ea typeface="DejaVu Sans"/>
+                <a:cs typeface="DejaVu Sans"/>
+              </a:rPr>
+              <a:t> 5.</a:t>
             </a:r>
           </a:p>
         </p:txBody>

--- a/геометрические преобразования изображений/Лабораторная_3_Травкова_Лебедкин.pptx
+++ b/геометрические преобразования изображений/Лабораторная_3_Травкова_Лебедкин.pptx
@@ -5,7 +5,7 @@
     <p:sldMasterId id="2147483648" r:id="rId1"/>
   </p:sldMasterIdLst>
   <p:notesMasterIdLst>
-    <p:notesMasterId r:id="rId16"/>
+    <p:notesMasterId r:id="rId18"/>
   </p:notesMasterIdLst>
   <p:sldIdLst>
     <p:sldId id="256" r:id="rId2"/>
@@ -17,11 +17,13 @@
     <p:sldId id="262" r:id="rId8"/>
     <p:sldId id="263" r:id="rId9"/>
     <p:sldId id="264" r:id="rId10"/>
-    <p:sldId id="265" r:id="rId11"/>
-    <p:sldId id="266" r:id="rId12"/>
-    <p:sldId id="269" r:id="rId13"/>
-    <p:sldId id="267" r:id="rId14"/>
-    <p:sldId id="268" r:id="rId15"/>
+    <p:sldId id="272" r:id="rId11"/>
+    <p:sldId id="265" r:id="rId12"/>
+    <p:sldId id="266" r:id="rId13"/>
+    <p:sldId id="269" r:id="rId14"/>
+    <p:sldId id="267" r:id="rId15"/>
+    <p:sldId id="271" r:id="rId16"/>
+    <p:sldId id="270" r:id="rId17"/>
   </p:sldIdLst>
   <p:sldSz cx="12192000" cy="6858000"/>
   <p:notesSz cx="6858000" cy="9144000"/>
@@ -388,7 +390,13 @@
   <p:cSld>
     <p:spTree>
       <p:nvGrpSpPr>
-        <p:cNvPr id="1" name=""/>
+        <p:cNvPr id="1" name="">
+          <a:extLst>
+            <a:ext uri="{FF2B5EF4-FFF2-40B4-BE49-F238E27FC236}">
+              <a16:creationId xmlns:a16="http://schemas.microsoft.com/office/drawing/2014/main" id="{52390F7D-8E81-E3C1-7B68-9893C71E9CE8}"/>
+            </a:ext>
+          </a:extLst>
+        </p:cNvPr>
         <p:cNvGrpSpPr/>
         <p:nvPr/>
       </p:nvGrpSpPr>
@@ -402,7 +410,13 @@
       </p:grpSpPr>
       <p:sp>
         <p:nvSpPr>
-          <p:cNvPr id="2" name="Slide Image Placeholder 1"/>
+          <p:cNvPr id="2" name="Slide Image Placeholder 1">
+            <a:extLst>
+              <a:ext uri="{FF2B5EF4-FFF2-40B4-BE49-F238E27FC236}">
+                <a16:creationId xmlns:a16="http://schemas.microsoft.com/office/drawing/2014/main" id="{A0138661-6E6C-27BA-847C-BC05C4998376}"/>
+              </a:ext>
+            </a:extLst>
+          </p:cNvPr>
           <p:cNvSpPr>
             <a:spLocks noGrp="1" noRot="1" noChangeAspect="1"/>
           </p:cNvSpPr>
@@ -414,7 +428,13 @@
       </p:sp>
       <p:sp>
         <p:nvSpPr>
-          <p:cNvPr id="3" name="Notes Placeholder 2"/>
+          <p:cNvPr id="3" name="Notes Placeholder 2">
+            <a:extLst>
+              <a:ext uri="{FF2B5EF4-FFF2-40B4-BE49-F238E27FC236}">
+                <a16:creationId xmlns:a16="http://schemas.microsoft.com/office/drawing/2014/main" id="{8B04BCA2-B40B-C6E7-18B4-927238831B27}"/>
+              </a:ext>
+            </a:extLst>
+          </p:cNvPr>
           <p:cNvSpPr>
             <a:spLocks noGrp="1"/>
           </p:cNvSpPr>
@@ -433,7 +453,13 @@
       </p:sp>
       <p:sp>
         <p:nvSpPr>
-          <p:cNvPr id="4" name="Slide Number Placeholder 3"/>
+          <p:cNvPr id="4" name="Slide Number Placeholder 3">
+            <a:extLst>
+              <a:ext uri="{FF2B5EF4-FFF2-40B4-BE49-F238E27FC236}">
+                <a16:creationId xmlns:a16="http://schemas.microsoft.com/office/drawing/2014/main" id="{F97BB1D6-E939-78CC-9172-4CFB21F9DAF4}"/>
+              </a:ext>
+            </a:extLst>
+          </p:cNvPr>
           <p:cNvSpPr>
             <a:spLocks noGrp="1"/>
           </p:cNvSpPr>
@@ -451,6 +477,11 @@
         </p:txBody>
       </p:sp>
     </p:spTree>
+    <p:extLst>
+      <p:ext uri="{BB962C8B-B14F-4D97-AF65-F5344CB8AC3E}">
+        <p14:creationId xmlns:p14="http://schemas.microsoft.com/office/powerpoint/2010/main" val="684587470"/>
+      </p:ext>
+    </p:extLst>
   </p:cSld>
   <p:clrMapOvr>
     <a:masterClrMapping/>
@@ -601,11 +632,6 @@
         </p:txBody>
       </p:sp>
     </p:spTree>
-    <p:extLst>
-      <p:ext uri="{BB962C8B-B14F-4D97-AF65-F5344CB8AC3E}">
-        <p14:creationId xmlns:p14="http://schemas.microsoft.com/office/powerpoint/2010/main" val="2734064737"/>
-      </p:ext>
-    </p:extLst>
   </p:cSld>
   <p:clrMapOvr>
     <a:masterClrMapping/>
@@ -681,6 +707,11 @@
         </p:txBody>
       </p:sp>
     </p:spTree>
+    <p:extLst>
+      <p:ext uri="{BB962C8B-B14F-4D97-AF65-F5344CB8AC3E}">
+        <p14:creationId xmlns:p14="http://schemas.microsoft.com/office/powerpoint/2010/main" val="2734064737"/>
+      </p:ext>
+    </p:extLst>
   </p:cSld>
   <p:clrMapOvr>
     <a:masterClrMapping/>
@@ -693,10 +724,85 @@
   <p:cSld>
     <p:spTree>
       <p:nvGrpSpPr>
+        <p:cNvPr id="1" name=""/>
+        <p:cNvGrpSpPr/>
+        <p:nvPr/>
+      </p:nvGrpSpPr>
+      <p:grpSpPr>
+        <a:xfrm>
+          <a:off x="0" y="0"/>
+          <a:ext cx="0" cy="0"/>
+          <a:chOff x="0" y="0"/>
+          <a:chExt cx="0" cy="0"/>
+        </a:xfrm>
+      </p:grpSpPr>
+      <p:sp>
+        <p:nvSpPr>
+          <p:cNvPr id="2" name="Slide Image Placeholder 1"/>
+          <p:cNvSpPr>
+            <a:spLocks noGrp="1" noRot="1" noChangeAspect="1"/>
+          </p:cNvSpPr>
+          <p:nvPr>
+            <p:ph type="sldImg"/>
+          </p:nvPr>
+        </p:nvSpPr>
+        <p:spPr/>
+      </p:sp>
+      <p:sp>
+        <p:nvSpPr>
+          <p:cNvPr id="3" name="Notes Placeholder 2"/>
+          <p:cNvSpPr>
+            <a:spLocks noGrp="1"/>
+          </p:cNvSpPr>
+          <p:nvPr>
+            <p:ph type="body" idx="1"/>
+          </p:nvPr>
+        </p:nvSpPr>
+        <p:spPr/>
+        <p:txBody>
+          <a:bodyPr/>
+          <a:lstStyle/>
+          <a:p>
+            <a:endParaRPr dirty="0"/>
+          </a:p>
+        </p:txBody>
+      </p:sp>
+      <p:sp>
+        <p:nvSpPr>
+          <p:cNvPr id="4" name="Slide Number Placeholder 3"/>
+          <p:cNvSpPr>
+            <a:spLocks noGrp="1"/>
+          </p:cNvSpPr>
+          <p:nvPr>
+            <p:ph type="sldNum" idx="5"/>
+          </p:nvPr>
+        </p:nvSpPr>
+        <p:spPr/>
+        <p:txBody>
+          <a:bodyPr/>
+          <a:lstStyle/>
+          <a:p>
+            <a:endParaRPr/>
+          </a:p>
+        </p:txBody>
+      </p:sp>
+    </p:spTree>
+  </p:cSld>
+  <p:clrMapOvr>
+    <a:masterClrMapping/>
+  </p:clrMapOvr>
+</p:notes>
+</file>
+
+<file path=ppt/notesSlides/notesSlide15.xml><?xml version="1.0" encoding="utf-8"?>
+<p:notes xmlns:a="http://schemas.openxmlformats.org/drawingml/2006/main" xmlns:r="http://schemas.openxmlformats.org/officeDocument/2006/relationships" xmlns:p="http://schemas.openxmlformats.org/presentationml/2006/main">
+  <p:cSld>
+    <p:spTree>
+      <p:nvGrpSpPr>
         <p:cNvPr id="1" name="">
           <a:extLst>
             <a:ext uri="{FF2B5EF4-FFF2-40B4-BE49-F238E27FC236}">
-              <a16:creationId xmlns:a16="http://schemas.microsoft.com/office/drawing/2014/main" id="{11DCA2FF-E4B7-FC63-2FA6-50A65CFCC924}"/>
+              <a16:creationId xmlns:a16="http://schemas.microsoft.com/office/drawing/2014/main" id="{7272146F-3190-4236-C12E-CA1D1361A182}"/>
             </a:ext>
           </a:extLst>
         </p:cNvPr>
@@ -716,7 +822,7 @@
           <p:cNvPr id="2" name="Slide Image Placeholder 1">
             <a:extLst>
               <a:ext uri="{FF2B5EF4-FFF2-40B4-BE49-F238E27FC236}">
-                <a16:creationId xmlns:a16="http://schemas.microsoft.com/office/drawing/2014/main" id="{386ED641-CF58-2E64-CDD5-0865EAE16148}"/>
+                <a16:creationId xmlns:a16="http://schemas.microsoft.com/office/drawing/2014/main" id="{20C11FCC-2DBC-21E8-A959-31B54E9055A9}"/>
               </a:ext>
             </a:extLst>
           </p:cNvPr>
@@ -734,7 +840,7 @@
           <p:cNvPr id="3" name="Notes Placeholder 2">
             <a:extLst>
               <a:ext uri="{FF2B5EF4-FFF2-40B4-BE49-F238E27FC236}">
-                <a16:creationId xmlns:a16="http://schemas.microsoft.com/office/drawing/2014/main" id="{551AD45C-17BA-5984-F406-27D014A9EB7E}"/>
+                <a16:creationId xmlns:a16="http://schemas.microsoft.com/office/drawing/2014/main" id="{EF7C5444-EBFD-A4C0-32F4-1B7B5F72F2B2}"/>
               </a:ext>
             </a:extLst>
           </p:cNvPr>
@@ -759,7 +865,7 @@
           <p:cNvPr id="4" name="Slide Number Placeholder 3">
             <a:extLst>
               <a:ext uri="{FF2B5EF4-FFF2-40B4-BE49-F238E27FC236}">
-                <a16:creationId xmlns:a16="http://schemas.microsoft.com/office/drawing/2014/main" id="{CAFA6CDF-112A-D712-4734-B287DADB17C6}"/>
+                <a16:creationId xmlns:a16="http://schemas.microsoft.com/office/drawing/2014/main" id="{BD6D1D2C-CB3B-E070-6CAD-8718A40499E1}"/>
               </a:ext>
             </a:extLst>
           </p:cNvPr>
@@ -782,7 +888,111 @@
     </p:spTree>
     <p:extLst>
       <p:ext uri="{BB962C8B-B14F-4D97-AF65-F5344CB8AC3E}">
-        <p14:creationId xmlns:p14="http://schemas.microsoft.com/office/powerpoint/2010/main" val="3121694795"/>
+        <p14:creationId xmlns:p14="http://schemas.microsoft.com/office/powerpoint/2010/main" val="3221400312"/>
+      </p:ext>
+    </p:extLst>
+  </p:cSld>
+  <p:clrMapOvr>
+    <a:masterClrMapping/>
+  </p:clrMapOvr>
+</p:notes>
+</file>
+
+<file path=ppt/notesSlides/notesSlide16.xml><?xml version="1.0" encoding="utf-8"?>
+<p:notes xmlns:a="http://schemas.openxmlformats.org/drawingml/2006/main" xmlns:r="http://schemas.openxmlformats.org/officeDocument/2006/relationships" xmlns:p="http://schemas.openxmlformats.org/presentationml/2006/main">
+  <p:cSld>
+    <p:spTree>
+      <p:nvGrpSpPr>
+        <p:cNvPr id="1" name="">
+          <a:extLst>
+            <a:ext uri="{FF2B5EF4-FFF2-40B4-BE49-F238E27FC236}">
+              <a16:creationId xmlns:a16="http://schemas.microsoft.com/office/drawing/2014/main" id="{52CE6653-B57B-CE03-C841-FED0D605846C}"/>
+            </a:ext>
+          </a:extLst>
+        </p:cNvPr>
+        <p:cNvGrpSpPr/>
+        <p:nvPr/>
+      </p:nvGrpSpPr>
+      <p:grpSpPr>
+        <a:xfrm>
+          <a:off x="0" y="0"/>
+          <a:ext cx="0" cy="0"/>
+          <a:chOff x="0" y="0"/>
+          <a:chExt cx="0" cy="0"/>
+        </a:xfrm>
+      </p:grpSpPr>
+      <p:sp>
+        <p:nvSpPr>
+          <p:cNvPr id="2" name="Slide Image Placeholder 1">
+            <a:extLst>
+              <a:ext uri="{FF2B5EF4-FFF2-40B4-BE49-F238E27FC236}">
+                <a16:creationId xmlns:a16="http://schemas.microsoft.com/office/drawing/2014/main" id="{00ECB2D4-FC45-ED34-57F1-553521D8DDB2}"/>
+              </a:ext>
+            </a:extLst>
+          </p:cNvPr>
+          <p:cNvSpPr>
+            <a:spLocks noGrp="1" noRot="1" noChangeAspect="1"/>
+          </p:cNvSpPr>
+          <p:nvPr>
+            <p:ph type="sldImg"/>
+          </p:nvPr>
+        </p:nvSpPr>
+        <p:spPr/>
+      </p:sp>
+      <p:sp>
+        <p:nvSpPr>
+          <p:cNvPr id="3" name="Notes Placeholder 2">
+            <a:extLst>
+              <a:ext uri="{FF2B5EF4-FFF2-40B4-BE49-F238E27FC236}">
+                <a16:creationId xmlns:a16="http://schemas.microsoft.com/office/drawing/2014/main" id="{61C8B2D6-6EA1-7338-C186-6E87DE2250F4}"/>
+              </a:ext>
+            </a:extLst>
+          </p:cNvPr>
+          <p:cNvSpPr>
+            <a:spLocks noGrp="1"/>
+          </p:cNvSpPr>
+          <p:nvPr>
+            <p:ph type="body" idx="1"/>
+          </p:nvPr>
+        </p:nvSpPr>
+        <p:spPr/>
+        <p:txBody>
+          <a:bodyPr/>
+          <a:lstStyle/>
+          <a:p>
+            <a:endParaRPr dirty="0"/>
+          </a:p>
+        </p:txBody>
+      </p:sp>
+      <p:sp>
+        <p:nvSpPr>
+          <p:cNvPr id="4" name="Slide Number Placeholder 3">
+            <a:extLst>
+              <a:ext uri="{FF2B5EF4-FFF2-40B4-BE49-F238E27FC236}">
+                <a16:creationId xmlns:a16="http://schemas.microsoft.com/office/drawing/2014/main" id="{C027B5E7-09A7-CB4E-ACC9-2DF2C5BE29BF}"/>
+              </a:ext>
+            </a:extLst>
+          </p:cNvPr>
+          <p:cNvSpPr>
+            <a:spLocks noGrp="1"/>
+          </p:cNvSpPr>
+          <p:nvPr>
+            <p:ph type="sldNum" idx="5"/>
+          </p:nvPr>
+        </p:nvSpPr>
+        <p:spPr/>
+        <p:txBody>
+          <a:bodyPr/>
+          <a:lstStyle/>
+          <a:p>
+            <a:endParaRPr/>
+          </a:p>
+        </p:txBody>
+      </p:sp>
+    </p:spTree>
+    <p:extLst>
+      <p:ext uri="{BB962C8B-B14F-4D97-AF65-F5344CB8AC3E}">
+        <p14:creationId xmlns:p14="http://schemas.microsoft.com/office/powerpoint/2010/main" val="273506640"/>
       </p:ext>
     </p:extLst>
   </p:cSld>
@@ -10258,7 +10468,13 @@
     </p:bg>
     <p:spTree>
       <p:nvGrpSpPr>
-        <p:cNvPr id="1" name=""/>
+        <p:cNvPr id="1" name="">
+          <a:extLst>
+            <a:ext uri="{FF2B5EF4-FFF2-40B4-BE49-F238E27FC236}">
+              <a16:creationId xmlns:a16="http://schemas.microsoft.com/office/drawing/2014/main" id="{AA77FA8B-6EAB-5689-8589-B9A43EE755FF}"/>
+            </a:ext>
+          </a:extLst>
+        </p:cNvPr>
         <p:cNvGrpSpPr/>
         <p:nvPr/>
       </p:nvGrpSpPr>
@@ -10272,10 +10488,10 @@
       </p:grpSpPr>
       <p:sp>
         <p:nvSpPr>
-          <p:cNvPr id="8" name="Прямоугольник 7">
-            <a:extLst>
-              <a:ext uri="{FF2B5EF4-FFF2-40B4-BE49-F238E27FC236}">
-                <a16:creationId xmlns:a16="http://schemas.microsoft.com/office/drawing/2014/main" id="{DD133DC1-12DF-45DA-A073-D71B0AD06A9F}"/>
+          <p:cNvPr id="7" name="Прямоугольник 6">
+            <a:extLst>
+              <a:ext uri="{FF2B5EF4-FFF2-40B4-BE49-F238E27FC236}">
+                <a16:creationId xmlns:a16="http://schemas.microsoft.com/office/drawing/2014/main" id="{74D64C95-CCFD-04BF-EEC5-64E84EEF1F54}"/>
               </a:ext>
             </a:extLst>
           </p:cNvPr>
@@ -10318,7 +10534,7 @@
               </a:defRPr>
             </a:pPr>
             <a:r>
-              <a:rPr sz="1275" b="1">
+              <a:rPr sz="1275" b="1" dirty="0" err="1">
                 <a:solidFill>
                   <a:srgbClr val="237E80"/>
                 </a:solidFill>
@@ -10326,7 +10542,18 @@
                 <a:ea typeface="DejaVu Sans"/>
                 <a:cs typeface="DejaVu Sans"/>
               </a:rPr>
-              <a:t>Задание 5.</a:t>
+              <a:t>Задание</a:t>
+            </a:r>
+            <a:r>
+              <a:rPr sz="1275" b="1" dirty="0">
+                <a:solidFill>
+                  <a:srgbClr val="237E80"/>
+                </a:solidFill>
+                <a:latin typeface="DejaVu Sans"/>
+                <a:ea typeface="DejaVu Sans"/>
+                <a:cs typeface="DejaVu Sans"/>
+              </a:rPr>
+              <a:t> 4.</a:t>
             </a:r>
           </a:p>
         </p:txBody>
@@ -10336,7 +10563,7 @@
           <p:cNvPr id="2" name="Прямоугольник 1">
             <a:extLst>
               <a:ext uri="{FF2B5EF4-FFF2-40B4-BE49-F238E27FC236}">
-                <a16:creationId xmlns:a16="http://schemas.microsoft.com/office/drawing/2014/main" id="{14BD1181-EFCA-40E7-9548-2F84B354BA60}"/>
+                <a16:creationId xmlns:a16="http://schemas.microsoft.com/office/drawing/2014/main" id="{4ED41D41-6C37-0C4A-4318-4B8F6B000EBE}"/>
               </a:ext>
             </a:extLst>
           </p:cNvPr>
@@ -10387,7 +10614,7 @@
                 <a:ea typeface="DejaVu Sans"/>
                 <a:cs typeface="DejaVu Sans"/>
               </a:rPr>
-              <a:t>Перспективное преобразование</a:t>
+              <a:t>Отражение относительно обеих осей</a:t>
             </a:r>
           </a:p>
         </p:txBody>
@@ -10397,7 +10624,7 @@
           <p:cNvPr id="3" name="Прямоугольник 2">
             <a:extLst>
               <a:ext uri="{FF2B5EF4-FFF2-40B4-BE49-F238E27FC236}">
-                <a16:creationId xmlns:a16="http://schemas.microsoft.com/office/drawing/2014/main" id="{6CCEEDE4-1D4F-48AA-B25B-8F9C8DC772EA}"/>
+                <a16:creationId xmlns:a16="http://schemas.microsoft.com/office/drawing/2014/main" id="{95852FB2-CD32-1424-A73A-C6C77B71F866}"/>
               </a:ext>
             </a:extLst>
           </p:cNvPr>
@@ -10440,7 +10667,7 @@
               </a:defRPr>
             </a:pPr>
             <a:r>
-              <a:rPr sz="1050" b="0">
+              <a:rPr lang="ru-RU" sz="1050" dirty="0">
                 <a:solidFill>
                   <a:srgbClr val="566872"/>
                 </a:solidFill>
@@ -10450,6 +10677,14 @@
               </a:rPr>
               <a:t>10</a:t>
             </a:r>
+            <a:endParaRPr sz="1050" b="0" dirty="0">
+              <a:solidFill>
+                <a:srgbClr val="566872"/>
+              </a:solidFill>
+              <a:latin typeface="DejaVu Sans"/>
+              <a:ea typeface="DejaVu Sans"/>
+              <a:cs typeface="DejaVu Sans"/>
+            </a:endParaRPr>
           </a:p>
         </p:txBody>
       </p:sp>
@@ -10458,7 +10693,7 @@
           <p:cNvPr id="4" name="Прямоугольник 3">
             <a:extLst>
               <a:ext uri="{FF2B5EF4-FFF2-40B4-BE49-F238E27FC236}">
-                <a16:creationId xmlns:a16="http://schemas.microsoft.com/office/drawing/2014/main" id="{B81231E6-9A11-4BF6-BCEF-D4571F431A57}"/>
+                <a16:creationId xmlns:a16="http://schemas.microsoft.com/office/drawing/2014/main" id="{86D23D52-9272-1108-E492-85A979EEDE11}"/>
               </a:ext>
             </a:extLst>
           </p:cNvPr>
@@ -10469,8 +10704,8 @@
         </p:nvSpPr>
         <p:spPr>
           <a:xfrm>
-            <a:off x="533400" y="1504950"/>
-            <a:ext cx="5429250" cy="3505200"/>
+            <a:off x="6285724" y="1676400"/>
+            <a:ext cx="5358174" cy="819150"/>
           </a:xfrm>
           <a:prstGeom prst="rect">
             <a:avLst/>
@@ -10493,7 +10728,7 @@
                 <a:spcPct val="113000"/>
               </a:lnSpc>
               <a:buNone/>
-              <a:defRPr sz="1575" b="0">
+              <a:defRPr sz="1725" b="0">
                 <a:solidFill>
                   <a:srgbClr val="E6F0F1"/>
                 </a:solidFill>
@@ -10503,7 +10738,7 @@
               </a:defRPr>
             </a:pPr>
             <a:r>
-              <a:rPr sz="1575" b="0">
+              <a:rPr lang="en-US" sz="1725" dirty="0" err="1">
                 <a:solidFill>
                   <a:srgbClr val="E6F0F1"/>
                 </a:solidFill>
@@ -10511,26 +10746,21 @@
                 <a:ea typeface="DejaVu Sans Mono"/>
                 <a:cs typeface="DejaVu Sans Mono"/>
               </a:rPr>
-              <a:t>src_points = np.float32([</a:t>
-            </a:r>
-          </a:p>
-          <a:p>
-            <a:pPr algn="l">
-              <a:lnSpc>
-                <a:spcPct val="113000"/>
-              </a:lnSpc>
-              <a:buNone/>
-              <a:defRPr sz="1575" b="0">
+              <a:t>h</a:t>
+            </a:r>
+            <a:r>
+              <a:rPr sz="1725" b="0" dirty="0" err="1">
                 <a:solidFill>
                   <a:srgbClr val="E6F0F1"/>
                 </a:solidFill>
                 <a:latin typeface="DejaVu Sans Mono"/>
                 <a:ea typeface="DejaVu Sans Mono"/>
                 <a:cs typeface="DejaVu Sans Mono"/>
-              </a:defRPr>
-            </a:pPr>
-            <a:r>
-              <a:rPr sz="1575" b="0">
+              </a:rPr>
+              <a:t>or_image</a:t>
+            </a:r>
+            <a:r>
+              <a:rPr sz="1725" b="0" dirty="0">
                 <a:solidFill>
                   <a:srgbClr val="E6F0F1"/>
                 </a:solidFill>
@@ -10538,26 +10768,21 @@
                 <a:ea typeface="DejaVu Sans Mono"/>
                 <a:cs typeface="DejaVu Sans Mono"/>
               </a:rPr>
-              <a:t>    [100, 80], [400, 120],</a:t>
-            </a:r>
-          </a:p>
-          <a:p>
-            <a:pPr algn="l">
-              <a:lnSpc>
-                <a:spcPct val="113000"/>
-              </a:lnSpc>
-              <a:buNone/>
-              <a:defRPr sz="1575" b="0">
+              <a:t> = cv2.flip(</a:t>
+            </a:r>
+            <a:r>
+              <a:rPr sz="1725" b="0" dirty="0" err="1">
                 <a:solidFill>
                   <a:srgbClr val="E6F0F1"/>
                 </a:solidFill>
                 <a:latin typeface="DejaVu Sans Mono"/>
                 <a:ea typeface="DejaVu Sans Mono"/>
                 <a:cs typeface="DejaVu Sans Mono"/>
-              </a:defRPr>
-            </a:pPr>
-            <a:r>
-              <a:rPr sz="1575" b="0">
+              </a:rPr>
+              <a:t>changing_image</a:t>
+            </a:r>
+            <a:r>
+              <a:rPr sz="1725" b="0" dirty="0">
                 <a:solidFill>
                   <a:srgbClr val="E6F0F1"/>
                 </a:solidFill>
@@ -10565,38 +10790,9 @@
                 <a:ea typeface="DejaVu Sans Mono"/>
                 <a:cs typeface="DejaVu Sans Mono"/>
               </a:rPr>
-              <a:t>    [450, 400], [70, 380]</a:t>
-            </a:r>
-          </a:p>
-          <a:p>
-            <a:pPr algn="l">
-              <a:lnSpc>
-                <a:spcPct val="113000"/>
-              </a:lnSpc>
-              <a:buNone/>
-              <a:defRPr sz="1575" b="0">
-                <a:solidFill>
-                  <a:srgbClr val="E6F0F1"/>
-                </a:solidFill>
-                <a:latin typeface="DejaVu Sans Mono"/>
-                <a:ea typeface="DejaVu Sans Mono"/>
-                <a:cs typeface="DejaVu Sans Mono"/>
-              </a:defRPr>
-            </a:pPr>
-            <a:r>
-              <a:rPr sz="1575" b="0">
-                <a:solidFill>
-                  <a:srgbClr val="E6F0F1"/>
-                </a:solidFill>
-                <a:latin typeface="DejaVu Sans Mono"/>
-                <a:ea typeface="DejaVu Sans Mono"/>
-                <a:cs typeface="DejaVu Sans Mono"/>
-              </a:rPr>
-              <a:t>])</a:t>
-            </a:r>
-          </a:p>
-          <a:p>
-            <a:endParaRPr sz="1575" b="0">
+              <a:t>, 1)</a:t>
+            </a:r>
+            <a:endParaRPr lang="en-US" sz="1725" b="0" dirty="0">
               <a:solidFill>
                 <a:srgbClr val="E6F0F1"/>
               </a:solidFill>
@@ -10606,12 +10802,11 @@
             </a:endParaRPr>
           </a:p>
           <a:p>
-            <a:pPr algn="l">
+            <a:pPr>
               <a:lnSpc>
-                <a:spcPct val="113000"/>
+                <a:spcPct val="100000"/>
               </a:lnSpc>
-              <a:buNone/>
-              <a:defRPr sz="1575" b="0">
+              <a:defRPr sz="1725" b="0">
                 <a:solidFill>
                   <a:srgbClr val="E6F0F1"/>
                 </a:solidFill>
@@ -10621,314 +10816,80 @@
               </a:defRPr>
             </a:pPr>
             <a:r>
-              <a:rPr sz="1575" b="0">
+              <a:rPr lang="ru-RU" sz="1725" dirty="0" err="1">
                 <a:solidFill>
                   <a:srgbClr val="E6F0F1"/>
                 </a:solidFill>
                 <a:latin typeface="DejaVu Sans Mono"/>
-                <a:ea typeface="DejaVu Sans Mono"/>
-                <a:cs typeface="DejaVu Sans Mono"/>
-              </a:rPr>
-              <a:t>dst_points = np.float32([</a:t>
-            </a:r>
-          </a:p>
-          <a:p>
-            <a:pPr algn="l">
-              <a:lnSpc>
-                <a:spcPct val="113000"/>
-              </a:lnSpc>
-              <a:buNone/>
-              <a:defRPr sz="1575" b="0">
+              </a:rPr>
+              <a:t>ver_image</a:t>
+            </a:r>
+            <a:r>
+              <a:rPr lang="ru-RU" sz="1725" dirty="0">
                 <a:solidFill>
                   <a:srgbClr val="E6F0F1"/>
                 </a:solidFill>
                 <a:latin typeface="DejaVu Sans Mono"/>
-                <a:ea typeface="DejaVu Sans Mono"/>
-                <a:cs typeface="DejaVu Sans Mono"/>
-              </a:defRPr>
-            </a:pPr>
-            <a:r>
-              <a:rPr sz="1575" b="0">
+              </a:rPr>
+              <a:t>  = cv2.flip(</a:t>
+            </a:r>
+            <a:r>
+              <a:rPr lang="ru-RU" sz="1725" dirty="0" err="1">
                 <a:solidFill>
                   <a:srgbClr val="E6F0F1"/>
                 </a:solidFill>
                 <a:latin typeface="DejaVu Sans Mono"/>
-                <a:ea typeface="DejaVu Sans Mono"/>
-                <a:cs typeface="DejaVu Sans Mono"/>
-              </a:rPr>
-              <a:t>    [0, 0], [w - 1, 0],</a:t>
-            </a:r>
-          </a:p>
-          <a:p>
-            <a:pPr algn="l">
-              <a:lnSpc>
-                <a:spcPct val="113000"/>
-              </a:lnSpc>
-              <a:buNone/>
-              <a:defRPr sz="1575" b="0">
+              </a:rPr>
+              <a:t>changing_image</a:t>
+            </a:r>
+            <a:r>
+              <a:rPr lang="ru-RU" sz="1725" dirty="0">
                 <a:solidFill>
                   <a:srgbClr val="E6F0F1"/>
                 </a:solidFill>
                 <a:latin typeface="DejaVu Sans Mono"/>
-                <a:ea typeface="DejaVu Sans Mono"/>
-                <a:cs typeface="DejaVu Sans Mono"/>
-              </a:defRPr>
-            </a:pPr>
-            <a:r>
-              <a:rPr sz="1575" b="0">
-                <a:solidFill>
-                  <a:srgbClr val="E6F0F1"/>
-                </a:solidFill>
-                <a:latin typeface="DejaVu Sans Mono"/>
-                <a:ea typeface="DejaVu Sans Mono"/>
-                <a:cs typeface="DejaVu Sans Mono"/>
-              </a:rPr>
-              <a:t>    [w - 1, h - 1], [0, h - 1]</a:t>
-            </a:r>
-          </a:p>
-          <a:p>
-            <a:pPr algn="l">
-              <a:lnSpc>
-                <a:spcPct val="113000"/>
-              </a:lnSpc>
-              <a:buNone/>
-              <a:defRPr sz="1575" b="0">
-                <a:solidFill>
-                  <a:srgbClr val="E6F0F1"/>
-                </a:solidFill>
-                <a:latin typeface="DejaVu Sans Mono"/>
-                <a:ea typeface="DejaVu Sans Mono"/>
-                <a:cs typeface="DejaVu Sans Mono"/>
-              </a:defRPr>
-            </a:pPr>
-            <a:r>
-              <a:rPr sz="1575" b="0">
-                <a:solidFill>
-                  <a:srgbClr val="E6F0F1"/>
-                </a:solidFill>
-                <a:latin typeface="DejaVu Sans Mono"/>
-                <a:ea typeface="DejaVu Sans Mono"/>
-                <a:cs typeface="DejaVu Sans Mono"/>
-              </a:rPr>
-              <a:t>])</a:t>
-            </a:r>
-          </a:p>
-        </p:txBody>
-      </p:sp>
-      <p:sp>
-        <p:nvSpPr>
-          <p:cNvPr id="5" name="Прямоугольник 4">
-            <a:extLst>
-              <a:ext uri="{FF2B5EF4-FFF2-40B4-BE49-F238E27FC236}">
-                <a16:creationId xmlns:a16="http://schemas.microsoft.com/office/drawing/2014/main" id="{5F1FA692-A76B-40FB-9900-7491CBE25E81}"/>
-              </a:ext>
-            </a:extLst>
-          </p:cNvPr>
-          <p:cNvSpPr>
-            <a:spLocks noGrp="1"/>
-          </p:cNvSpPr>
+              </a:rPr>
+              <a:t>, 0)</a:t>
+            </a:r>
+          </a:p>
+        </p:txBody>
+      </p:sp>
+      <p:pic>
+        <p:nvPicPr>
+          <p:cNvPr id="8" name="Рисунок 7">
+            <a:extLst>
+              <a:ext uri="{FF2B5EF4-FFF2-40B4-BE49-F238E27FC236}">
+                <a16:creationId xmlns:a16="http://schemas.microsoft.com/office/drawing/2014/main" id="{C007FAD4-B71B-5885-7AB1-09C3CB8BEC55}"/>
+              </a:ext>
+            </a:extLst>
+          </p:cNvPr>
+          <p:cNvPicPr>
+            <a:picLocks noChangeAspect="1"/>
+          </p:cNvPicPr>
           <p:nvPr/>
-        </p:nvSpPr>
-        <p:spPr>
-          <a:xfrm>
-            <a:off x="6191250" y="1504950"/>
-            <a:ext cx="5486400" cy="2590800"/>
+        </p:nvPicPr>
+        <p:blipFill>
+          <a:blip r:embed="rId3"/>
+          <a:stretch>
+            <a:fillRect/>
+          </a:stretch>
+        </p:blipFill>
+        <p:spPr>
+          <a:xfrm>
+            <a:off x="429208" y="1424953"/>
+            <a:ext cx="5477070" cy="5368614"/>
           </a:xfrm>
           <a:prstGeom prst="rect">
             <a:avLst/>
           </a:prstGeom>
-          <a:solidFill>
-            <a:srgbClr val="182E38"/>
-          </a:solidFill>
-          <a:ln w="0">
-            <a:noFill/>
-          </a:ln>
-        </p:spPr>
-        <p:txBody>
-          <a:bodyPr lIns="209550" tIns="190500" rIns="152400" bIns="152400" anchor="t">
-            <a:noAutofit/>
-          </a:bodyPr>
-          <a:lstStyle/>
-          <a:p>
-            <a:pPr algn="l">
-              <a:lnSpc>
-                <a:spcPct val="113000"/>
-              </a:lnSpc>
-              <a:buNone/>
-              <a:defRPr sz="1425" b="0">
-                <a:solidFill>
-                  <a:srgbClr val="E6F0F1"/>
-                </a:solidFill>
-                <a:latin typeface="DejaVu Sans Mono"/>
-                <a:ea typeface="DejaVu Sans Mono"/>
-                <a:cs typeface="DejaVu Sans Mono"/>
-              </a:defRPr>
-            </a:pPr>
-            <a:r>
-              <a:rPr sz="1425" b="0">
-                <a:solidFill>
-                  <a:srgbClr val="E6F0F1"/>
-                </a:solidFill>
-                <a:latin typeface="DejaVu Sans Mono"/>
-                <a:ea typeface="DejaVu Sans Mono"/>
-                <a:cs typeface="DejaVu Sans Mono"/>
-              </a:rPr>
-              <a:t>matrix = cv2.getPerspectiveTransform(</a:t>
-            </a:r>
-          </a:p>
-          <a:p>
-            <a:pPr algn="l">
-              <a:lnSpc>
-                <a:spcPct val="113000"/>
-              </a:lnSpc>
-              <a:buNone/>
-              <a:defRPr sz="1425" b="0">
-                <a:solidFill>
-                  <a:srgbClr val="E6F0F1"/>
-                </a:solidFill>
-                <a:latin typeface="DejaVu Sans Mono"/>
-                <a:ea typeface="DejaVu Sans Mono"/>
-                <a:cs typeface="DejaVu Sans Mono"/>
-              </a:defRPr>
-            </a:pPr>
-            <a:r>
-              <a:rPr sz="1425" b="0">
-                <a:solidFill>
-                  <a:srgbClr val="E6F0F1"/>
-                </a:solidFill>
-                <a:latin typeface="DejaVu Sans Mono"/>
-                <a:ea typeface="DejaVu Sans Mono"/>
-                <a:cs typeface="DejaVu Sans Mono"/>
-              </a:rPr>
-              <a:t>    src_points, dst_points</a:t>
-            </a:r>
-          </a:p>
-          <a:p>
-            <a:pPr algn="l">
-              <a:lnSpc>
-                <a:spcPct val="113000"/>
-              </a:lnSpc>
-              <a:buNone/>
-              <a:defRPr sz="1425" b="0">
-                <a:solidFill>
-                  <a:srgbClr val="E6F0F1"/>
-                </a:solidFill>
-                <a:latin typeface="DejaVu Sans Mono"/>
-                <a:ea typeface="DejaVu Sans Mono"/>
-                <a:cs typeface="DejaVu Sans Mono"/>
-              </a:defRPr>
-            </a:pPr>
-            <a:r>
-              <a:rPr sz="1425" b="0">
-                <a:solidFill>
-                  <a:srgbClr val="E6F0F1"/>
-                </a:solidFill>
-                <a:latin typeface="DejaVu Sans Mono"/>
-                <a:ea typeface="DejaVu Sans Mono"/>
-                <a:cs typeface="DejaVu Sans Mono"/>
-              </a:rPr>
-              <a:t>)</a:t>
-            </a:r>
-          </a:p>
-          <a:p>
-            <a:endParaRPr sz="1425" b="0">
-              <a:solidFill>
-                <a:srgbClr val="E6F0F1"/>
-              </a:solidFill>
-              <a:latin typeface="DejaVu Sans Mono"/>
-              <a:ea typeface="DejaVu Sans Mono"/>
-              <a:cs typeface="DejaVu Sans Mono"/>
-            </a:endParaRPr>
-          </a:p>
-          <a:p>
-            <a:pPr algn="l">
-              <a:lnSpc>
-                <a:spcPct val="113000"/>
-              </a:lnSpc>
-              <a:buNone/>
-              <a:defRPr sz="1425" b="0">
-                <a:solidFill>
-                  <a:srgbClr val="E6F0F1"/>
-                </a:solidFill>
-                <a:latin typeface="DejaVu Sans Mono"/>
-                <a:ea typeface="DejaVu Sans Mono"/>
-                <a:cs typeface="DejaVu Sans Mono"/>
-              </a:defRPr>
-            </a:pPr>
-            <a:r>
-              <a:rPr sz="1425" b="0">
-                <a:solidFill>
-                  <a:srgbClr val="E6F0F1"/>
-                </a:solidFill>
-                <a:latin typeface="DejaVu Sans Mono"/>
-                <a:ea typeface="DejaVu Sans Mono"/>
-                <a:cs typeface="DejaVu Sans Mono"/>
-              </a:rPr>
-              <a:t>point_image = cv2.warpPerspective(</a:t>
-            </a:r>
-          </a:p>
-          <a:p>
-            <a:pPr algn="l">
-              <a:lnSpc>
-                <a:spcPct val="113000"/>
-              </a:lnSpc>
-              <a:buNone/>
-              <a:defRPr sz="1425" b="0">
-                <a:solidFill>
-                  <a:srgbClr val="E6F0F1"/>
-                </a:solidFill>
-                <a:latin typeface="DejaVu Sans Mono"/>
-                <a:ea typeface="DejaVu Sans Mono"/>
-                <a:cs typeface="DejaVu Sans Mono"/>
-              </a:defRPr>
-            </a:pPr>
-            <a:r>
-              <a:rPr sz="1425" b="0">
-                <a:solidFill>
-                  <a:srgbClr val="E6F0F1"/>
-                </a:solidFill>
-                <a:latin typeface="DejaVu Sans Mono"/>
-                <a:ea typeface="DejaVu Sans Mono"/>
-                <a:cs typeface="DejaVu Sans Mono"/>
-              </a:rPr>
-              <a:t>    changing_image, matrix, (w, h)</a:t>
-            </a:r>
-          </a:p>
-          <a:p>
-            <a:pPr algn="l">
-              <a:lnSpc>
-                <a:spcPct val="113000"/>
-              </a:lnSpc>
-              <a:buNone/>
-              <a:defRPr sz="1425" b="0">
-                <a:solidFill>
-                  <a:srgbClr val="E6F0F1"/>
-                </a:solidFill>
-                <a:latin typeface="DejaVu Sans Mono"/>
-                <a:ea typeface="DejaVu Sans Mono"/>
-                <a:cs typeface="DejaVu Sans Mono"/>
-              </a:defRPr>
-            </a:pPr>
-            <a:r>
-              <a:rPr sz="1425" b="0">
-                <a:solidFill>
-                  <a:srgbClr val="E6F0F1"/>
-                </a:solidFill>
-                <a:latin typeface="DejaVu Sans Mono"/>
-                <a:ea typeface="DejaVu Sans Mono"/>
-                <a:cs typeface="DejaVu Sans Mono"/>
-              </a:rPr>
-              <a:t>)</a:t>
-            </a:r>
-          </a:p>
-        </p:txBody>
-      </p:sp>
-      <p:sp>
-        <p:nvSpPr>
-          <p:cNvPr id="6" name="Прямоугольник 5">
-            <a:extLst>
-              <a:ext uri="{FF2B5EF4-FFF2-40B4-BE49-F238E27FC236}">
-                <a16:creationId xmlns:a16="http://schemas.microsoft.com/office/drawing/2014/main" id="{950E58B6-47A0-4FDA-B87F-58993C996062}"/>
+        </p:spPr>
+      </p:pic>
+      <p:sp>
+        <p:nvSpPr>
+          <p:cNvPr id="10" name="Прямоугольник 9">
+            <a:extLst>
+              <a:ext uri="{FF2B5EF4-FFF2-40B4-BE49-F238E27FC236}">
+                <a16:creationId xmlns:a16="http://schemas.microsoft.com/office/drawing/2014/main" id="{1157F241-7035-D6FB-0146-9FBD579072F8}"/>
               </a:ext>
             </a:extLst>
           </p:cNvPr>
@@ -10939,8 +10900,8 @@
         </p:nvSpPr>
         <p:spPr>
           <a:xfrm>
-            <a:off x="6191250" y="4467225"/>
-            <a:ext cx="5467350" cy="1152525"/>
+            <a:off x="6285722" y="3019424"/>
+            <a:ext cx="5461130" cy="819151"/>
           </a:xfrm>
           <a:prstGeom prst="rect">
             <a:avLst/>
@@ -10961,9 +10922,9 @@
                 <a:spcPct val="113000"/>
               </a:lnSpc>
               <a:buNone/>
-              <a:defRPr sz="1800" b="0">
-                <a:solidFill>
-                  <a:srgbClr val="20333D"/>
+              <a:defRPr sz="1650" b="0">
+                <a:solidFill>
+                  <a:srgbClr val="566872"/>
                 </a:solidFill>
                 <a:latin typeface="DejaVu Sans"/>
                 <a:ea typeface="DejaVu Sans"/>
@@ -10971,68 +10932,18 @@
               </a:defRPr>
             </a:pPr>
             <a:r>
-              <a:rPr sz="1800" b="0">
-                <a:solidFill>
-                  <a:srgbClr val="20333D"/>
-                </a:solidFill>
-                <a:latin typeface="DejaVu Sans"/>
-                <a:ea typeface="DejaVu Sans"/>
-                <a:cs typeface="DejaVu Sans"/>
-              </a:rPr>
-              <a:t>Четыре исходные точки переходят в углы кадра 740 × 740. Матрица преобразования имеет размер 3 × 3.</a:t>
-            </a:r>
-          </a:p>
-        </p:txBody>
-      </p:sp>
-      <p:sp>
-        <p:nvSpPr>
-          <p:cNvPr id="7" name="Прямоугольник 6">
-            <a:extLst>
-              <a:ext uri="{FF2B5EF4-FFF2-40B4-BE49-F238E27FC236}">
-                <a16:creationId xmlns:a16="http://schemas.microsoft.com/office/drawing/2014/main" id="{EA486132-4374-44E4-BD7E-4E9890EDC63B}"/>
-              </a:ext>
-            </a:extLst>
-          </p:cNvPr>
-          <p:cNvSpPr>
-            <a:spLocks noGrp="1"/>
-          </p:cNvSpPr>
-          <p:nvPr/>
-        </p:nvSpPr>
-        <p:spPr>
-          <a:xfrm>
-            <a:off x="533400" y="5934075"/>
-            <a:ext cx="11125200" cy="533400"/>
-          </a:xfrm>
-          <a:prstGeom prst="rect">
-            <a:avLst/>
-          </a:prstGeom>
-          <a:noFill/>
-          <a:ln w="0">
-            <a:noFill/>
-          </a:ln>
-        </p:spPr>
-        <p:txBody>
-          <a:bodyPr lIns="0" tIns="0" rIns="0" bIns="0" anchor="t">
-            <a:noAutofit/>
-          </a:bodyPr>
-          <a:lstStyle/>
-          <a:p>
-            <a:pPr algn="l">
-              <a:lnSpc>
-                <a:spcPct val="113000"/>
-              </a:lnSpc>
-              <a:buNone/>
-              <a:defRPr sz="1650" b="0">
+              <a:rPr sz="1650" b="0" dirty="0" err="1">
                 <a:solidFill>
                   <a:srgbClr val="566872"/>
                 </a:solidFill>
                 <a:latin typeface="DejaVu Sans"/>
                 <a:ea typeface="DejaVu Sans"/>
                 <a:cs typeface="DejaVu Sans"/>
-              </a:defRPr>
-            </a:pPr>
-            <a:r>
-              <a:rPr sz="1650" b="0">
+              </a:rPr>
+              <a:t>Параметр</a:t>
+            </a:r>
+            <a:r>
+              <a:rPr sz="1650" b="0" dirty="0">
                 <a:solidFill>
                   <a:srgbClr val="566872"/>
                 </a:solidFill>
@@ -11040,7 +10951,128 @@
                 <a:ea typeface="DejaVu Sans"/>
                 <a:cs typeface="DejaVu Sans"/>
               </a:rPr>
-              <a:t>Порядок соответствующих точек: верхняя левая, верхняя правая, нижняя правая, нижняя левая.</a:t>
+              <a:t> 1 </a:t>
+            </a:r>
+            <a:r>
+              <a:rPr sz="1650" b="0" dirty="0" err="1">
+                <a:solidFill>
+                  <a:srgbClr val="566872"/>
+                </a:solidFill>
+                <a:latin typeface="DejaVu Sans"/>
+                <a:ea typeface="DejaVu Sans"/>
+                <a:cs typeface="DejaVu Sans"/>
+              </a:rPr>
+              <a:t>отражает</a:t>
+            </a:r>
+            <a:r>
+              <a:rPr sz="1650" b="0" dirty="0">
+                <a:solidFill>
+                  <a:srgbClr val="566872"/>
+                </a:solidFill>
+                <a:latin typeface="DejaVu Sans"/>
+                <a:ea typeface="DejaVu Sans"/>
+                <a:cs typeface="DejaVu Sans"/>
+              </a:rPr>
+              <a:t> </a:t>
+            </a:r>
+            <a:r>
+              <a:rPr sz="1650" b="0" dirty="0" err="1">
+                <a:solidFill>
+                  <a:srgbClr val="566872"/>
+                </a:solidFill>
+                <a:latin typeface="DejaVu Sans"/>
+                <a:ea typeface="DejaVu Sans"/>
+                <a:cs typeface="DejaVu Sans"/>
+              </a:rPr>
+              <a:t>изображение</a:t>
+            </a:r>
+            <a:r>
+              <a:rPr sz="1650" b="0" dirty="0">
+                <a:solidFill>
+                  <a:srgbClr val="566872"/>
+                </a:solidFill>
+                <a:latin typeface="DejaVu Sans"/>
+                <a:ea typeface="DejaVu Sans"/>
+                <a:cs typeface="DejaVu Sans"/>
+              </a:rPr>
+              <a:t> </a:t>
+            </a:r>
+            <a:r>
+              <a:rPr sz="1650" b="0" dirty="0" err="1">
+                <a:solidFill>
+                  <a:srgbClr val="566872"/>
+                </a:solidFill>
+                <a:latin typeface="DejaVu Sans"/>
+                <a:ea typeface="DejaVu Sans"/>
+                <a:cs typeface="DejaVu Sans"/>
+              </a:rPr>
+              <a:t>по</a:t>
+            </a:r>
+            <a:r>
+              <a:rPr sz="1650" b="0" dirty="0">
+                <a:solidFill>
+                  <a:srgbClr val="566872"/>
+                </a:solidFill>
+                <a:latin typeface="DejaVu Sans"/>
+                <a:ea typeface="DejaVu Sans"/>
+                <a:cs typeface="DejaVu Sans"/>
+              </a:rPr>
+              <a:t> </a:t>
+            </a:r>
+            <a:r>
+              <a:rPr sz="1650" b="0" dirty="0" err="1">
+                <a:solidFill>
+                  <a:srgbClr val="566872"/>
+                </a:solidFill>
+                <a:latin typeface="DejaVu Sans"/>
+                <a:ea typeface="DejaVu Sans"/>
+                <a:cs typeface="DejaVu Sans"/>
+              </a:rPr>
+              <a:t>горизонтали</a:t>
+            </a:r>
+            <a:r>
+              <a:rPr lang="en-US" sz="1650" b="0" dirty="0">
+                <a:solidFill>
+                  <a:srgbClr val="566872"/>
+                </a:solidFill>
+                <a:latin typeface="DejaVu Sans"/>
+                <a:ea typeface="DejaVu Sans"/>
+                <a:cs typeface="DejaVu Sans"/>
+              </a:rPr>
+              <a:t>; </a:t>
+            </a:r>
+            <a:r>
+              <a:rPr lang="ru-RU" sz="1650" b="0" dirty="0">
+                <a:solidFill>
+                  <a:srgbClr val="566872"/>
+                </a:solidFill>
+                <a:latin typeface="DejaVu Sans"/>
+                <a:ea typeface="DejaVu Sans"/>
+                <a:cs typeface="DejaVu Sans"/>
+              </a:rPr>
+              <a:t>параметр 0 – по </a:t>
+            </a:r>
+            <a:r>
+              <a:rPr sz="1650" b="0" dirty="0" err="1">
+                <a:solidFill>
+                  <a:srgbClr val="566872"/>
+                </a:solidFill>
+                <a:latin typeface="DejaVu Sans"/>
+                <a:ea typeface="DejaVu Sans"/>
+                <a:cs typeface="DejaVu Sans"/>
+              </a:rPr>
+              <a:t>вертикали</a:t>
+            </a:r>
+            <a:r>
+              <a:rPr sz="1650" b="0" dirty="0">
+                <a:solidFill>
+                  <a:srgbClr val="566872"/>
+                </a:solidFill>
+                <a:latin typeface="DejaVu Sans"/>
+                <a:ea typeface="DejaVu Sans"/>
+                <a:cs typeface="DejaVu Sans"/>
+              </a:rPr>
+              <a:t>. </a:t>
             </a:r>
           </a:p>
         </p:txBody>
@@ -11048,7 +11080,7 @@
     </p:spTree>
     <p:extLst>
       <p:ext uri="{BB962C8B-B14F-4D97-AF65-F5344CB8AC3E}">
-        <p14:creationId xmlns:p14="http://schemas.microsoft.com/office/powerpoint/2010/main" val="697761874"/>
+        <p14:creationId xmlns:p14="http://schemas.microsoft.com/office/powerpoint/2010/main" val="1609282152"/>
       </p:ext>
     </p:extLst>
   </p:cSld>
@@ -11085,10 +11117,10 @@
       </p:grpSpPr>
       <p:sp>
         <p:nvSpPr>
-          <p:cNvPr id="6" name="Прямоугольник 5">
-            <a:extLst>
-              <a:ext uri="{FF2B5EF4-FFF2-40B4-BE49-F238E27FC236}">
-                <a16:creationId xmlns:a16="http://schemas.microsoft.com/office/drawing/2014/main" id="{6C9D2B2F-2DD3-4BC9-9415-20ED65E067BC}"/>
+          <p:cNvPr id="8" name="Прямоугольник 7">
+            <a:extLst>
+              <a:ext uri="{FF2B5EF4-FFF2-40B4-BE49-F238E27FC236}">
+                <a16:creationId xmlns:a16="http://schemas.microsoft.com/office/drawing/2014/main" id="{DD133DC1-12DF-45DA-A073-D71B0AD06A9F}"/>
               </a:ext>
             </a:extLst>
           </p:cNvPr>
@@ -11149,7 +11181,7 @@
           <p:cNvPr id="2" name="Прямоугольник 1">
             <a:extLst>
               <a:ext uri="{FF2B5EF4-FFF2-40B4-BE49-F238E27FC236}">
-                <a16:creationId xmlns:a16="http://schemas.microsoft.com/office/drawing/2014/main" id="{5437F7F6-DEFE-4DC4-9DB2-CD600EFA4866}"/>
+                <a16:creationId xmlns:a16="http://schemas.microsoft.com/office/drawing/2014/main" id="{14BD1181-EFCA-40E7-9548-2F84B354BA60}"/>
               </a:ext>
             </a:extLst>
           </p:cNvPr>
@@ -11200,7 +11232,7 @@
                 <a:ea typeface="DejaVu Sans"/>
                 <a:cs typeface="DejaVu Sans"/>
               </a:rPr>
-              <a:t>Результат перспективного преобразования</a:t>
+              <a:t>Перспективное преобразование</a:t>
             </a:r>
           </a:p>
         </p:txBody>
@@ -11210,7 +11242,7 @@
           <p:cNvPr id="3" name="Прямоугольник 2">
             <a:extLst>
               <a:ext uri="{FF2B5EF4-FFF2-40B4-BE49-F238E27FC236}">
-                <a16:creationId xmlns:a16="http://schemas.microsoft.com/office/drawing/2014/main" id="{38F981B7-E74D-4881-B033-ACFCB3E21F8B}"/>
+                <a16:creationId xmlns:a16="http://schemas.microsoft.com/office/drawing/2014/main" id="{6CCEEDE4-1D4F-48AA-B25B-8F9C8DC772EA}"/>
               </a:ext>
             </a:extLst>
           </p:cNvPr>
@@ -11253,7 +11285,7 @@
               </a:defRPr>
             </a:pPr>
             <a:r>
-              <a:rPr sz="1050" b="0">
+              <a:rPr sz="1050" b="0" dirty="0">
                 <a:solidFill>
                   <a:srgbClr val="566872"/>
                 </a:solidFill>
@@ -11261,39 +11293,298 @@
                 <a:ea typeface="DejaVu Sans"/>
                 <a:cs typeface="DejaVu Sans"/>
               </a:rPr>
-              <a:t>11</a:t>
-            </a:r>
-          </a:p>
-        </p:txBody>
-      </p:sp>
-      <p:pic>
-        <p:nvPicPr>
-          <p:cNvPr id="9" name="Рисунок 8"/>
-          <p:cNvPicPr>
-            <a:picLocks noChangeAspect="1"/>
-          </p:cNvPicPr>
+              <a:t>1</a:t>
+            </a:r>
+            <a:r>
+              <a:rPr lang="ru-RU" sz="1050" b="0" dirty="0">
+                <a:solidFill>
+                  <a:srgbClr val="566872"/>
+                </a:solidFill>
+                <a:latin typeface="DejaVu Sans"/>
+                <a:ea typeface="DejaVu Sans"/>
+                <a:cs typeface="DejaVu Sans"/>
+              </a:rPr>
+              <a:t>1</a:t>
+            </a:r>
+            <a:endParaRPr sz="1050" b="0" dirty="0">
+              <a:solidFill>
+                <a:srgbClr val="566872"/>
+              </a:solidFill>
+              <a:latin typeface="DejaVu Sans"/>
+              <a:ea typeface="DejaVu Sans"/>
+              <a:cs typeface="DejaVu Sans"/>
+            </a:endParaRPr>
+          </a:p>
+        </p:txBody>
+      </p:sp>
+      <p:sp>
+        <p:nvSpPr>
+          <p:cNvPr id="4" name="Прямоугольник 3">
+            <a:extLst>
+              <a:ext uri="{FF2B5EF4-FFF2-40B4-BE49-F238E27FC236}">
+                <a16:creationId xmlns:a16="http://schemas.microsoft.com/office/drawing/2014/main" id="{B81231E6-9A11-4BF6-BCEF-D4571F431A57}"/>
+              </a:ext>
+            </a:extLst>
+          </p:cNvPr>
+          <p:cNvSpPr>
+            <a:spLocks noGrp="1"/>
+          </p:cNvSpPr>
           <p:nvPr/>
-        </p:nvPicPr>
-        <p:blipFill>
-          <a:blip r:embed="rId3"/>
-          <a:stretch/>
-        </p:blipFill>
-        <p:spPr>
-          <a:xfrm>
-            <a:off x="2017342" y="1476375"/>
-            <a:ext cx="8157315" cy="4229100"/>
+        </p:nvSpPr>
+        <p:spPr>
+          <a:xfrm>
+            <a:off x="533400" y="1504950"/>
+            <a:ext cx="5429250" cy="3505200"/>
           </a:xfrm>
           <a:prstGeom prst="rect">
             <a:avLst/>
           </a:prstGeom>
-        </p:spPr>
-      </p:pic>
+          <a:solidFill>
+            <a:srgbClr val="182E38"/>
+          </a:solidFill>
+          <a:ln w="0">
+            <a:noFill/>
+          </a:ln>
+        </p:spPr>
+        <p:txBody>
+          <a:bodyPr lIns="209550" tIns="190500" rIns="152400" bIns="152400" anchor="t">
+            <a:noAutofit/>
+          </a:bodyPr>
+          <a:lstStyle/>
+          <a:p>
+            <a:pPr algn="l">
+              <a:lnSpc>
+                <a:spcPct val="113000"/>
+              </a:lnSpc>
+              <a:buNone/>
+              <a:defRPr sz="1575" b="0">
+                <a:solidFill>
+                  <a:srgbClr val="E6F0F1"/>
+                </a:solidFill>
+                <a:latin typeface="DejaVu Sans Mono"/>
+                <a:ea typeface="DejaVu Sans Mono"/>
+                <a:cs typeface="DejaVu Sans Mono"/>
+              </a:defRPr>
+            </a:pPr>
+            <a:r>
+              <a:rPr sz="1575" b="0">
+                <a:solidFill>
+                  <a:srgbClr val="E6F0F1"/>
+                </a:solidFill>
+                <a:latin typeface="DejaVu Sans Mono"/>
+                <a:ea typeface="DejaVu Sans Mono"/>
+                <a:cs typeface="DejaVu Sans Mono"/>
+              </a:rPr>
+              <a:t>src_points = np.float32([</a:t>
+            </a:r>
+          </a:p>
+          <a:p>
+            <a:pPr algn="l">
+              <a:lnSpc>
+                <a:spcPct val="113000"/>
+              </a:lnSpc>
+              <a:buNone/>
+              <a:defRPr sz="1575" b="0">
+                <a:solidFill>
+                  <a:srgbClr val="E6F0F1"/>
+                </a:solidFill>
+                <a:latin typeface="DejaVu Sans Mono"/>
+                <a:ea typeface="DejaVu Sans Mono"/>
+                <a:cs typeface="DejaVu Sans Mono"/>
+              </a:defRPr>
+            </a:pPr>
+            <a:r>
+              <a:rPr sz="1575" b="0">
+                <a:solidFill>
+                  <a:srgbClr val="E6F0F1"/>
+                </a:solidFill>
+                <a:latin typeface="DejaVu Sans Mono"/>
+                <a:ea typeface="DejaVu Sans Mono"/>
+                <a:cs typeface="DejaVu Sans Mono"/>
+              </a:rPr>
+              <a:t>    [100, 80], [400, 120],</a:t>
+            </a:r>
+          </a:p>
+          <a:p>
+            <a:pPr algn="l">
+              <a:lnSpc>
+                <a:spcPct val="113000"/>
+              </a:lnSpc>
+              <a:buNone/>
+              <a:defRPr sz="1575" b="0">
+                <a:solidFill>
+                  <a:srgbClr val="E6F0F1"/>
+                </a:solidFill>
+                <a:latin typeface="DejaVu Sans Mono"/>
+                <a:ea typeface="DejaVu Sans Mono"/>
+                <a:cs typeface="DejaVu Sans Mono"/>
+              </a:defRPr>
+            </a:pPr>
+            <a:r>
+              <a:rPr sz="1575" b="0">
+                <a:solidFill>
+                  <a:srgbClr val="E6F0F1"/>
+                </a:solidFill>
+                <a:latin typeface="DejaVu Sans Mono"/>
+                <a:ea typeface="DejaVu Sans Mono"/>
+                <a:cs typeface="DejaVu Sans Mono"/>
+              </a:rPr>
+              <a:t>    [450, 400], [70, 380]</a:t>
+            </a:r>
+          </a:p>
+          <a:p>
+            <a:pPr algn="l">
+              <a:lnSpc>
+                <a:spcPct val="113000"/>
+              </a:lnSpc>
+              <a:buNone/>
+              <a:defRPr sz="1575" b="0">
+                <a:solidFill>
+                  <a:srgbClr val="E6F0F1"/>
+                </a:solidFill>
+                <a:latin typeface="DejaVu Sans Mono"/>
+                <a:ea typeface="DejaVu Sans Mono"/>
+                <a:cs typeface="DejaVu Sans Mono"/>
+              </a:defRPr>
+            </a:pPr>
+            <a:r>
+              <a:rPr sz="1575" b="0">
+                <a:solidFill>
+                  <a:srgbClr val="E6F0F1"/>
+                </a:solidFill>
+                <a:latin typeface="DejaVu Sans Mono"/>
+                <a:ea typeface="DejaVu Sans Mono"/>
+                <a:cs typeface="DejaVu Sans Mono"/>
+              </a:rPr>
+              <a:t>])</a:t>
+            </a:r>
+          </a:p>
+          <a:p>
+            <a:endParaRPr sz="1575" b="0">
+              <a:solidFill>
+                <a:srgbClr val="E6F0F1"/>
+              </a:solidFill>
+              <a:latin typeface="DejaVu Sans Mono"/>
+              <a:ea typeface="DejaVu Sans Mono"/>
+              <a:cs typeface="DejaVu Sans Mono"/>
+            </a:endParaRPr>
+          </a:p>
+          <a:p>
+            <a:pPr algn="l">
+              <a:lnSpc>
+                <a:spcPct val="113000"/>
+              </a:lnSpc>
+              <a:buNone/>
+              <a:defRPr sz="1575" b="0">
+                <a:solidFill>
+                  <a:srgbClr val="E6F0F1"/>
+                </a:solidFill>
+                <a:latin typeface="DejaVu Sans Mono"/>
+                <a:ea typeface="DejaVu Sans Mono"/>
+                <a:cs typeface="DejaVu Sans Mono"/>
+              </a:defRPr>
+            </a:pPr>
+            <a:r>
+              <a:rPr sz="1575" b="0">
+                <a:solidFill>
+                  <a:srgbClr val="E6F0F1"/>
+                </a:solidFill>
+                <a:latin typeface="DejaVu Sans Mono"/>
+                <a:ea typeface="DejaVu Sans Mono"/>
+                <a:cs typeface="DejaVu Sans Mono"/>
+              </a:rPr>
+              <a:t>dst_points = np.float32([</a:t>
+            </a:r>
+          </a:p>
+          <a:p>
+            <a:pPr algn="l">
+              <a:lnSpc>
+                <a:spcPct val="113000"/>
+              </a:lnSpc>
+              <a:buNone/>
+              <a:defRPr sz="1575" b="0">
+                <a:solidFill>
+                  <a:srgbClr val="E6F0F1"/>
+                </a:solidFill>
+                <a:latin typeface="DejaVu Sans Mono"/>
+                <a:ea typeface="DejaVu Sans Mono"/>
+                <a:cs typeface="DejaVu Sans Mono"/>
+              </a:defRPr>
+            </a:pPr>
+            <a:r>
+              <a:rPr sz="1575" b="0">
+                <a:solidFill>
+                  <a:srgbClr val="E6F0F1"/>
+                </a:solidFill>
+                <a:latin typeface="DejaVu Sans Mono"/>
+                <a:ea typeface="DejaVu Sans Mono"/>
+                <a:cs typeface="DejaVu Sans Mono"/>
+              </a:rPr>
+              <a:t>    [0, 0], [w - 1, 0],</a:t>
+            </a:r>
+          </a:p>
+          <a:p>
+            <a:pPr algn="l">
+              <a:lnSpc>
+                <a:spcPct val="113000"/>
+              </a:lnSpc>
+              <a:buNone/>
+              <a:defRPr sz="1575" b="0">
+                <a:solidFill>
+                  <a:srgbClr val="E6F0F1"/>
+                </a:solidFill>
+                <a:latin typeface="DejaVu Sans Mono"/>
+                <a:ea typeface="DejaVu Sans Mono"/>
+                <a:cs typeface="DejaVu Sans Mono"/>
+              </a:defRPr>
+            </a:pPr>
+            <a:r>
+              <a:rPr sz="1575" b="0">
+                <a:solidFill>
+                  <a:srgbClr val="E6F0F1"/>
+                </a:solidFill>
+                <a:latin typeface="DejaVu Sans Mono"/>
+                <a:ea typeface="DejaVu Sans Mono"/>
+                <a:cs typeface="DejaVu Sans Mono"/>
+              </a:rPr>
+              <a:t>    [w - 1, h - 1], [0, h - 1]</a:t>
+            </a:r>
+          </a:p>
+          <a:p>
+            <a:pPr algn="l">
+              <a:lnSpc>
+                <a:spcPct val="113000"/>
+              </a:lnSpc>
+              <a:buNone/>
+              <a:defRPr sz="1575" b="0">
+                <a:solidFill>
+                  <a:srgbClr val="E6F0F1"/>
+                </a:solidFill>
+                <a:latin typeface="DejaVu Sans Mono"/>
+                <a:ea typeface="DejaVu Sans Mono"/>
+                <a:cs typeface="DejaVu Sans Mono"/>
+              </a:defRPr>
+            </a:pPr>
+            <a:r>
+              <a:rPr sz="1575" b="0">
+                <a:solidFill>
+                  <a:srgbClr val="E6F0F1"/>
+                </a:solidFill>
+                <a:latin typeface="DejaVu Sans Mono"/>
+                <a:ea typeface="DejaVu Sans Mono"/>
+                <a:cs typeface="DejaVu Sans Mono"/>
+              </a:rPr>
+              <a:t>])</a:t>
+            </a:r>
+          </a:p>
+        </p:txBody>
+      </p:sp>
       <p:sp>
         <p:nvSpPr>
           <p:cNvPr id="5" name="Прямоугольник 4">
             <a:extLst>
               <a:ext uri="{FF2B5EF4-FFF2-40B4-BE49-F238E27FC236}">
-                <a16:creationId xmlns:a16="http://schemas.microsoft.com/office/drawing/2014/main" id="{4C992494-2B48-47D4-881A-D626F3184909}"/>
+                <a16:creationId xmlns:a16="http://schemas.microsoft.com/office/drawing/2014/main" id="{5F1FA692-A76B-40FB-9900-7491CBE25E81}"/>
               </a:ext>
             </a:extLst>
           </p:cNvPr>
@@ -11304,8 +11595,216 @@
         </p:nvSpPr>
         <p:spPr>
           <a:xfrm>
-            <a:off x="533400" y="5905500"/>
-            <a:ext cx="11125200" cy="552450"/>
+            <a:off x="6191250" y="1504950"/>
+            <a:ext cx="5486400" cy="2590800"/>
+          </a:xfrm>
+          <a:prstGeom prst="rect">
+            <a:avLst/>
+          </a:prstGeom>
+          <a:solidFill>
+            <a:srgbClr val="182E38"/>
+          </a:solidFill>
+          <a:ln w="0">
+            <a:noFill/>
+          </a:ln>
+        </p:spPr>
+        <p:txBody>
+          <a:bodyPr lIns="209550" tIns="190500" rIns="152400" bIns="152400" anchor="t">
+            <a:noAutofit/>
+          </a:bodyPr>
+          <a:lstStyle/>
+          <a:p>
+            <a:pPr algn="l">
+              <a:lnSpc>
+                <a:spcPct val="113000"/>
+              </a:lnSpc>
+              <a:buNone/>
+              <a:defRPr sz="1425" b="0">
+                <a:solidFill>
+                  <a:srgbClr val="E6F0F1"/>
+                </a:solidFill>
+                <a:latin typeface="DejaVu Sans Mono"/>
+                <a:ea typeface="DejaVu Sans Mono"/>
+                <a:cs typeface="DejaVu Sans Mono"/>
+              </a:defRPr>
+            </a:pPr>
+            <a:r>
+              <a:rPr sz="1425" b="0">
+                <a:solidFill>
+                  <a:srgbClr val="E6F0F1"/>
+                </a:solidFill>
+                <a:latin typeface="DejaVu Sans Mono"/>
+                <a:ea typeface="DejaVu Sans Mono"/>
+                <a:cs typeface="DejaVu Sans Mono"/>
+              </a:rPr>
+              <a:t>matrix = cv2.getPerspectiveTransform(</a:t>
+            </a:r>
+          </a:p>
+          <a:p>
+            <a:pPr algn="l">
+              <a:lnSpc>
+                <a:spcPct val="113000"/>
+              </a:lnSpc>
+              <a:buNone/>
+              <a:defRPr sz="1425" b="0">
+                <a:solidFill>
+                  <a:srgbClr val="E6F0F1"/>
+                </a:solidFill>
+                <a:latin typeface="DejaVu Sans Mono"/>
+                <a:ea typeface="DejaVu Sans Mono"/>
+                <a:cs typeface="DejaVu Sans Mono"/>
+              </a:defRPr>
+            </a:pPr>
+            <a:r>
+              <a:rPr sz="1425" b="0">
+                <a:solidFill>
+                  <a:srgbClr val="E6F0F1"/>
+                </a:solidFill>
+                <a:latin typeface="DejaVu Sans Mono"/>
+                <a:ea typeface="DejaVu Sans Mono"/>
+                <a:cs typeface="DejaVu Sans Mono"/>
+              </a:rPr>
+              <a:t>    src_points, dst_points</a:t>
+            </a:r>
+          </a:p>
+          <a:p>
+            <a:pPr algn="l">
+              <a:lnSpc>
+                <a:spcPct val="113000"/>
+              </a:lnSpc>
+              <a:buNone/>
+              <a:defRPr sz="1425" b="0">
+                <a:solidFill>
+                  <a:srgbClr val="E6F0F1"/>
+                </a:solidFill>
+                <a:latin typeface="DejaVu Sans Mono"/>
+                <a:ea typeface="DejaVu Sans Mono"/>
+                <a:cs typeface="DejaVu Sans Mono"/>
+              </a:defRPr>
+            </a:pPr>
+            <a:r>
+              <a:rPr sz="1425" b="0">
+                <a:solidFill>
+                  <a:srgbClr val="E6F0F1"/>
+                </a:solidFill>
+                <a:latin typeface="DejaVu Sans Mono"/>
+                <a:ea typeface="DejaVu Sans Mono"/>
+                <a:cs typeface="DejaVu Sans Mono"/>
+              </a:rPr>
+              <a:t>)</a:t>
+            </a:r>
+          </a:p>
+          <a:p>
+            <a:endParaRPr sz="1425" b="0">
+              <a:solidFill>
+                <a:srgbClr val="E6F0F1"/>
+              </a:solidFill>
+              <a:latin typeface="DejaVu Sans Mono"/>
+              <a:ea typeface="DejaVu Sans Mono"/>
+              <a:cs typeface="DejaVu Sans Mono"/>
+            </a:endParaRPr>
+          </a:p>
+          <a:p>
+            <a:pPr algn="l">
+              <a:lnSpc>
+                <a:spcPct val="113000"/>
+              </a:lnSpc>
+              <a:buNone/>
+              <a:defRPr sz="1425" b="0">
+                <a:solidFill>
+                  <a:srgbClr val="E6F0F1"/>
+                </a:solidFill>
+                <a:latin typeface="DejaVu Sans Mono"/>
+                <a:ea typeface="DejaVu Sans Mono"/>
+                <a:cs typeface="DejaVu Sans Mono"/>
+              </a:defRPr>
+            </a:pPr>
+            <a:r>
+              <a:rPr sz="1425" b="0">
+                <a:solidFill>
+                  <a:srgbClr val="E6F0F1"/>
+                </a:solidFill>
+                <a:latin typeface="DejaVu Sans Mono"/>
+                <a:ea typeface="DejaVu Sans Mono"/>
+                <a:cs typeface="DejaVu Sans Mono"/>
+              </a:rPr>
+              <a:t>point_image = cv2.warpPerspective(</a:t>
+            </a:r>
+          </a:p>
+          <a:p>
+            <a:pPr algn="l">
+              <a:lnSpc>
+                <a:spcPct val="113000"/>
+              </a:lnSpc>
+              <a:buNone/>
+              <a:defRPr sz="1425" b="0">
+                <a:solidFill>
+                  <a:srgbClr val="E6F0F1"/>
+                </a:solidFill>
+                <a:latin typeface="DejaVu Sans Mono"/>
+                <a:ea typeface="DejaVu Sans Mono"/>
+                <a:cs typeface="DejaVu Sans Mono"/>
+              </a:defRPr>
+            </a:pPr>
+            <a:r>
+              <a:rPr sz="1425" b="0">
+                <a:solidFill>
+                  <a:srgbClr val="E6F0F1"/>
+                </a:solidFill>
+                <a:latin typeface="DejaVu Sans Mono"/>
+                <a:ea typeface="DejaVu Sans Mono"/>
+                <a:cs typeface="DejaVu Sans Mono"/>
+              </a:rPr>
+              <a:t>    changing_image, matrix, (w, h)</a:t>
+            </a:r>
+          </a:p>
+          <a:p>
+            <a:pPr algn="l">
+              <a:lnSpc>
+                <a:spcPct val="113000"/>
+              </a:lnSpc>
+              <a:buNone/>
+              <a:defRPr sz="1425" b="0">
+                <a:solidFill>
+                  <a:srgbClr val="E6F0F1"/>
+                </a:solidFill>
+                <a:latin typeface="DejaVu Sans Mono"/>
+                <a:ea typeface="DejaVu Sans Mono"/>
+                <a:cs typeface="DejaVu Sans Mono"/>
+              </a:defRPr>
+            </a:pPr>
+            <a:r>
+              <a:rPr sz="1425" b="0">
+                <a:solidFill>
+                  <a:srgbClr val="E6F0F1"/>
+                </a:solidFill>
+                <a:latin typeface="DejaVu Sans Mono"/>
+                <a:ea typeface="DejaVu Sans Mono"/>
+                <a:cs typeface="DejaVu Sans Mono"/>
+              </a:rPr>
+              <a:t>)</a:t>
+            </a:r>
+          </a:p>
+        </p:txBody>
+      </p:sp>
+      <p:sp>
+        <p:nvSpPr>
+          <p:cNvPr id="6" name="Прямоугольник 5">
+            <a:extLst>
+              <a:ext uri="{FF2B5EF4-FFF2-40B4-BE49-F238E27FC236}">
+                <a16:creationId xmlns:a16="http://schemas.microsoft.com/office/drawing/2014/main" id="{950E58B6-47A0-4FDA-B87F-58993C996062}"/>
+              </a:ext>
+            </a:extLst>
+          </p:cNvPr>
+          <p:cNvSpPr>
+            <a:spLocks noGrp="1"/>
+          </p:cNvSpPr>
+          <p:nvPr/>
+        </p:nvSpPr>
+        <p:spPr>
+          <a:xfrm>
+            <a:off x="6191250" y="4467225"/>
+            <a:ext cx="5467350" cy="1152525"/>
           </a:xfrm>
           <a:prstGeom prst="rect">
             <a:avLst/>
@@ -11326,6 +11825,67 @@
                 <a:spcPct val="113000"/>
               </a:lnSpc>
               <a:buNone/>
+              <a:defRPr sz="1800" b="0">
+                <a:solidFill>
+                  <a:srgbClr val="20333D"/>
+                </a:solidFill>
+                <a:latin typeface="DejaVu Sans"/>
+                <a:ea typeface="DejaVu Sans"/>
+                <a:cs typeface="DejaVu Sans"/>
+              </a:defRPr>
+            </a:pPr>
+            <a:r>
+              <a:rPr sz="1800" b="0">
+                <a:solidFill>
+                  <a:srgbClr val="20333D"/>
+                </a:solidFill>
+                <a:latin typeface="DejaVu Sans"/>
+                <a:ea typeface="DejaVu Sans"/>
+                <a:cs typeface="DejaVu Sans"/>
+              </a:rPr>
+              <a:t>Четыре исходные точки переходят в углы кадра 740 × 740. Матрица преобразования имеет размер 3 × 3.</a:t>
+            </a:r>
+          </a:p>
+        </p:txBody>
+      </p:sp>
+      <p:sp>
+        <p:nvSpPr>
+          <p:cNvPr id="7" name="Прямоугольник 6">
+            <a:extLst>
+              <a:ext uri="{FF2B5EF4-FFF2-40B4-BE49-F238E27FC236}">
+                <a16:creationId xmlns:a16="http://schemas.microsoft.com/office/drawing/2014/main" id="{EA486132-4374-44E4-BD7E-4E9890EDC63B}"/>
+              </a:ext>
+            </a:extLst>
+          </p:cNvPr>
+          <p:cNvSpPr>
+            <a:spLocks noGrp="1"/>
+          </p:cNvSpPr>
+          <p:nvPr/>
+        </p:nvSpPr>
+        <p:spPr>
+          <a:xfrm>
+            <a:off x="533400" y="5934075"/>
+            <a:ext cx="11125200" cy="533400"/>
+          </a:xfrm>
+          <a:prstGeom prst="rect">
+            <a:avLst/>
+          </a:prstGeom>
+          <a:noFill/>
+          <a:ln w="0">
+            <a:noFill/>
+          </a:ln>
+        </p:spPr>
+        <p:txBody>
+          <a:bodyPr lIns="0" tIns="0" rIns="0" bIns="0" anchor="t">
+            <a:noAutofit/>
+          </a:bodyPr>
+          <a:lstStyle/>
+          <a:p>
+            <a:pPr algn="l">
+              <a:lnSpc>
+                <a:spcPct val="113000"/>
+              </a:lnSpc>
+              <a:buNone/>
               <a:defRPr sz="1650" b="0">
                 <a:solidFill>
                   <a:srgbClr val="566872"/>
@@ -11344,7 +11904,7 @@
                 <a:ea typeface="DejaVu Sans"/>
                 <a:cs typeface="DejaVu Sans"/>
               </a:rPr>
-              <a:t>Выбранная четырёхугольная область растянута на весь кадр. Она включает только часть фигуры, поэтому результат показывает увеличенный и искажённый фрагмент.</a:t>
+              <a:t>Порядок соответствующих точек: верхняя левая, верхняя правая, нижняя правая, нижняя левая.</a:t>
             </a:r>
           </a:p>
         </p:txBody>
@@ -11352,7 +11912,7 @@
     </p:spTree>
     <p:extLst>
       <p:ext uri="{BB962C8B-B14F-4D97-AF65-F5344CB8AC3E}">
-        <p14:creationId xmlns:p14="http://schemas.microsoft.com/office/powerpoint/2010/main" val="2785167386"/>
+        <p14:creationId xmlns:p14="http://schemas.microsoft.com/office/powerpoint/2010/main" val="697761874"/>
       </p:ext>
     </p:extLst>
   </p:cSld>
@@ -11435,7 +11995,7 @@
               </a:defRPr>
             </a:pPr>
             <a:r>
-              <a:rPr sz="1275" b="1" dirty="0" err="1">
+              <a:rPr sz="1275" b="1">
                 <a:solidFill>
                   <a:srgbClr val="237E80"/>
                 </a:solidFill>
@@ -11443,18 +12003,7 @@
                 <a:ea typeface="DejaVu Sans"/>
                 <a:cs typeface="DejaVu Sans"/>
               </a:rPr>
-              <a:t>Задание</a:t>
-            </a:r>
-            <a:r>
-              <a:rPr sz="1275" b="1" dirty="0">
-                <a:solidFill>
-                  <a:srgbClr val="237E80"/>
-                </a:solidFill>
-                <a:latin typeface="DejaVu Sans"/>
-                <a:ea typeface="DejaVu Sans"/>
-                <a:cs typeface="DejaVu Sans"/>
-              </a:rPr>
-              <a:t> 5.</a:t>
+              <a:t>Задание 5.</a:t>
             </a:r>
           </a:p>
         </p:txBody>
@@ -11568,7 +12117,7 @@
               </a:defRPr>
             </a:pPr>
             <a:r>
-              <a:rPr sz="1050" b="0">
+              <a:rPr sz="1050" b="0" dirty="0">
                 <a:solidFill>
                   <a:srgbClr val="566872"/>
                 </a:solidFill>
@@ -11576,8 +12125,361 @@
                 <a:ea typeface="DejaVu Sans"/>
                 <a:cs typeface="DejaVu Sans"/>
               </a:rPr>
-              <a:t>11</a:t>
-            </a:r>
+              <a:t>1</a:t>
+            </a:r>
+            <a:r>
+              <a:rPr lang="ru-RU" sz="1050" b="0" dirty="0">
+                <a:solidFill>
+                  <a:srgbClr val="566872"/>
+                </a:solidFill>
+                <a:latin typeface="DejaVu Sans"/>
+                <a:ea typeface="DejaVu Sans"/>
+                <a:cs typeface="DejaVu Sans"/>
+              </a:rPr>
+              <a:t>2</a:t>
+            </a:r>
+            <a:endParaRPr sz="1050" b="0" dirty="0">
+              <a:solidFill>
+                <a:srgbClr val="566872"/>
+              </a:solidFill>
+              <a:latin typeface="DejaVu Sans"/>
+              <a:ea typeface="DejaVu Sans"/>
+              <a:cs typeface="DejaVu Sans"/>
+            </a:endParaRPr>
+          </a:p>
+        </p:txBody>
+      </p:sp>
+      <p:pic>
+        <p:nvPicPr>
+          <p:cNvPr id="9" name="Рисунок 8"/>
+          <p:cNvPicPr>
+            <a:picLocks noChangeAspect="1"/>
+          </p:cNvPicPr>
+          <p:nvPr/>
+        </p:nvPicPr>
+        <p:blipFill>
+          <a:blip r:embed="rId3"/>
+          <a:stretch/>
+        </p:blipFill>
+        <p:spPr>
+          <a:xfrm>
+            <a:off x="2017342" y="1476375"/>
+            <a:ext cx="8157315" cy="4229100"/>
+          </a:xfrm>
+          <a:prstGeom prst="rect">
+            <a:avLst/>
+          </a:prstGeom>
+        </p:spPr>
+      </p:pic>
+      <p:sp>
+        <p:nvSpPr>
+          <p:cNvPr id="5" name="Прямоугольник 4">
+            <a:extLst>
+              <a:ext uri="{FF2B5EF4-FFF2-40B4-BE49-F238E27FC236}">
+                <a16:creationId xmlns:a16="http://schemas.microsoft.com/office/drawing/2014/main" id="{4C992494-2B48-47D4-881A-D626F3184909}"/>
+              </a:ext>
+            </a:extLst>
+          </p:cNvPr>
+          <p:cNvSpPr>
+            <a:spLocks noGrp="1"/>
+          </p:cNvSpPr>
+          <p:nvPr/>
+        </p:nvSpPr>
+        <p:spPr>
+          <a:xfrm>
+            <a:off x="533400" y="5905500"/>
+            <a:ext cx="11125200" cy="552450"/>
+          </a:xfrm>
+          <a:prstGeom prst="rect">
+            <a:avLst/>
+          </a:prstGeom>
+          <a:noFill/>
+          <a:ln w="0">
+            <a:noFill/>
+          </a:ln>
+        </p:spPr>
+        <p:txBody>
+          <a:bodyPr lIns="0" tIns="0" rIns="0" bIns="0" anchor="t">
+            <a:noAutofit/>
+          </a:bodyPr>
+          <a:lstStyle/>
+          <a:p>
+            <a:pPr algn="l">
+              <a:lnSpc>
+                <a:spcPct val="113000"/>
+              </a:lnSpc>
+              <a:buNone/>
+              <a:defRPr sz="1650" b="0">
+                <a:solidFill>
+                  <a:srgbClr val="566872"/>
+                </a:solidFill>
+                <a:latin typeface="DejaVu Sans"/>
+                <a:ea typeface="DejaVu Sans"/>
+                <a:cs typeface="DejaVu Sans"/>
+              </a:defRPr>
+            </a:pPr>
+            <a:r>
+              <a:rPr sz="1650" b="0">
+                <a:solidFill>
+                  <a:srgbClr val="566872"/>
+                </a:solidFill>
+                <a:latin typeface="DejaVu Sans"/>
+                <a:ea typeface="DejaVu Sans"/>
+                <a:cs typeface="DejaVu Sans"/>
+              </a:rPr>
+              <a:t>Выбранная четырёхугольная область растянута на весь кадр. Она включает только часть фигуры, поэтому результат показывает увеличенный и искажённый фрагмент.</a:t>
+            </a:r>
+          </a:p>
+        </p:txBody>
+      </p:sp>
+    </p:spTree>
+    <p:extLst>
+      <p:ext uri="{BB962C8B-B14F-4D97-AF65-F5344CB8AC3E}">
+        <p14:creationId xmlns:p14="http://schemas.microsoft.com/office/powerpoint/2010/main" val="2785167386"/>
+      </p:ext>
+    </p:extLst>
+  </p:cSld>
+  <p:clrMapOvr>
+    <a:masterClrMapping/>
+  </p:clrMapOvr>
+</p:sld>
+</file>
+
+<file path=ppt/slides/slide13.xml><?xml version="1.0" encoding="utf-8"?>
+<p:sld xmlns:a="http://schemas.openxmlformats.org/drawingml/2006/main" xmlns:r="http://schemas.openxmlformats.org/officeDocument/2006/relationships" xmlns:p="http://schemas.openxmlformats.org/presentationml/2006/main">
+  <p:cSld>
+    <p:bg>
+      <p:bgPr>
+        <a:solidFill>
+          <a:srgbClr val="FFFFFF"/>
+        </a:solidFill>
+        <a:effectLst/>
+      </p:bgPr>
+    </p:bg>
+    <p:spTree>
+      <p:nvGrpSpPr>
+        <p:cNvPr id="1" name=""/>
+        <p:cNvGrpSpPr/>
+        <p:nvPr/>
+      </p:nvGrpSpPr>
+      <p:grpSpPr>
+        <a:xfrm>
+          <a:off x="0" y="0"/>
+          <a:ext cx="0" cy="0"/>
+          <a:chOff x="0" y="0"/>
+          <a:chExt cx="0" cy="0"/>
+        </a:xfrm>
+      </p:grpSpPr>
+      <p:sp>
+        <p:nvSpPr>
+          <p:cNvPr id="6" name="Прямоугольник 5">
+            <a:extLst>
+              <a:ext uri="{FF2B5EF4-FFF2-40B4-BE49-F238E27FC236}">
+                <a16:creationId xmlns:a16="http://schemas.microsoft.com/office/drawing/2014/main" id="{6C9D2B2F-2DD3-4BC9-9415-20ED65E067BC}"/>
+              </a:ext>
+            </a:extLst>
+          </p:cNvPr>
+          <p:cNvSpPr>
+            <a:spLocks noGrp="1"/>
+          </p:cNvSpPr>
+          <p:nvPr/>
+        </p:nvSpPr>
+        <p:spPr>
+          <a:xfrm>
+            <a:off x="533400" y="371475"/>
+            <a:ext cx="11125200" cy="228600"/>
+          </a:xfrm>
+          <a:prstGeom prst="rect">
+            <a:avLst/>
+          </a:prstGeom>
+          <a:noFill/>
+          <a:ln w="0">
+            <a:noFill/>
+          </a:ln>
+        </p:spPr>
+        <p:txBody>
+          <a:bodyPr lIns="0" tIns="0" rIns="0" bIns="0" anchor="t">
+            <a:noAutofit/>
+          </a:bodyPr>
+          <a:lstStyle/>
+          <a:p>
+            <a:pPr algn="l">
+              <a:lnSpc>
+                <a:spcPct val="113000"/>
+              </a:lnSpc>
+              <a:buNone/>
+              <a:defRPr sz="1275" b="1">
+                <a:solidFill>
+                  <a:srgbClr val="237E80"/>
+                </a:solidFill>
+                <a:latin typeface="DejaVu Sans"/>
+                <a:ea typeface="DejaVu Sans"/>
+                <a:cs typeface="DejaVu Sans"/>
+              </a:defRPr>
+            </a:pPr>
+            <a:r>
+              <a:rPr sz="1275" b="1" dirty="0" err="1">
+                <a:solidFill>
+                  <a:srgbClr val="237E80"/>
+                </a:solidFill>
+                <a:latin typeface="DejaVu Sans"/>
+                <a:ea typeface="DejaVu Sans"/>
+                <a:cs typeface="DejaVu Sans"/>
+              </a:rPr>
+              <a:t>Задание</a:t>
+            </a:r>
+            <a:r>
+              <a:rPr sz="1275" b="1" dirty="0">
+                <a:solidFill>
+                  <a:srgbClr val="237E80"/>
+                </a:solidFill>
+                <a:latin typeface="DejaVu Sans"/>
+                <a:ea typeface="DejaVu Sans"/>
+                <a:cs typeface="DejaVu Sans"/>
+              </a:rPr>
+              <a:t> 5.</a:t>
+            </a:r>
+          </a:p>
+        </p:txBody>
+      </p:sp>
+      <p:sp>
+        <p:nvSpPr>
+          <p:cNvPr id="2" name="Прямоугольник 1">
+            <a:extLst>
+              <a:ext uri="{FF2B5EF4-FFF2-40B4-BE49-F238E27FC236}">
+                <a16:creationId xmlns:a16="http://schemas.microsoft.com/office/drawing/2014/main" id="{5437F7F6-DEFE-4DC4-9DB2-CD600EFA4866}"/>
+              </a:ext>
+            </a:extLst>
+          </p:cNvPr>
+          <p:cNvSpPr>
+            <a:spLocks noGrp="1"/>
+          </p:cNvSpPr>
+          <p:nvPr/>
+        </p:nvSpPr>
+        <p:spPr>
+          <a:xfrm>
+            <a:off x="533400" y="733425"/>
+            <a:ext cx="11125200" cy="628650"/>
+          </a:xfrm>
+          <a:prstGeom prst="rect">
+            <a:avLst/>
+          </a:prstGeom>
+          <a:noFill/>
+          <a:ln w="0">
+            <a:noFill/>
+          </a:ln>
+        </p:spPr>
+        <p:txBody>
+          <a:bodyPr lIns="0" tIns="0" rIns="0" bIns="0" anchor="t">
+            <a:noAutofit/>
+          </a:bodyPr>
+          <a:lstStyle/>
+          <a:p>
+            <a:pPr algn="l">
+              <a:lnSpc>
+                <a:spcPct val="113000"/>
+              </a:lnSpc>
+              <a:buNone/>
+              <a:defRPr sz="2925" b="1">
+                <a:solidFill>
+                  <a:srgbClr val="20333D"/>
+                </a:solidFill>
+                <a:latin typeface="DejaVu Sans"/>
+                <a:ea typeface="DejaVu Sans"/>
+                <a:cs typeface="DejaVu Sans"/>
+              </a:defRPr>
+            </a:pPr>
+            <a:r>
+              <a:rPr sz="2925" b="1">
+                <a:solidFill>
+                  <a:srgbClr val="20333D"/>
+                </a:solidFill>
+                <a:latin typeface="DejaVu Sans"/>
+                <a:ea typeface="DejaVu Sans"/>
+                <a:cs typeface="DejaVu Sans"/>
+              </a:rPr>
+              <a:t>Результат перспективного преобразования</a:t>
+            </a:r>
+          </a:p>
+        </p:txBody>
+      </p:sp>
+      <p:sp>
+        <p:nvSpPr>
+          <p:cNvPr id="3" name="Прямоугольник 2">
+            <a:extLst>
+              <a:ext uri="{FF2B5EF4-FFF2-40B4-BE49-F238E27FC236}">
+                <a16:creationId xmlns:a16="http://schemas.microsoft.com/office/drawing/2014/main" id="{38F981B7-E74D-4881-B033-ACFCB3E21F8B}"/>
+              </a:ext>
+            </a:extLst>
+          </p:cNvPr>
+          <p:cNvSpPr>
+            <a:spLocks noGrp="1"/>
+          </p:cNvSpPr>
+          <p:nvPr/>
+        </p:nvSpPr>
+        <p:spPr>
+          <a:xfrm>
+            <a:off x="11068050" y="6448425"/>
+            <a:ext cx="609600" cy="228600"/>
+          </a:xfrm>
+          <a:prstGeom prst="rect">
+            <a:avLst/>
+          </a:prstGeom>
+          <a:noFill/>
+          <a:ln w="0">
+            <a:noFill/>
+          </a:ln>
+        </p:spPr>
+        <p:txBody>
+          <a:bodyPr lIns="0" tIns="0" rIns="0" bIns="0" anchor="t">
+            <a:noAutofit/>
+          </a:bodyPr>
+          <a:lstStyle/>
+          <a:p>
+            <a:pPr algn="l">
+              <a:lnSpc>
+                <a:spcPct val="113000"/>
+              </a:lnSpc>
+              <a:buNone/>
+              <a:defRPr sz="1050" b="0">
+                <a:solidFill>
+                  <a:srgbClr val="566872"/>
+                </a:solidFill>
+                <a:latin typeface="DejaVu Sans"/>
+                <a:ea typeface="DejaVu Sans"/>
+                <a:cs typeface="DejaVu Sans"/>
+              </a:defRPr>
+            </a:pPr>
+            <a:r>
+              <a:rPr sz="1050" b="0" dirty="0">
+                <a:solidFill>
+                  <a:srgbClr val="566872"/>
+                </a:solidFill>
+                <a:latin typeface="DejaVu Sans"/>
+                <a:ea typeface="DejaVu Sans"/>
+                <a:cs typeface="DejaVu Sans"/>
+              </a:rPr>
+              <a:t>1</a:t>
+            </a:r>
+            <a:r>
+              <a:rPr lang="ru-RU" sz="1050" b="0" dirty="0">
+                <a:solidFill>
+                  <a:srgbClr val="566872"/>
+                </a:solidFill>
+                <a:latin typeface="DejaVu Sans"/>
+                <a:ea typeface="DejaVu Sans"/>
+                <a:cs typeface="DejaVu Sans"/>
+              </a:rPr>
+              <a:t>3</a:t>
+            </a:r>
+            <a:endParaRPr sz="1050" b="0" dirty="0">
+              <a:solidFill>
+                <a:srgbClr val="566872"/>
+              </a:solidFill>
+              <a:latin typeface="DejaVu Sans"/>
+              <a:ea typeface="DejaVu Sans"/>
+              <a:cs typeface="DejaVu Sans"/>
+            </a:endParaRPr>
           </a:p>
         </p:txBody>
       </p:sp>
@@ -11685,7 +12587,7 @@
 </p:sld>
 </file>
 
-<file path=ppt/slides/slide13.xml><?xml version="1.0" encoding="utf-8"?>
+<file path=ppt/slides/slide14.xml><?xml version="1.0" encoding="utf-8"?>
 <p:sld xmlns:a="http://schemas.openxmlformats.org/drawingml/2006/main" xmlns:r="http://schemas.openxmlformats.org/officeDocument/2006/relationships" xmlns:p="http://schemas.openxmlformats.org/presentationml/2006/main">
   <p:cSld>
     <p:bg>
@@ -11819,7 +12721,7 @@
               </a:defRPr>
             </a:pPr>
             <a:r>
-              <a:rPr sz="1050" b="0">
+              <a:rPr sz="1050" b="0" dirty="0">
                 <a:solidFill>
                   <a:srgbClr val="566872"/>
                 </a:solidFill>
@@ -11827,8 +12729,27 @@
                 <a:ea typeface="DejaVu Sans"/>
                 <a:cs typeface="DejaVu Sans"/>
               </a:rPr>
-              <a:t>12</a:t>
-            </a:r>
+              <a:t>1</a:t>
+            </a:r>
+            <a:r>
+              <a:rPr lang="ru-RU" sz="1050" b="0" dirty="0">
+                <a:solidFill>
+                  <a:srgbClr val="566872"/>
+                </a:solidFill>
+                <a:latin typeface="DejaVu Sans"/>
+                <a:ea typeface="DejaVu Sans"/>
+                <a:cs typeface="DejaVu Sans"/>
+              </a:rPr>
+              <a:t>4</a:t>
+            </a:r>
+            <a:endParaRPr sz="1050" b="0" dirty="0">
+              <a:solidFill>
+                <a:srgbClr val="566872"/>
+              </a:solidFill>
+              <a:latin typeface="DejaVu Sans"/>
+              <a:ea typeface="DejaVu Sans"/>
+              <a:cs typeface="DejaVu Sans"/>
+            </a:endParaRPr>
           </a:p>
         </p:txBody>
       </p:sp>
@@ -12333,7 +13254,7 @@
 </p:sld>
 </file>
 
-<file path=ppt/slides/slide14.xml><?xml version="1.0" encoding="utf-8"?>
+<file path=ppt/slides/slide15.xml><?xml version="1.0" encoding="utf-8"?>
 <p:sld xmlns:a="http://schemas.openxmlformats.org/drawingml/2006/main" xmlns:r="http://schemas.openxmlformats.org/officeDocument/2006/relationships" xmlns:p="http://schemas.openxmlformats.org/presentationml/2006/main">
   <p:cSld>
     <p:bg>
@@ -12349,7 +13270,7 @@
         <p:cNvPr id="1" name="">
           <a:extLst>
             <a:ext uri="{FF2B5EF4-FFF2-40B4-BE49-F238E27FC236}">
-              <a16:creationId xmlns:a16="http://schemas.microsoft.com/office/drawing/2014/main" id="{3D30D699-4708-A6C0-ED66-E446111B997C}"/>
+              <a16:creationId xmlns:a16="http://schemas.microsoft.com/office/drawing/2014/main" id="{4077A833-5EC9-3ED1-9336-2B3462951C41}"/>
             </a:ext>
           </a:extLst>
         </p:cNvPr>
@@ -12369,7 +13290,7 @@
           <p:cNvPr id="11" name="Прямоугольник 10">
             <a:extLst>
               <a:ext uri="{FF2B5EF4-FFF2-40B4-BE49-F238E27FC236}">
-                <a16:creationId xmlns:a16="http://schemas.microsoft.com/office/drawing/2014/main" id="{4A73811B-0D44-44EB-D6A0-9C6554235186}"/>
+                <a16:creationId xmlns:a16="http://schemas.microsoft.com/office/drawing/2014/main" id="{74CEB73A-9B55-8657-0E92-508FB1BD203C}"/>
               </a:ext>
             </a:extLst>
           </p:cNvPr>
@@ -12438,7 +13359,7 @@
           <p:cNvPr id="2" name="Прямоугольник 1">
             <a:extLst>
               <a:ext uri="{FF2B5EF4-FFF2-40B4-BE49-F238E27FC236}">
-                <a16:creationId xmlns:a16="http://schemas.microsoft.com/office/drawing/2014/main" id="{A6C38EF8-B7F2-27CC-4566-AF502CF53D13}"/>
+                <a16:creationId xmlns:a16="http://schemas.microsoft.com/office/drawing/2014/main" id="{D0448E3A-A346-641B-AA1E-637FC8A45843}"/>
               </a:ext>
             </a:extLst>
           </p:cNvPr>
@@ -12481,7 +13402,7 @@
               </a:defRPr>
             </a:pPr>
             <a:r>
-              <a:rPr sz="1050" b="0">
+              <a:rPr sz="1050" b="0" dirty="0">
                 <a:solidFill>
                   <a:srgbClr val="566872"/>
                 </a:solidFill>
@@ -12489,8 +13410,27 @@
                 <a:ea typeface="DejaVu Sans"/>
                 <a:cs typeface="DejaVu Sans"/>
               </a:rPr>
-              <a:t>12</a:t>
-            </a:r>
+              <a:t>1</a:t>
+            </a:r>
+            <a:r>
+              <a:rPr lang="ru-RU" sz="1050" b="0" dirty="0">
+                <a:solidFill>
+                  <a:srgbClr val="566872"/>
+                </a:solidFill>
+                <a:latin typeface="DejaVu Sans"/>
+                <a:ea typeface="DejaVu Sans"/>
+                <a:cs typeface="DejaVu Sans"/>
+              </a:rPr>
+              <a:t>5</a:t>
+            </a:r>
+            <a:endParaRPr sz="1050" b="0" dirty="0">
+              <a:solidFill>
+                <a:srgbClr val="566872"/>
+              </a:solidFill>
+              <a:latin typeface="DejaVu Sans"/>
+              <a:ea typeface="DejaVu Sans"/>
+              <a:cs typeface="DejaVu Sans"/>
+            </a:endParaRPr>
           </a:p>
         </p:txBody>
       </p:sp>
@@ -12499,7 +13439,7 @@
           <p:cNvPr id="3" name="Прямоугольник 2">
             <a:extLst>
               <a:ext uri="{FF2B5EF4-FFF2-40B4-BE49-F238E27FC236}">
-                <a16:creationId xmlns:a16="http://schemas.microsoft.com/office/drawing/2014/main" id="{28E8B46D-C6F9-BC60-D379-04BE21D94EE1}"/>
+                <a16:creationId xmlns:a16="http://schemas.microsoft.com/office/drawing/2014/main" id="{7EB13999-52AB-2E24-894D-E3417619E9F4}"/>
               </a:ext>
             </a:extLst>
           </p:cNvPr>
@@ -12510,7 +13450,7 @@
         </p:nvSpPr>
         <p:spPr>
           <a:xfrm>
-            <a:off x="533400" y="1495425"/>
+            <a:off x="533400" y="1136002"/>
             <a:ext cx="666750" cy="476250"/>
           </a:xfrm>
           <a:prstGeom prst="rect">
@@ -12542,7 +13482,7 @@
               </a:defRPr>
             </a:pPr>
             <a:r>
-              <a:rPr sz="2250" b="1">
+              <a:rPr sz="2250" b="1" dirty="0">
                 <a:solidFill>
                   <a:srgbClr val="237E80"/>
                 </a:solidFill>
@@ -12560,7 +13500,7 @@
           <p:cNvPr id="4" name="Прямоугольник 3">
             <a:extLst>
               <a:ext uri="{FF2B5EF4-FFF2-40B4-BE49-F238E27FC236}">
-                <a16:creationId xmlns:a16="http://schemas.microsoft.com/office/drawing/2014/main" id="{CFD70840-B95A-71D4-D48F-10A8E372DEB6}"/>
+                <a16:creationId xmlns:a16="http://schemas.microsoft.com/office/drawing/2014/main" id="{3584367F-4C93-0C86-C714-46084F471E77}"/>
               </a:ext>
             </a:extLst>
           </p:cNvPr>
@@ -12571,8 +13511,8 @@
         </p:nvSpPr>
         <p:spPr>
           <a:xfrm>
-            <a:off x="1390650" y="1495425"/>
-            <a:ext cx="10077450" cy="1047750"/>
+            <a:off x="1390650" y="1136002"/>
+            <a:ext cx="10077450" cy="930534"/>
           </a:xfrm>
           <a:prstGeom prst="rect">
             <a:avLst/>
@@ -12602,22 +13542,585 @@
               </a:defRPr>
             </a:pPr>
             <a:r>
-              <a:rPr lang="ru-RU" sz="1875" b="1" dirty="0">
+              <a:rPr lang="ru-RU" sz="1600" b="1" dirty="0">
                 <a:solidFill>
                   <a:srgbClr val="20333D"/>
                 </a:solidFill>
                 <a:latin typeface="DejaVu Sans"/>
               </a:rPr>
-              <a:t>Какой эффект даёт уменьшение изображения с коэффициентом 0.25? </a:t>
-            </a:r>
-            <a:r>
-              <a:rPr lang="ru-RU" sz="1875" dirty="0">
+              <a:t>В чем разница между аффинным и перспективным преобразованием? </a:t>
+            </a:r>
+            <a:r>
+              <a:rPr lang="ru-RU" sz="1600" dirty="0">
                 <a:solidFill>
                   <a:srgbClr val="20333D"/>
                 </a:solidFill>
                 <a:latin typeface="DejaVu Sans"/>
               </a:rPr>
-              <a:t>Уменьшение изображения в 0.25 раза по каждой оси означает, что его линейные размеры сокращаются в 4 раза, а общее количество пикселей уменьшается в 16 раз. К основным эффектам относятся: потеря мелких деталей и высокочастотных компонентов, снижение вычислительной нагрузки и сохранение пропорций.</a:t>
+              <a:t>Аффинное преобразование сохраняет параллельность прямых, описывается матрицей размера 2 * 3 и для вычисления требует 3 пары соответствующих точек. Перспективное преобразование не сохраняет параллельность прямых, описывается матрицей </a:t>
+            </a:r>
+            <a:r>
+              <a:rPr lang="ru-RU" sz="1600" dirty="0" err="1">
+                <a:solidFill>
+                  <a:srgbClr val="20333D"/>
+                </a:solidFill>
+                <a:latin typeface="DejaVu Sans"/>
+              </a:rPr>
+              <a:t>гомографии</a:t>
+            </a:r>
+            <a:r>
+              <a:rPr lang="ru-RU" sz="1600" dirty="0">
+                <a:solidFill>
+                  <a:srgbClr val="20333D"/>
+                </a:solidFill>
+                <a:latin typeface="DejaVu Sans"/>
+              </a:rPr>
+              <a:t> 3 * 3 и требует 4 пары соответствующих точек.</a:t>
+            </a:r>
+          </a:p>
+        </p:txBody>
+      </p:sp>
+      <p:sp>
+        <p:nvSpPr>
+          <p:cNvPr id="5" name="Прямоугольник 4">
+            <a:extLst>
+              <a:ext uri="{FF2B5EF4-FFF2-40B4-BE49-F238E27FC236}">
+                <a16:creationId xmlns:a16="http://schemas.microsoft.com/office/drawing/2014/main" id="{ABF38BB7-EC8D-C360-A7AF-76BA2990BB90}"/>
+              </a:ext>
+            </a:extLst>
+          </p:cNvPr>
+          <p:cNvSpPr>
+            <a:spLocks noGrp="1"/>
+          </p:cNvSpPr>
+          <p:nvPr/>
+        </p:nvSpPr>
+        <p:spPr>
+          <a:xfrm>
+            <a:off x="533400" y="2441899"/>
+            <a:ext cx="666750" cy="476250"/>
+          </a:xfrm>
+          <a:prstGeom prst="rect">
+            <a:avLst/>
+          </a:prstGeom>
+          <a:noFill/>
+          <a:ln w="0">
+            <a:noFill/>
+          </a:ln>
+        </p:spPr>
+        <p:txBody>
+          <a:bodyPr lIns="0" tIns="0" rIns="0" bIns="0" anchor="t">
+            <a:noAutofit/>
+          </a:bodyPr>
+          <a:lstStyle/>
+          <a:p>
+            <a:pPr algn="l">
+              <a:lnSpc>
+                <a:spcPct val="113000"/>
+              </a:lnSpc>
+              <a:buNone/>
+              <a:defRPr sz="2250" b="1">
+                <a:solidFill>
+                  <a:srgbClr val="237E80"/>
+                </a:solidFill>
+                <a:latin typeface="DejaVu Sans"/>
+                <a:ea typeface="DejaVu Sans"/>
+                <a:cs typeface="DejaVu Sans"/>
+              </a:defRPr>
+            </a:pPr>
+            <a:r>
+              <a:rPr sz="2250" b="1" dirty="0">
+                <a:solidFill>
+                  <a:srgbClr val="237E80"/>
+                </a:solidFill>
+                <a:latin typeface="DejaVu Sans"/>
+                <a:ea typeface="DejaVu Sans"/>
+                <a:cs typeface="DejaVu Sans"/>
+              </a:rPr>
+              <a:t>02</a:t>
+            </a:r>
+          </a:p>
+        </p:txBody>
+      </p:sp>
+      <p:sp>
+        <p:nvSpPr>
+          <p:cNvPr id="6" name="Прямоугольник 5">
+            <a:extLst>
+              <a:ext uri="{FF2B5EF4-FFF2-40B4-BE49-F238E27FC236}">
+                <a16:creationId xmlns:a16="http://schemas.microsoft.com/office/drawing/2014/main" id="{38FAFDFA-D47D-7ED3-9CC4-0C94D96E480D}"/>
+              </a:ext>
+            </a:extLst>
+          </p:cNvPr>
+          <p:cNvSpPr>
+            <a:spLocks noGrp="1"/>
+          </p:cNvSpPr>
+          <p:nvPr/>
+        </p:nvSpPr>
+        <p:spPr>
+          <a:xfrm>
+            <a:off x="1390650" y="2441899"/>
+            <a:ext cx="10077450" cy="1047750"/>
+          </a:xfrm>
+          <a:prstGeom prst="rect">
+            <a:avLst/>
+          </a:prstGeom>
+          <a:noFill/>
+          <a:ln w="0">
+            <a:noFill/>
+          </a:ln>
+        </p:spPr>
+        <p:txBody>
+          <a:bodyPr lIns="0" tIns="0" rIns="0" bIns="0" anchor="t">
+            <a:noAutofit/>
+          </a:bodyPr>
+          <a:lstStyle/>
+          <a:p>
+            <a:pPr>
+              <a:lnSpc>
+                <a:spcPct val="100000"/>
+              </a:lnSpc>
+              <a:defRPr sz="1875" b="0">
+                <a:solidFill>
+                  <a:srgbClr val="20333D"/>
+                </a:solidFill>
+                <a:latin typeface="DejaVu Sans"/>
+                <a:ea typeface="DejaVu Sans"/>
+                <a:cs typeface="DejaVu Sans"/>
+              </a:defRPr>
+            </a:pPr>
+            <a:r>
+              <a:rPr lang="ru-RU" sz="1600" b="1" dirty="0">
+                <a:solidFill>
+                  <a:srgbClr val="20333D"/>
+                </a:solidFill>
+                <a:latin typeface="DejaVu Sans"/>
+              </a:rPr>
+              <a:t>Как работает функция cv2.warpAffine()? </a:t>
+            </a:r>
+            <a:r>
+              <a:rPr lang="ru-RU" sz="1600" dirty="0">
+                <a:solidFill>
+                  <a:srgbClr val="20333D"/>
+                </a:solidFill>
+                <a:latin typeface="DejaVu Sans"/>
+              </a:rPr>
+              <a:t>Применяет заданную матрицу 2×3 к изображению. Использует </a:t>
+            </a:r>
+            <a:r>
+              <a:rPr lang="ru-RU" sz="1600" b="1" dirty="0">
+                <a:solidFill>
+                  <a:srgbClr val="20333D"/>
+                </a:solidFill>
+                <a:latin typeface="DejaVu Sans"/>
+              </a:rPr>
+              <a:t>обратное отображение</a:t>
+            </a:r>
+            <a:r>
+              <a:rPr lang="ru-RU" sz="1600" dirty="0">
+                <a:solidFill>
+                  <a:srgbClr val="20333D"/>
+                </a:solidFill>
+                <a:latin typeface="DejaVu Sans"/>
+              </a:rPr>
+              <a:t>: для каждого пикселя результата вычисляет, откуда брать значение в исходнике. Для дробных координат автоматически применяет </a:t>
+            </a:r>
+            <a:r>
+              <a:rPr lang="ru-RU" sz="1600" b="1" dirty="0">
+                <a:solidFill>
+                  <a:srgbClr val="20333D"/>
+                </a:solidFill>
+                <a:latin typeface="DejaVu Sans"/>
+              </a:rPr>
+              <a:t>интерполяцию</a:t>
+            </a:r>
+            <a:r>
+              <a:rPr lang="ru-RU" sz="1600" dirty="0">
+                <a:solidFill>
+                  <a:srgbClr val="20333D"/>
+                </a:solidFill>
+                <a:latin typeface="DejaVu Sans"/>
+              </a:rPr>
+              <a:t>.</a:t>
+            </a:r>
+          </a:p>
+        </p:txBody>
+      </p:sp>
+      <p:sp>
+        <p:nvSpPr>
+          <p:cNvPr id="7" name="Прямоугольник 6">
+            <a:extLst>
+              <a:ext uri="{FF2B5EF4-FFF2-40B4-BE49-F238E27FC236}">
+                <a16:creationId xmlns:a16="http://schemas.microsoft.com/office/drawing/2014/main" id="{B0D83AF0-A510-8721-375D-6605F3081F17}"/>
+              </a:ext>
+            </a:extLst>
+          </p:cNvPr>
+          <p:cNvSpPr>
+            <a:spLocks noGrp="1"/>
+          </p:cNvSpPr>
+          <p:nvPr/>
+        </p:nvSpPr>
+        <p:spPr>
+          <a:xfrm>
+            <a:off x="533400" y="3489649"/>
+            <a:ext cx="666750" cy="476250"/>
+          </a:xfrm>
+          <a:prstGeom prst="rect">
+            <a:avLst/>
+          </a:prstGeom>
+          <a:noFill/>
+          <a:ln w="0">
+            <a:noFill/>
+          </a:ln>
+        </p:spPr>
+        <p:txBody>
+          <a:bodyPr lIns="0" tIns="0" rIns="0" bIns="0" anchor="t">
+            <a:noAutofit/>
+          </a:bodyPr>
+          <a:lstStyle/>
+          <a:p>
+            <a:pPr algn="l">
+              <a:lnSpc>
+                <a:spcPct val="113000"/>
+              </a:lnSpc>
+              <a:buNone/>
+              <a:defRPr sz="2250" b="1">
+                <a:solidFill>
+                  <a:srgbClr val="237E80"/>
+                </a:solidFill>
+                <a:latin typeface="DejaVu Sans"/>
+                <a:ea typeface="DejaVu Sans"/>
+                <a:cs typeface="DejaVu Sans"/>
+              </a:defRPr>
+            </a:pPr>
+            <a:r>
+              <a:rPr sz="2250" b="1" dirty="0">
+                <a:solidFill>
+                  <a:srgbClr val="237E80"/>
+                </a:solidFill>
+                <a:latin typeface="DejaVu Sans"/>
+                <a:ea typeface="DejaVu Sans"/>
+                <a:cs typeface="DejaVu Sans"/>
+              </a:rPr>
+              <a:t>03</a:t>
+            </a:r>
+          </a:p>
+        </p:txBody>
+      </p:sp>
+      <p:sp>
+        <p:nvSpPr>
+          <p:cNvPr id="8" name="Прямоугольник 7">
+            <a:extLst>
+              <a:ext uri="{FF2B5EF4-FFF2-40B4-BE49-F238E27FC236}">
+                <a16:creationId xmlns:a16="http://schemas.microsoft.com/office/drawing/2014/main" id="{4562C132-B77B-3F2E-60F6-E36D705BBF98}"/>
+              </a:ext>
+            </a:extLst>
+          </p:cNvPr>
+          <p:cNvSpPr>
+            <a:spLocks noGrp="1"/>
+          </p:cNvSpPr>
+          <p:nvPr/>
+        </p:nvSpPr>
+        <p:spPr>
+          <a:xfrm>
+            <a:off x="1390650" y="3489649"/>
+            <a:ext cx="10077450" cy="1047750"/>
+          </a:xfrm>
+          <a:prstGeom prst="rect">
+            <a:avLst/>
+          </a:prstGeom>
+          <a:noFill/>
+          <a:ln w="0">
+            <a:noFill/>
+          </a:ln>
+        </p:spPr>
+        <p:txBody>
+          <a:bodyPr lIns="0" tIns="0" rIns="0" bIns="0" anchor="t">
+            <a:noAutofit/>
+          </a:bodyPr>
+          <a:lstStyle/>
+          <a:p>
+            <a:pPr>
+              <a:lnSpc>
+                <a:spcPct val="100000"/>
+              </a:lnSpc>
+              <a:defRPr sz="1875" b="0">
+                <a:solidFill>
+                  <a:srgbClr val="20333D"/>
+                </a:solidFill>
+                <a:latin typeface="DejaVu Sans"/>
+                <a:ea typeface="DejaVu Sans"/>
+                <a:cs typeface="DejaVu Sans"/>
+              </a:defRPr>
+            </a:pPr>
+            <a:r>
+              <a:rPr lang="ru-RU" sz="1600" b="1" dirty="0">
+                <a:solidFill>
+                  <a:srgbClr val="20333D"/>
+                </a:solidFill>
+                <a:latin typeface="DejaVu Sans"/>
+              </a:rPr>
+              <a:t>Какие параметры нужны для функции cv2.getRotationMatrix2D()?</a:t>
+            </a:r>
+            <a:endParaRPr lang="ru-RU" sz="1600" dirty="0">
+              <a:solidFill>
+                <a:srgbClr val="20333D"/>
+              </a:solidFill>
+              <a:latin typeface="DejaVu Sans"/>
+            </a:endParaRPr>
+          </a:p>
+          <a:p>
+            <a:pPr>
+              <a:defRPr sz="1875" b="0">
+                <a:solidFill>
+                  <a:srgbClr val="20333D"/>
+                </a:solidFill>
+                <a:latin typeface="DejaVu Sans"/>
+                <a:ea typeface="DejaVu Sans"/>
+                <a:cs typeface="DejaVu Sans"/>
+              </a:defRPr>
+            </a:pPr>
+            <a:r>
+              <a:rPr lang="ru-RU" sz="1600" dirty="0" err="1">
+                <a:solidFill>
+                  <a:srgbClr val="20333D"/>
+                </a:solidFill>
+                <a:latin typeface="DejaVu Sans"/>
+              </a:rPr>
+              <a:t>center</a:t>
+            </a:r>
+            <a:r>
+              <a:rPr lang="ru-RU" sz="1600" dirty="0">
+                <a:solidFill>
+                  <a:srgbClr val="20333D"/>
+                </a:solidFill>
+                <a:latin typeface="DejaVu Sans"/>
+              </a:rPr>
+              <a:t> (x, y) – координаты центра вращения; </a:t>
+            </a:r>
+            <a:r>
+              <a:rPr lang="ru-RU" sz="1600" dirty="0" err="1">
+                <a:solidFill>
+                  <a:srgbClr val="20333D"/>
+                </a:solidFill>
+                <a:latin typeface="DejaVu Sans"/>
+              </a:rPr>
+              <a:t>angle</a:t>
+            </a:r>
+            <a:r>
+              <a:rPr lang="ru-RU" sz="1600" dirty="0">
+                <a:solidFill>
+                  <a:srgbClr val="20333D"/>
+                </a:solidFill>
+                <a:latin typeface="DejaVu Sans"/>
+              </a:rPr>
+              <a:t> – угол в градусах (+ = против часовой стрелки); </a:t>
+            </a:r>
+            <a:r>
+              <a:rPr lang="ru-RU" sz="1600" dirty="0" err="1">
+                <a:solidFill>
+                  <a:srgbClr val="20333D"/>
+                </a:solidFill>
+                <a:latin typeface="DejaVu Sans"/>
+              </a:rPr>
+              <a:t>scale</a:t>
+            </a:r>
+            <a:r>
+              <a:rPr lang="ru-RU" sz="1600" dirty="0">
+                <a:solidFill>
+                  <a:srgbClr val="20333D"/>
+                </a:solidFill>
+                <a:latin typeface="DejaVu Sans"/>
+              </a:rPr>
+              <a:t> – коэффициент масштабирования (1.0 = без изменений). Возвращает матрицу 2×3 для передачи в </a:t>
+            </a:r>
+            <a:r>
+              <a:rPr lang="ru-RU" sz="1600" dirty="0" err="1">
+                <a:solidFill>
+                  <a:srgbClr val="20333D"/>
+                </a:solidFill>
+                <a:latin typeface="DejaVu Sans"/>
+              </a:rPr>
+              <a:t>warpAffine</a:t>
+            </a:r>
+            <a:r>
+              <a:rPr lang="ru-RU" sz="1600" dirty="0">
+                <a:solidFill>
+                  <a:srgbClr val="20333D"/>
+                </a:solidFill>
+                <a:latin typeface="DejaVu Sans"/>
+              </a:rPr>
+              <a:t>().</a:t>
+            </a:r>
+            <a:endParaRPr sz="1600" b="0" dirty="0">
+              <a:solidFill>
+                <a:srgbClr val="20333D"/>
+              </a:solidFill>
+              <a:latin typeface="DejaVu Sans"/>
+              <a:ea typeface="DejaVu Sans"/>
+              <a:cs typeface="DejaVu Sans"/>
+            </a:endParaRPr>
+          </a:p>
+        </p:txBody>
+      </p:sp>
+      <p:sp>
+        <p:nvSpPr>
+          <p:cNvPr id="9" name="Прямоугольник 8">
+            <a:extLst>
+              <a:ext uri="{FF2B5EF4-FFF2-40B4-BE49-F238E27FC236}">
+                <a16:creationId xmlns:a16="http://schemas.microsoft.com/office/drawing/2014/main" id="{BBF3BAF8-CC20-47B6-1B0C-36CFF4E7B3D7}"/>
+              </a:ext>
+            </a:extLst>
+          </p:cNvPr>
+          <p:cNvSpPr>
+            <a:spLocks noGrp="1"/>
+          </p:cNvSpPr>
+          <p:nvPr/>
+        </p:nvSpPr>
+        <p:spPr>
+          <a:xfrm>
+            <a:off x="533400" y="4605823"/>
+            <a:ext cx="666750" cy="476250"/>
+          </a:xfrm>
+          <a:prstGeom prst="rect">
+            <a:avLst/>
+          </a:prstGeom>
+          <a:noFill/>
+          <a:ln w="0">
+            <a:noFill/>
+          </a:ln>
+        </p:spPr>
+        <p:txBody>
+          <a:bodyPr lIns="0" tIns="0" rIns="0" bIns="0" anchor="t">
+            <a:noAutofit/>
+          </a:bodyPr>
+          <a:lstStyle/>
+          <a:p>
+            <a:pPr algn="l">
+              <a:lnSpc>
+                <a:spcPct val="113000"/>
+              </a:lnSpc>
+              <a:buNone/>
+              <a:defRPr sz="2250" b="1">
+                <a:solidFill>
+                  <a:srgbClr val="237E80"/>
+                </a:solidFill>
+                <a:latin typeface="DejaVu Sans"/>
+                <a:ea typeface="DejaVu Sans"/>
+                <a:cs typeface="DejaVu Sans"/>
+              </a:defRPr>
+            </a:pPr>
+            <a:r>
+              <a:rPr sz="2250" b="1" dirty="0">
+                <a:solidFill>
+                  <a:srgbClr val="237E80"/>
+                </a:solidFill>
+                <a:latin typeface="DejaVu Sans"/>
+                <a:ea typeface="DejaVu Sans"/>
+                <a:cs typeface="DejaVu Sans"/>
+              </a:rPr>
+              <a:t>04</a:t>
+            </a:r>
+          </a:p>
+        </p:txBody>
+      </p:sp>
+      <p:sp>
+        <p:nvSpPr>
+          <p:cNvPr id="10" name="Прямоугольник 9">
+            <a:extLst>
+              <a:ext uri="{FF2B5EF4-FFF2-40B4-BE49-F238E27FC236}">
+                <a16:creationId xmlns:a16="http://schemas.microsoft.com/office/drawing/2014/main" id="{5EC41237-685B-D276-0F5C-F318F8A19E3E}"/>
+              </a:ext>
+            </a:extLst>
+          </p:cNvPr>
+          <p:cNvSpPr>
+            <a:spLocks noGrp="1"/>
+          </p:cNvSpPr>
+          <p:nvPr/>
+        </p:nvSpPr>
+        <p:spPr>
+          <a:xfrm>
+            <a:off x="1390650" y="4605823"/>
+            <a:ext cx="10077450" cy="1047750"/>
+          </a:xfrm>
+          <a:prstGeom prst="rect">
+            <a:avLst/>
+          </a:prstGeom>
+          <a:noFill/>
+          <a:ln w="0">
+            <a:noFill/>
+          </a:ln>
+        </p:spPr>
+        <p:txBody>
+          <a:bodyPr lIns="0" tIns="0" rIns="0" bIns="0" anchor="t">
+            <a:noAutofit/>
+          </a:bodyPr>
+          <a:lstStyle/>
+          <a:p>
+            <a:pPr>
+              <a:lnSpc>
+                <a:spcPct val="100000"/>
+              </a:lnSpc>
+              <a:defRPr sz="1875" b="0">
+                <a:solidFill>
+                  <a:srgbClr val="20333D"/>
+                </a:solidFill>
+                <a:latin typeface="DejaVu Sans"/>
+                <a:ea typeface="DejaVu Sans"/>
+                <a:cs typeface="DejaVu Sans"/>
+              </a:defRPr>
+            </a:pPr>
+            <a:r>
+              <a:rPr lang="ru-RU" sz="1600" b="1" dirty="0">
+                <a:solidFill>
+                  <a:srgbClr val="20333D"/>
+                </a:solidFill>
+                <a:latin typeface="DejaVu Sans"/>
+              </a:rPr>
+              <a:t>Чем отличается отражение изображения по горизонтали от вертикали? </a:t>
+            </a:r>
+            <a:r>
+              <a:rPr lang="ru-RU" sz="1600" dirty="0">
+                <a:solidFill>
+                  <a:srgbClr val="20333D"/>
+                </a:solidFill>
+                <a:latin typeface="DejaVu Sans"/>
+              </a:rPr>
+              <a:t>Горизонтальное отражение (</a:t>
+            </a:r>
+            <a:r>
+              <a:rPr lang="ru-RU" sz="1600" dirty="0" err="1">
+                <a:solidFill>
+                  <a:srgbClr val="20333D"/>
+                </a:solidFill>
+                <a:latin typeface="DejaVu Sans"/>
+              </a:rPr>
+              <a:t>flipCode</a:t>
+            </a:r>
+            <a:r>
+              <a:rPr lang="ru-RU" sz="1600" dirty="0">
+                <a:solidFill>
+                  <a:srgbClr val="20333D"/>
+                </a:solidFill>
+                <a:latin typeface="DejaVu Sans"/>
+              </a:rPr>
+              <a:t> = 1 или &gt;0) – зеркальное отображение относительно вертикальной оси (Y). Вертикальное отражение (</a:t>
+            </a:r>
+            <a:r>
+              <a:rPr lang="ru-RU" sz="1600" dirty="0" err="1">
+                <a:solidFill>
+                  <a:srgbClr val="20333D"/>
+                </a:solidFill>
+                <a:latin typeface="DejaVu Sans"/>
+              </a:rPr>
+              <a:t>flipCode</a:t>
+            </a:r>
+            <a:r>
+              <a:rPr lang="ru-RU" sz="1600" dirty="0">
+                <a:solidFill>
+                  <a:srgbClr val="20333D"/>
+                </a:solidFill>
+                <a:latin typeface="DejaVu Sans"/>
+              </a:rPr>
+              <a:t> = 0) – зеркальное отображение относительно горизонтальной оси (X).</a:t>
             </a:r>
           </a:p>
           <a:p>
@@ -12648,10 +14151,10 @@
       </p:sp>
       <p:sp>
         <p:nvSpPr>
-          <p:cNvPr id="7" name="Прямоугольник 6">
-            <a:extLst>
-              <a:ext uri="{FF2B5EF4-FFF2-40B4-BE49-F238E27FC236}">
-                <a16:creationId xmlns:a16="http://schemas.microsoft.com/office/drawing/2014/main" id="{3497C8DA-E112-5912-2116-856F7A5B1E56}"/>
+          <p:cNvPr id="13" name="Прямоугольник 12">
+            <a:extLst>
+              <a:ext uri="{FF2B5EF4-FFF2-40B4-BE49-F238E27FC236}">
+                <a16:creationId xmlns:a16="http://schemas.microsoft.com/office/drawing/2014/main" id="{0CBA5B43-2F43-5A95-9C4A-DBA904090EAE}"/>
               </a:ext>
             </a:extLst>
           </p:cNvPr>
@@ -12662,7 +14165,7 @@
         </p:nvSpPr>
         <p:spPr>
           <a:xfrm>
-            <a:off x="533400" y="3838575"/>
+            <a:off x="533400" y="5683897"/>
             <a:ext cx="666750" cy="476250"/>
           </a:xfrm>
           <a:prstGeom prst="rect">
@@ -12713,7 +14216,7 @@
                 <a:ea typeface="DejaVu Sans"/>
                 <a:cs typeface="DejaVu Sans"/>
               </a:rPr>
-              <a:t>2</a:t>
+              <a:t>5</a:t>
             </a:r>
             <a:endParaRPr sz="2250" b="1" dirty="0">
               <a:solidFill>
@@ -12728,10 +14231,10 @@
       </p:sp>
       <p:sp>
         <p:nvSpPr>
-          <p:cNvPr id="8" name="Прямоугольник 7">
-            <a:extLst>
-              <a:ext uri="{FF2B5EF4-FFF2-40B4-BE49-F238E27FC236}">
-                <a16:creationId xmlns:a16="http://schemas.microsoft.com/office/drawing/2014/main" id="{CEB565DF-EDD7-B256-2052-EB5A9335DA14}"/>
+          <p:cNvPr id="15" name="Прямоугольник 14">
+            <a:extLst>
+              <a:ext uri="{FF2B5EF4-FFF2-40B4-BE49-F238E27FC236}">
+                <a16:creationId xmlns:a16="http://schemas.microsoft.com/office/drawing/2014/main" id="{2D0B33BD-4323-DC6F-FC2A-292955A68F81}"/>
               </a:ext>
             </a:extLst>
           </p:cNvPr>
@@ -12742,7 +14245,7 @@
         </p:nvSpPr>
         <p:spPr>
           <a:xfrm>
-            <a:off x="1390650" y="3838575"/>
+            <a:off x="1390650" y="5683897"/>
             <a:ext cx="10077450" cy="1047750"/>
           </a:xfrm>
           <a:prstGeom prst="rect">
@@ -12760,6 +14263,342 @@
           <a:lstStyle/>
           <a:p>
             <a:pPr>
+              <a:defRPr sz="1875" b="0">
+                <a:solidFill>
+                  <a:srgbClr val="20333D"/>
+                </a:solidFill>
+                <a:latin typeface="DejaVu Sans"/>
+                <a:ea typeface="DejaVu Sans"/>
+                <a:cs typeface="DejaVu Sans"/>
+              </a:defRPr>
+            </a:pPr>
+            <a:r>
+              <a:rPr lang="ru-RU" sz="1600" b="1" dirty="0">
+                <a:solidFill>
+                  <a:srgbClr val="20333D"/>
+                </a:solidFill>
+                <a:latin typeface="DejaVu Sans"/>
+              </a:rPr>
+              <a:t>Как выбрать точки для перспективного преобразования? </a:t>
+            </a:r>
+            <a:r>
+              <a:rPr lang="ru-RU" sz="1600" dirty="0">
+                <a:solidFill>
+                  <a:srgbClr val="20333D"/>
+                </a:solidFill>
+                <a:latin typeface="DejaVu Sans"/>
+              </a:rPr>
+              <a:t>Нужно 4 пары точек (исходные → целевые). Обычно берут углы объекта, порядок обхода должен строго совпадать. Точки не должны лежать на одной прямой (</a:t>
+            </a:r>
+            <a:r>
+              <a:rPr lang="ru-RU" sz="1600" dirty="0" err="1">
+                <a:solidFill>
+                  <a:srgbClr val="20333D"/>
+                </a:solidFill>
+                <a:latin typeface="DejaVu Sans"/>
+              </a:rPr>
+              <a:t>неколлинеарны</a:t>
+            </a:r>
+            <a:r>
+              <a:rPr lang="ru-RU" sz="1600" dirty="0">
+                <a:solidFill>
+                  <a:srgbClr val="20333D"/>
+                </a:solidFill>
+                <a:latin typeface="DejaVu Sans"/>
+              </a:rPr>
+              <a:t>).</a:t>
+            </a:r>
+          </a:p>
+        </p:txBody>
+      </p:sp>
+    </p:spTree>
+    <p:extLst>
+      <p:ext uri="{BB962C8B-B14F-4D97-AF65-F5344CB8AC3E}">
+        <p14:creationId xmlns:p14="http://schemas.microsoft.com/office/powerpoint/2010/main" val="1202180640"/>
+      </p:ext>
+    </p:extLst>
+  </p:cSld>
+  <p:clrMapOvr>
+    <a:masterClrMapping/>
+  </p:clrMapOvr>
+</p:sld>
+</file>
+
+<file path=ppt/slides/slide16.xml><?xml version="1.0" encoding="utf-8"?>
+<p:sld xmlns:a="http://schemas.openxmlformats.org/drawingml/2006/main" xmlns:r="http://schemas.openxmlformats.org/officeDocument/2006/relationships" xmlns:p="http://schemas.openxmlformats.org/presentationml/2006/main">
+  <p:cSld>
+    <p:bg>
+      <p:bgPr>
+        <a:solidFill>
+          <a:srgbClr val="F1F6F6"/>
+        </a:solidFill>
+        <a:effectLst/>
+      </p:bgPr>
+    </p:bg>
+    <p:spTree>
+      <p:nvGrpSpPr>
+        <p:cNvPr id="1" name="">
+          <a:extLst>
+            <a:ext uri="{FF2B5EF4-FFF2-40B4-BE49-F238E27FC236}">
+              <a16:creationId xmlns:a16="http://schemas.microsoft.com/office/drawing/2014/main" id="{BCD1E71B-6FC5-EF7A-9056-D196D4FB2EEC}"/>
+            </a:ext>
+          </a:extLst>
+        </p:cNvPr>
+        <p:cNvGrpSpPr/>
+        <p:nvPr/>
+      </p:nvGrpSpPr>
+      <p:grpSpPr>
+        <a:xfrm>
+          <a:off x="0" y="0"/>
+          <a:ext cx="0" cy="0"/>
+          <a:chOff x="0" y="0"/>
+          <a:chExt cx="0" cy="0"/>
+        </a:xfrm>
+      </p:grpSpPr>
+      <p:sp>
+        <p:nvSpPr>
+          <p:cNvPr id="11" name="Прямоугольник 10">
+            <a:extLst>
+              <a:ext uri="{FF2B5EF4-FFF2-40B4-BE49-F238E27FC236}">
+                <a16:creationId xmlns:a16="http://schemas.microsoft.com/office/drawing/2014/main" id="{DAFDC6A8-223E-5478-F647-9ED9F2FEABC3}"/>
+              </a:ext>
+            </a:extLst>
+          </p:cNvPr>
+          <p:cNvSpPr>
+            <a:spLocks noGrp="1"/>
+          </p:cNvSpPr>
+          <p:nvPr/>
+        </p:nvSpPr>
+        <p:spPr>
+          <a:xfrm>
+            <a:off x="533400" y="533400"/>
+            <a:ext cx="11125200" cy="723900"/>
+          </a:xfrm>
+          <a:prstGeom prst="rect">
+            <a:avLst/>
+          </a:prstGeom>
+          <a:noFill/>
+          <a:ln w="0">
+            <a:noFill/>
+          </a:ln>
+        </p:spPr>
+        <p:txBody>
+          <a:bodyPr lIns="0" tIns="0" rIns="0" bIns="0" anchor="t">
+            <a:noAutofit/>
+          </a:bodyPr>
+          <a:lstStyle/>
+          <a:p>
+            <a:pPr algn="l">
+              <a:lnSpc>
+                <a:spcPct val="113000"/>
+              </a:lnSpc>
+              <a:buNone/>
+              <a:defRPr sz="3150" b="1">
+                <a:solidFill>
+                  <a:srgbClr val="20333D"/>
+                </a:solidFill>
+                <a:latin typeface="DejaVu Sans"/>
+                <a:ea typeface="DejaVu Sans"/>
+                <a:cs typeface="DejaVu Sans"/>
+              </a:defRPr>
+            </a:pPr>
+            <a:r>
+              <a:rPr lang="ru-RU" sz="3150" b="1" dirty="0">
+                <a:solidFill>
+                  <a:srgbClr val="20333D"/>
+                </a:solidFill>
+                <a:latin typeface="DejaVu Sans"/>
+                <a:ea typeface="DejaVu Sans"/>
+                <a:cs typeface="DejaVu Sans"/>
+              </a:rPr>
+              <a:t>Ответы на контрольные вопросы варианта 4</a:t>
+            </a:r>
+            <a:endParaRPr sz="3150" b="1" dirty="0">
+              <a:solidFill>
+                <a:srgbClr val="20333D"/>
+              </a:solidFill>
+              <a:latin typeface="DejaVu Sans"/>
+              <a:ea typeface="DejaVu Sans"/>
+              <a:cs typeface="DejaVu Sans"/>
+            </a:endParaRPr>
+          </a:p>
+        </p:txBody>
+      </p:sp>
+      <p:sp>
+        <p:nvSpPr>
+          <p:cNvPr id="2" name="Прямоугольник 1">
+            <a:extLst>
+              <a:ext uri="{FF2B5EF4-FFF2-40B4-BE49-F238E27FC236}">
+                <a16:creationId xmlns:a16="http://schemas.microsoft.com/office/drawing/2014/main" id="{DB03CABA-5D37-76D6-19F3-C592E9182D0D}"/>
+              </a:ext>
+            </a:extLst>
+          </p:cNvPr>
+          <p:cNvSpPr>
+            <a:spLocks noGrp="1"/>
+          </p:cNvSpPr>
+          <p:nvPr/>
+        </p:nvSpPr>
+        <p:spPr>
+          <a:xfrm>
+            <a:off x="11068050" y="6448425"/>
+            <a:ext cx="609600" cy="228600"/>
+          </a:xfrm>
+          <a:prstGeom prst="rect">
+            <a:avLst/>
+          </a:prstGeom>
+          <a:noFill/>
+          <a:ln w="0">
+            <a:noFill/>
+          </a:ln>
+        </p:spPr>
+        <p:txBody>
+          <a:bodyPr lIns="0" tIns="0" rIns="0" bIns="0" anchor="t">
+            <a:noAutofit/>
+          </a:bodyPr>
+          <a:lstStyle/>
+          <a:p>
+            <a:pPr algn="l">
+              <a:lnSpc>
+                <a:spcPct val="113000"/>
+              </a:lnSpc>
+              <a:buNone/>
+              <a:defRPr sz="1050" b="0">
+                <a:solidFill>
+                  <a:srgbClr val="566872"/>
+                </a:solidFill>
+                <a:latin typeface="DejaVu Sans"/>
+                <a:ea typeface="DejaVu Sans"/>
+                <a:cs typeface="DejaVu Sans"/>
+              </a:defRPr>
+            </a:pPr>
+            <a:r>
+              <a:rPr sz="1050" b="0" dirty="0">
+                <a:solidFill>
+                  <a:srgbClr val="566872"/>
+                </a:solidFill>
+                <a:latin typeface="DejaVu Sans"/>
+                <a:ea typeface="DejaVu Sans"/>
+                <a:cs typeface="DejaVu Sans"/>
+              </a:rPr>
+              <a:t>1</a:t>
+            </a:r>
+            <a:r>
+              <a:rPr lang="ru-RU" sz="1050" b="0" dirty="0">
+                <a:solidFill>
+                  <a:srgbClr val="566872"/>
+                </a:solidFill>
+                <a:latin typeface="DejaVu Sans"/>
+                <a:ea typeface="DejaVu Sans"/>
+                <a:cs typeface="DejaVu Sans"/>
+              </a:rPr>
+              <a:t>6</a:t>
+            </a:r>
+            <a:endParaRPr sz="1050" b="0" dirty="0">
+              <a:solidFill>
+                <a:srgbClr val="566872"/>
+              </a:solidFill>
+              <a:latin typeface="DejaVu Sans"/>
+              <a:ea typeface="DejaVu Sans"/>
+              <a:cs typeface="DejaVu Sans"/>
+            </a:endParaRPr>
+          </a:p>
+        </p:txBody>
+      </p:sp>
+      <p:sp>
+        <p:nvSpPr>
+          <p:cNvPr id="3" name="Прямоугольник 2">
+            <a:extLst>
+              <a:ext uri="{FF2B5EF4-FFF2-40B4-BE49-F238E27FC236}">
+                <a16:creationId xmlns:a16="http://schemas.microsoft.com/office/drawing/2014/main" id="{457CD8E0-8DE4-9ADE-5086-4785D06A7A03}"/>
+              </a:ext>
+            </a:extLst>
+          </p:cNvPr>
+          <p:cNvSpPr>
+            <a:spLocks noGrp="1"/>
+          </p:cNvSpPr>
+          <p:nvPr/>
+        </p:nvSpPr>
+        <p:spPr>
+          <a:xfrm>
+            <a:off x="533400" y="1495425"/>
+            <a:ext cx="666750" cy="476250"/>
+          </a:xfrm>
+          <a:prstGeom prst="rect">
+            <a:avLst/>
+          </a:prstGeom>
+          <a:noFill/>
+          <a:ln w="0">
+            <a:noFill/>
+          </a:ln>
+        </p:spPr>
+        <p:txBody>
+          <a:bodyPr lIns="0" tIns="0" rIns="0" bIns="0" anchor="t">
+            <a:noAutofit/>
+          </a:bodyPr>
+          <a:lstStyle/>
+          <a:p>
+            <a:pPr algn="l">
+              <a:lnSpc>
+                <a:spcPct val="113000"/>
+              </a:lnSpc>
+              <a:buNone/>
+              <a:defRPr sz="2250" b="1">
+                <a:solidFill>
+                  <a:srgbClr val="237E80"/>
+                </a:solidFill>
+                <a:latin typeface="DejaVu Sans"/>
+                <a:ea typeface="DejaVu Sans"/>
+                <a:cs typeface="DejaVu Sans"/>
+              </a:defRPr>
+            </a:pPr>
+            <a:r>
+              <a:rPr sz="2250" b="1">
+                <a:solidFill>
+                  <a:srgbClr val="237E80"/>
+                </a:solidFill>
+                <a:latin typeface="DejaVu Sans"/>
+                <a:ea typeface="DejaVu Sans"/>
+                <a:cs typeface="DejaVu Sans"/>
+              </a:rPr>
+              <a:t>01</a:t>
+            </a:r>
+          </a:p>
+        </p:txBody>
+      </p:sp>
+      <p:sp>
+        <p:nvSpPr>
+          <p:cNvPr id="4" name="Прямоугольник 3">
+            <a:extLst>
+              <a:ext uri="{FF2B5EF4-FFF2-40B4-BE49-F238E27FC236}">
+                <a16:creationId xmlns:a16="http://schemas.microsoft.com/office/drawing/2014/main" id="{D0898F04-0106-DD9F-4DB7-B961AB596517}"/>
+              </a:ext>
+            </a:extLst>
+          </p:cNvPr>
+          <p:cNvSpPr>
+            <a:spLocks noGrp="1"/>
+          </p:cNvSpPr>
+          <p:nvPr/>
+        </p:nvSpPr>
+        <p:spPr>
+          <a:xfrm>
+            <a:off x="1390650" y="1495425"/>
+            <a:ext cx="10077450" cy="1047750"/>
+          </a:xfrm>
+          <a:prstGeom prst="rect">
+            <a:avLst/>
+          </a:prstGeom>
+          <a:noFill/>
+          <a:ln w="0">
+            <a:noFill/>
+          </a:ln>
+        </p:spPr>
+        <p:txBody>
+          <a:bodyPr lIns="0" tIns="0" rIns="0" bIns="0" anchor="t">
+            <a:noAutofit/>
+          </a:bodyPr>
+          <a:lstStyle/>
+          <a:p>
+            <a:pPr>
               <a:lnSpc>
                 <a:spcPct val="100000"/>
               </a:lnSpc>
@@ -12779,7 +14618,7 @@
                 </a:solidFill>
                 <a:latin typeface="DejaVu Sans"/>
               </a:rPr>
-              <a:t>Сколько точек нужно для перспективного преобразования? </a:t>
+              <a:t>Какой эффект даёт уменьшение изображения с коэффициентом 0.25? </a:t>
             </a:r>
             <a:r>
               <a:rPr lang="ru-RU" sz="1875" dirty="0">
@@ -12788,25 +14627,7 @@
                 </a:solidFill>
                 <a:latin typeface="DejaVu Sans"/>
               </a:rPr>
-              <a:t>Для перспективного преобразования нужно 4 пары точек, так как матрица </a:t>
-            </a:r>
-            <a:r>
-              <a:rPr lang="ru-RU" sz="1875" dirty="0" err="1">
-                <a:solidFill>
-                  <a:srgbClr val="20333D"/>
-                </a:solidFill>
-                <a:latin typeface="DejaVu Sans"/>
-              </a:rPr>
-              <a:t>гомографии</a:t>
-            </a:r>
-            <a:r>
-              <a:rPr lang="ru-RU" sz="1875" dirty="0">
-                <a:solidFill>
-                  <a:srgbClr val="20333D"/>
-                </a:solidFill>
-                <a:latin typeface="DejaVu Sans"/>
-              </a:rPr>
-              <a:t> имеет 8 неизвестных параметров. Четыре точки дают ровно 8 уравнений, что позволяет однозначно решить систему. В коде это реализовано через cv2.getPerspectiveTransform, где мы задаём углы исходной трапеции и целевого прямоугольника.</a:t>
+              <a:t>Уменьшение изображения в 0.25 раза по каждой оси означает, что его линейные размеры сокращаются в 4 раза, а общее количество пикселей уменьшается в 16 раз. К основным эффектам относятся: потеря мелких деталей и высокочастотных компонентов, снижение вычислительной нагрузки и сохранение пропорций.</a:t>
             </a:r>
           </a:p>
           <a:p>
@@ -12835,10 +14656,199 @@
           </a:p>
         </p:txBody>
       </p:sp>
+      <p:sp>
+        <p:nvSpPr>
+          <p:cNvPr id="7" name="Прямоугольник 6">
+            <a:extLst>
+              <a:ext uri="{FF2B5EF4-FFF2-40B4-BE49-F238E27FC236}">
+                <a16:creationId xmlns:a16="http://schemas.microsoft.com/office/drawing/2014/main" id="{04174FE5-90E9-06EF-480C-9F37C05F7C2B}"/>
+              </a:ext>
+            </a:extLst>
+          </p:cNvPr>
+          <p:cNvSpPr>
+            <a:spLocks noGrp="1"/>
+          </p:cNvSpPr>
+          <p:nvPr/>
+        </p:nvSpPr>
+        <p:spPr>
+          <a:xfrm>
+            <a:off x="533400" y="3838575"/>
+            <a:ext cx="666750" cy="476250"/>
+          </a:xfrm>
+          <a:prstGeom prst="rect">
+            <a:avLst/>
+          </a:prstGeom>
+          <a:noFill/>
+          <a:ln w="0">
+            <a:noFill/>
+          </a:ln>
+        </p:spPr>
+        <p:txBody>
+          <a:bodyPr lIns="0" tIns="0" rIns="0" bIns="0" anchor="t">
+            <a:noAutofit/>
+          </a:bodyPr>
+          <a:lstStyle/>
+          <a:p>
+            <a:pPr algn="l">
+              <a:lnSpc>
+                <a:spcPct val="113000"/>
+              </a:lnSpc>
+              <a:buNone/>
+              <a:defRPr sz="2250" b="1">
+                <a:solidFill>
+                  <a:srgbClr val="237E80"/>
+                </a:solidFill>
+                <a:latin typeface="DejaVu Sans"/>
+                <a:ea typeface="DejaVu Sans"/>
+                <a:cs typeface="DejaVu Sans"/>
+              </a:defRPr>
+            </a:pPr>
+            <a:r>
+              <a:rPr sz="2250" b="1" dirty="0">
+                <a:solidFill>
+                  <a:srgbClr val="237E80"/>
+                </a:solidFill>
+                <a:latin typeface="DejaVu Sans"/>
+                <a:ea typeface="DejaVu Sans"/>
+                <a:cs typeface="DejaVu Sans"/>
+              </a:rPr>
+              <a:t>0</a:t>
+            </a:r>
+            <a:r>
+              <a:rPr lang="ru-RU" sz="2250" b="1" dirty="0">
+                <a:solidFill>
+                  <a:srgbClr val="237E80"/>
+                </a:solidFill>
+                <a:latin typeface="DejaVu Sans"/>
+                <a:ea typeface="DejaVu Sans"/>
+                <a:cs typeface="DejaVu Sans"/>
+              </a:rPr>
+              <a:t>2</a:t>
+            </a:r>
+            <a:endParaRPr sz="2250" b="1" dirty="0">
+              <a:solidFill>
+                <a:srgbClr val="237E80"/>
+              </a:solidFill>
+              <a:latin typeface="DejaVu Sans"/>
+              <a:ea typeface="DejaVu Sans"/>
+              <a:cs typeface="DejaVu Sans"/>
+            </a:endParaRPr>
+          </a:p>
+        </p:txBody>
+      </p:sp>
+      <p:sp>
+        <p:nvSpPr>
+          <p:cNvPr id="8" name="Прямоугольник 7">
+            <a:extLst>
+              <a:ext uri="{FF2B5EF4-FFF2-40B4-BE49-F238E27FC236}">
+                <a16:creationId xmlns:a16="http://schemas.microsoft.com/office/drawing/2014/main" id="{20AFA661-7CC9-0DF7-0401-53EF3AB08F74}"/>
+              </a:ext>
+            </a:extLst>
+          </p:cNvPr>
+          <p:cNvSpPr>
+            <a:spLocks noGrp="1"/>
+          </p:cNvSpPr>
+          <p:nvPr/>
+        </p:nvSpPr>
+        <p:spPr>
+          <a:xfrm>
+            <a:off x="1390650" y="3838575"/>
+            <a:ext cx="10077450" cy="1047750"/>
+          </a:xfrm>
+          <a:prstGeom prst="rect">
+            <a:avLst/>
+          </a:prstGeom>
+          <a:noFill/>
+          <a:ln w="0">
+            <a:noFill/>
+          </a:ln>
+        </p:spPr>
+        <p:txBody>
+          <a:bodyPr lIns="0" tIns="0" rIns="0" bIns="0" anchor="t">
+            <a:noAutofit/>
+          </a:bodyPr>
+          <a:lstStyle/>
+          <a:p>
+            <a:pPr>
+              <a:lnSpc>
+                <a:spcPct val="100000"/>
+              </a:lnSpc>
+              <a:defRPr sz="1875" b="0">
+                <a:solidFill>
+                  <a:srgbClr val="20333D"/>
+                </a:solidFill>
+                <a:latin typeface="DejaVu Sans"/>
+                <a:ea typeface="DejaVu Sans"/>
+                <a:cs typeface="DejaVu Sans"/>
+              </a:defRPr>
+            </a:pPr>
+            <a:r>
+              <a:rPr lang="ru-RU" sz="1875" b="1" dirty="0">
+                <a:solidFill>
+                  <a:srgbClr val="20333D"/>
+                </a:solidFill>
+                <a:latin typeface="DejaVu Sans"/>
+              </a:rPr>
+              <a:t>Сколько точек нужно для перспективного преобразования? </a:t>
+            </a:r>
+            <a:r>
+              <a:rPr lang="ru-RU" sz="1875" dirty="0">
+                <a:solidFill>
+                  <a:srgbClr val="20333D"/>
+                </a:solidFill>
+                <a:latin typeface="DejaVu Sans"/>
+              </a:rPr>
+              <a:t>Для перспективного преобразования нужно 4 пары точек, так как матрица </a:t>
+            </a:r>
+            <a:r>
+              <a:rPr lang="ru-RU" sz="1875" dirty="0" err="1">
+                <a:solidFill>
+                  <a:srgbClr val="20333D"/>
+                </a:solidFill>
+                <a:latin typeface="DejaVu Sans"/>
+              </a:rPr>
+              <a:t>гомографии</a:t>
+            </a:r>
+            <a:r>
+              <a:rPr lang="ru-RU" sz="1875" dirty="0">
+                <a:solidFill>
+                  <a:srgbClr val="20333D"/>
+                </a:solidFill>
+                <a:latin typeface="DejaVu Sans"/>
+              </a:rPr>
+              <a:t> имеет 8 неизвестных параметров. Четыре точки дают ровно 8 уравнений, что позволяет однозначно решить систему. В коде это реализовано через cv2.getPerspectiveTransform, где мы задаём углы исходной трапеции и целевого прямоугольника.</a:t>
+            </a:r>
+          </a:p>
+          <a:p>
+            <a:pPr algn="l">
+              <a:lnSpc>
+                <a:spcPct val="113000"/>
+              </a:lnSpc>
+              <a:buNone/>
+              <a:defRPr sz="1875" b="0">
+                <a:solidFill>
+                  <a:srgbClr val="20333D"/>
+                </a:solidFill>
+                <a:latin typeface="DejaVu Sans"/>
+                <a:ea typeface="DejaVu Sans"/>
+                <a:cs typeface="DejaVu Sans"/>
+              </a:defRPr>
+            </a:pPr>
+            <a:endParaRPr sz="1875" b="0" dirty="0">
+              <a:solidFill>
+                <a:srgbClr val="20333D"/>
+              </a:solidFill>
+              <a:latin typeface="DejaVu Sans"/>
+              <a:ea typeface="DejaVu Sans"/>
+              <a:cs typeface="DejaVu Sans"/>
+            </a:endParaRPr>
+          </a:p>
+        </p:txBody>
+      </p:sp>
     </p:spTree>
     <p:extLst>
       <p:ext uri="{BB962C8B-B14F-4D97-AF65-F5344CB8AC3E}">
-        <p14:creationId xmlns:p14="http://schemas.microsoft.com/office/powerpoint/2010/main" val="221133849"/>
+        <p14:creationId xmlns:p14="http://schemas.microsoft.com/office/powerpoint/2010/main" val="1643436938"/>
       </p:ext>
     </p:extLst>
   </p:cSld>
@@ -17255,7 +19265,7 @@
               </a:defRPr>
             </a:pPr>
             <a:r>
-              <a:rPr sz="1650" b="0">
+              <a:rPr sz="1650" b="0" dirty="0" err="1">
                 <a:solidFill>
                   <a:srgbClr val="566872"/>
                 </a:solidFill>
@@ -17263,7 +19273,282 @@
                 <a:ea typeface="DejaVu Sans"/>
                 <a:cs typeface="DejaVu Sans"/>
               </a:rPr>
-              <a:t>Параметр −1 отражает изображение по горизонтали и вертикали. Это соответствует повороту на 180° вокруг центра сетки пикселей.</a:t>
+              <a:t>Параметр</a:t>
+            </a:r>
+            <a:r>
+              <a:rPr sz="1650" b="0" dirty="0">
+                <a:solidFill>
+                  <a:srgbClr val="566872"/>
+                </a:solidFill>
+                <a:latin typeface="DejaVu Sans"/>
+                <a:ea typeface="DejaVu Sans"/>
+                <a:cs typeface="DejaVu Sans"/>
+              </a:rPr>
+              <a:t> −1 </a:t>
+            </a:r>
+            <a:r>
+              <a:rPr sz="1650" b="0" dirty="0" err="1">
+                <a:solidFill>
+                  <a:srgbClr val="566872"/>
+                </a:solidFill>
+                <a:latin typeface="DejaVu Sans"/>
+                <a:ea typeface="DejaVu Sans"/>
+                <a:cs typeface="DejaVu Sans"/>
+              </a:rPr>
+              <a:t>отражает</a:t>
+            </a:r>
+            <a:r>
+              <a:rPr sz="1650" b="0" dirty="0">
+                <a:solidFill>
+                  <a:srgbClr val="566872"/>
+                </a:solidFill>
+                <a:latin typeface="DejaVu Sans"/>
+                <a:ea typeface="DejaVu Sans"/>
+                <a:cs typeface="DejaVu Sans"/>
+              </a:rPr>
+              <a:t> </a:t>
+            </a:r>
+            <a:r>
+              <a:rPr sz="1650" b="0" dirty="0" err="1">
+                <a:solidFill>
+                  <a:srgbClr val="566872"/>
+                </a:solidFill>
+                <a:latin typeface="DejaVu Sans"/>
+                <a:ea typeface="DejaVu Sans"/>
+                <a:cs typeface="DejaVu Sans"/>
+              </a:rPr>
+              <a:t>изображение</a:t>
+            </a:r>
+            <a:r>
+              <a:rPr sz="1650" b="0" dirty="0">
+                <a:solidFill>
+                  <a:srgbClr val="566872"/>
+                </a:solidFill>
+                <a:latin typeface="DejaVu Sans"/>
+                <a:ea typeface="DejaVu Sans"/>
+                <a:cs typeface="DejaVu Sans"/>
+              </a:rPr>
+              <a:t> </a:t>
+            </a:r>
+            <a:r>
+              <a:rPr sz="1650" b="0" dirty="0" err="1">
+                <a:solidFill>
+                  <a:srgbClr val="566872"/>
+                </a:solidFill>
+                <a:latin typeface="DejaVu Sans"/>
+                <a:ea typeface="DejaVu Sans"/>
+                <a:cs typeface="DejaVu Sans"/>
+              </a:rPr>
+              <a:t>по</a:t>
+            </a:r>
+            <a:r>
+              <a:rPr sz="1650" b="0" dirty="0">
+                <a:solidFill>
+                  <a:srgbClr val="566872"/>
+                </a:solidFill>
+                <a:latin typeface="DejaVu Sans"/>
+                <a:ea typeface="DejaVu Sans"/>
+                <a:cs typeface="DejaVu Sans"/>
+              </a:rPr>
+              <a:t> </a:t>
+            </a:r>
+            <a:r>
+              <a:rPr sz="1650" b="0" dirty="0" err="1">
+                <a:solidFill>
+                  <a:srgbClr val="566872"/>
+                </a:solidFill>
+                <a:latin typeface="DejaVu Sans"/>
+                <a:ea typeface="DejaVu Sans"/>
+                <a:cs typeface="DejaVu Sans"/>
+              </a:rPr>
+              <a:t>горизонтали</a:t>
+            </a:r>
+            <a:r>
+              <a:rPr sz="1650" b="0" dirty="0">
+                <a:solidFill>
+                  <a:srgbClr val="566872"/>
+                </a:solidFill>
+                <a:latin typeface="DejaVu Sans"/>
+                <a:ea typeface="DejaVu Sans"/>
+                <a:cs typeface="DejaVu Sans"/>
+              </a:rPr>
+              <a:t> и </a:t>
+            </a:r>
+            <a:r>
+              <a:rPr sz="1650" b="0" dirty="0" err="1">
+                <a:solidFill>
+                  <a:srgbClr val="566872"/>
+                </a:solidFill>
+                <a:latin typeface="DejaVu Sans"/>
+                <a:ea typeface="DejaVu Sans"/>
+                <a:cs typeface="DejaVu Sans"/>
+              </a:rPr>
+              <a:t>вертикали</a:t>
+            </a:r>
+            <a:r>
+              <a:rPr sz="1650" b="0" dirty="0">
+                <a:solidFill>
+                  <a:srgbClr val="566872"/>
+                </a:solidFill>
+                <a:latin typeface="DejaVu Sans"/>
+                <a:ea typeface="DejaVu Sans"/>
+                <a:cs typeface="DejaVu Sans"/>
+              </a:rPr>
+              <a:t>. Это </a:t>
+            </a:r>
+            <a:r>
+              <a:rPr sz="1650" b="0" dirty="0" err="1">
+                <a:solidFill>
+                  <a:srgbClr val="566872"/>
+                </a:solidFill>
+                <a:latin typeface="DejaVu Sans"/>
+                <a:ea typeface="DejaVu Sans"/>
+                <a:cs typeface="DejaVu Sans"/>
+              </a:rPr>
+              <a:t>соответствует</a:t>
+            </a:r>
+            <a:r>
+              <a:rPr sz="1650" b="0" dirty="0">
+                <a:solidFill>
+                  <a:srgbClr val="566872"/>
+                </a:solidFill>
+                <a:latin typeface="DejaVu Sans"/>
+                <a:ea typeface="DejaVu Sans"/>
+                <a:cs typeface="DejaVu Sans"/>
+              </a:rPr>
+              <a:t> </a:t>
+            </a:r>
+            <a:r>
+              <a:rPr sz="1650" b="0" dirty="0" err="1">
+                <a:solidFill>
+                  <a:srgbClr val="566872"/>
+                </a:solidFill>
+                <a:latin typeface="DejaVu Sans"/>
+                <a:ea typeface="DejaVu Sans"/>
+                <a:cs typeface="DejaVu Sans"/>
+              </a:rPr>
+              <a:t>повороту</a:t>
+            </a:r>
+            <a:r>
+              <a:rPr sz="1650" b="0" dirty="0">
+                <a:solidFill>
+                  <a:srgbClr val="566872"/>
+                </a:solidFill>
+                <a:latin typeface="DejaVu Sans"/>
+                <a:ea typeface="DejaVu Sans"/>
+                <a:cs typeface="DejaVu Sans"/>
+              </a:rPr>
+              <a:t> </a:t>
+            </a:r>
+            <a:r>
+              <a:rPr sz="1650" b="0" dirty="0" err="1">
+                <a:solidFill>
+                  <a:srgbClr val="566872"/>
+                </a:solidFill>
+                <a:latin typeface="DejaVu Sans"/>
+                <a:ea typeface="DejaVu Sans"/>
+                <a:cs typeface="DejaVu Sans"/>
+              </a:rPr>
+              <a:t>на</a:t>
+            </a:r>
+            <a:r>
+              <a:rPr sz="1650" b="0" dirty="0">
+                <a:solidFill>
+                  <a:srgbClr val="566872"/>
+                </a:solidFill>
+                <a:latin typeface="DejaVu Sans"/>
+                <a:ea typeface="DejaVu Sans"/>
+                <a:cs typeface="DejaVu Sans"/>
+              </a:rPr>
+              <a:t> 180° </a:t>
+            </a:r>
+            <a:r>
+              <a:rPr sz="1650" b="0" dirty="0" err="1">
+                <a:solidFill>
+                  <a:srgbClr val="566872"/>
+                </a:solidFill>
+                <a:latin typeface="DejaVu Sans"/>
+                <a:ea typeface="DejaVu Sans"/>
+                <a:cs typeface="DejaVu Sans"/>
+              </a:rPr>
+              <a:t>вокруг</a:t>
+            </a:r>
+            <a:r>
+              <a:rPr sz="1650" b="0" dirty="0">
+                <a:solidFill>
+                  <a:srgbClr val="566872"/>
+                </a:solidFill>
+                <a:latin typeface="DejaVu Sans"/>
+                <a:ea typeface="DejaVu Sans"/>
+                <a:cs typeface="DejaVu Sans"/>
+              </a:rPr>
+              <a:t> </a:t>
+            </a:r>
+            <a:r>
+              <a:rPr sz="1650" b="0" dirty="0" err="1">
+                <a:solidFill>
+                  <a:srgbClr val="566872"/>
+                </a:solidFill>
+                <a:latin typeface="DejaVu Sans"/>
+                <a:ea typeface="DejaVu Sans"/>
+                <a:cs typeface="DejaVu Sans"/>
+              </a:rPr>
+              <a:t>центра</a:t>
+            </a:r>
+            <a:r>
+              <a:rPr sz="1650" b="0" dirty="0">
+                <a:solidFill>
+                  <a:srgbClr val="566872"/>
+                </a:solidFill>
+                <a:latin typeface="DejaVu Sans"/>
+                <a:ea typeface="DejaVu Sans"/>
+                <a:cs typeface="DejaVu Sans"/>
+              </a:rPr>
+              <a:t> </a:t>
+            </a:r>
+            <a:r>
+              <a:rPr sz="1650" b="0" dirty="0" err="1">
+                <a:solidFill>
+                  <a:srgbClr val="566872"/>
+                </a:solidFill>
+                <a:latin typeface="DejaVu Sans"/>
+                <a:ea typeface="DejaVu Sans"/>
+                <a:cs typeface="DejaVu Sans"/>
+              </a:rPr>
+              <a:t>сетки</a:t>
+            </a:r>
+            <a:r>
+              <a:rPr sz="1650" b="0" dirty="0">
+                <a:solidFill>
+                  <a:srgbClr val="566872"/>
+                </a:solidFill>
+                <a:latin typeface="DejaVu Sans"/>
+                <a:ea typeface="DejaVu Sans"/>
+                <a:cs typeface="DejaVu Sans"/>
+              </a:rPr>
+              <a:t> </a:t>
+            </a:r>
+            <a:r>
+              <a:rPr sz="1650" b="0" dirty="0" err="1">
+                <a:solidFill>
+                  <a:srgbClr val="566872"/>
+                </a:solidFill>
+                <a:latin typeface="DejaVu Sans"/>
+                <a:ea typeface="DejaVu Sans"/>
+                <a:cs typeface="DejaVu Sans"/>
+              </a:rPr>
+              <a:t>пикселей</a:t>
+            </a:r>
+            <a:r>
+              <a:rPr sz="1650" b="0" dirty="0">
+                <a:solidFill>
+                  <a:srgbClr val="566872"/>
+                </a:solidFill>
+                <a:latin typeface="DejaVu Sans"/>
+                <a:ea typeface="DejaVu Sans"/>
+                <a:cs typeface="DejaVu Sans"/>
+              </a:rPr>
+              <a:t>.</a:t>
             </a:r>
           </a:p>
         </p:txBody>
